--- a/devx-audit/output/xrpl-devx-walkthrough.pptx
+++ b/devx-audit/output/xrpl-devx-walkthrough.pptx
@@ -2,24 +2,24 @@
 <file path=ppt/presentation.xml><?xml version="1.0" encoding="utf-8"?>
 <p:presentation xmlns:p="http://schemas.openxmlformats.org/presentationml/2006/main">
   <p:sldMasterIdLst>
-    <p:sldMasterId xmlns:r="http://schemas.openxmlformats.org/officeDocument/2006/relationships" id="2147483648" r:id="Rb9e186cbea914c75"/>
+    <p:sldMasterId xmlns:r="http://schemas.openxmlformats.org/officeDocument/2006/relationships" id="2147483648" r:id="R41f338263ebe4fc3"/>
   </p:sldMasterIdLst>
   <p:notesMasterIdLst>
-    <p:notesMasterId xmlns:r="http://schemas.openxmlformats.org/officeDocument/2006/relationships" r:id="Rbc0816e0bded4273"/>
+    <p:notesMasterId xmlns:r="http://schemas.openxmlformats.org/officeDocument/2006/relationships" r:id="Ref6bd65bb2dd4e94"/>
   </p:notesMasterIdLst>
   <p:sldIdLst>
-    <p:sldId xmlns:r="http://schemas.openxmlformats.org/officeDocument/2006/relationships" id="256" r:id="Rfe1c5917f03d4c4a"/>
-    <p:sldId xmlns:r="http://schemas.openxmlformats.org/officeDocument/2006/relationships" id="257" r:id="R950cecf26b634ea5"/>
-    <p:sldId xmlns:r="http://schemas.openxmlformats.org/officeDocument/2006/relationships" id="258" r:id="Rcccd954dcad54a6c"/>
-    <p:sldId xmlns:r="http://schemas.openxmlformats.org/officeDocument/2006/relationships" id="259" r:id="R1cda031038884552"/>
-    <p:sldId xmlns:r="http://schemas.openxmlformats.org/officeDocument/2006/relationships" id="260" r:id="Rfd8be5601ddc4f6a"/>
-    <p:sldId xmlns:r="http://schemas.openxmlformats.org/officeDocument/2006/relationships" id="261" r:id="R1a48cf5e0e184010"/>
-    <p:sldId xmlns:r="http://schemas.openxmlformats.org/officeDocument/2006/relationships" id="262" r:id="R70b2f88433e24b2c"/>
-    <p:sldId xmlns:r="http://schemas.openxmlformats.org/officeDocument/2006/relationships" id="263" r:id="R74c603b686cf4861"/>
-    <p:sldId xmlns:r="http://schemas.openxmlformats.org/officeDocument/2006/relationships" id="264" r:id="R4bd5ea4a304444e7"/>
-    <p:sldId xmlns:r="http://schemas.openxmlformats.org/officeDocument/2006/relationships" id="265" r:id="Rd45f2359095242e8"/>
-    <p:sldId xmlns:r="http://schemas.openxmlformats.org/officeDocument/2006/relationships" id="266" r:id="R6ee99485ad8e4e05"/>
-    <p:sldId xmlns:r="http://schemas.openxmlformats.org/officeDocument/2006/relationships" id="267" r:id="R44d87ef00d9b4293"/>
+    <p:sldId xmlns:r="http://schemas.openxmlformats.org/officeDocument/2006/relationships" id="256" r:id="R94bfa6e3d8cb477c"/>
+    <p:sldId xmlns:r="http://schemas.openxmlformats.org/officeDocument/2006/relationships" id="257" r:id="R48d1be83367a4db6"/>
+    <p:sldId xmlns:r="http://schemas.openxmlformats.org/officeDocument/2006/relationships" id="258" r:id="R8046767a040d4e86"/>
+    <p:sldId xmlns:r="http://schemas.openxmlformats.org/officeDocument/2006/relationships" id="259" r:id="Rf329490c45114aab"/>
+    <p:sldId xmlns:r="http://schemas.openxmlformats.org/officeDocument/2006/relationships" id="260" r:id="R0f04d047285a48cd"/>
+    <p:sldId xmlns:r="http://schemas.openxmlformats.org/officeDocument/2006/relationships" id="261" r:id="R47500f43bd814d80"/>
+    <p:sldId xmlns:r="http://schemas.openxmlformats.org/officeDocument/2006/relationships" id="262" r:id="R4c713b769d6f48cb"/>
+    <p:sldId xmlns:r="http://schemas.openxmlformats.org/officeDocument/2006/relationships" id="263" r:id="R4ec9352cbe0841b7"/>
+    <p:sldId xmlns:r="http://schemas.openxmlformats.org/officeDocument/2006/relationships" id="264" r:id="Rfec46f70d2ff4f82"/>
+    <p:sldId xmlns:r="http://schemas.openxmlformats.org/officeDocument/2006/relationships" id="265" r:id="R7e87908a953342b3"/>
+    <p:sldId xmlns:r="http://schemas.openxmlformats.org/officeDocument/2006/relationships" id="266" r:id="R22791e3ff8344588"/>
+    <p:sldId xmlns:r="http://schemas.openxmlformats.org/officeDocument/2006/relationships" id="267" r:id="Rc42d0992cc9a4c4c"/>
   </p:sldIdLst>
   <p:sldSz cx="12192000" cy="6858000"/>
   <p:notesSz cx="6858000" cy="9144000"/>
@@ -973,7 +973,7 @@
           <a:lstStyle xmlns:a="http://schemas.openxmlformats.org/drawingml/2006/main"/>
           <a:p xmlns:a="http://schemas.openxmlformats.org/drawingml/2006/main">
             <a:r>
-              <a:t>The identical draft below uses satisfies Payment. On published5.3.0 it compiles because BaseTransaction extends Record&lt;string,unknown&gt;. The candidate rejects DestinationTagg and suggests DestinationTag. Separate probes verify direct generic request and submission calls, valid inputs, and Omit preserving other required fields. This is not a claim that all invalid transactions can be rejected statically.</a:t>
+              <a:t>The retained published example names Payment with satisfies, but its typo still compiles because BaseTransaction extends Record&lt;string,unknown&gt;. The proposed experience passes the literal directly to submitAndWait. TransactionType drives Payment completions; DestinationTagg is rejected without an extra annotation. Separate probes verify direct generic request and submission calls, valid inputs, and Omit preserving other required fields. This is not a claim that all invalid transactions can be rejected statically.</a:t>
             </a:r>
           </a:p>
           <a:p xmlns:a="http://schemas.openxmlformats.org/drawingml/2006/main">
@@ -1198,7 +1198,7 @@
           <a:lstStyle xmlns:a="http://schemas.openxmlformats.org/drawingml/2006/main"/>
           <a:p xmlns:a="http://schemas.openxmlformats.org/drawingml/2006/main">
             <a:r>
-              <a:t>The prototype validates its promised metadata shape at runtime before presenting a validated parsed response. It does not equate validation with tesSUCCESS. Domain absence checks also remain. Across four paired workflows5 parsed guards,2 ledger-kind comparisons and1 autofill generic disappear. These are source-scaffolding counts, not time-saved or quality-score claims.</a:t>
+              <a:t>The prototype validates its promised metadata shape at runtime before presenting a validated parsed response. It does not equate validation with tesSUCCESS. Domain absence checks also remain. Across four paired workflows5 parsed guards,2 ledger-kind comparisons and1 autofill generic disappear. Getting Started also removes2 satisfies clauses and1 redundant validate call. The main walkthrough now uses the prototype; its5.3.0 comparison is retained separately. Five editor checks and positive/negative real-ledger Getting Started runs pass. These are source-scaffolding counts, not time-saved or quality-score claims.</a:t>
             </a:r>
           </a:p>
           <a:p xmlns:a="http://schemas.openxmlformats.org/drawingml/2006/main">
@@ -1346,7 +1346,7 @@
   </p:cSld>
   <p:clrMap bg1="lt1" tx1="dk1" bg2="lt2" tx2="dk2" accent1="accent1" accent2="accent2" accent3="accent3" accent4="accent4" accent5="accent5" accent6="accent6" hlink="hlink" folHlink="folHlink"/>
   <p:sldLayoutIdLst>
-    <p:sldLayoutId xmlns:r="http://schemas.openxmlformats.org/officeDocument/2006/relationships" id="2147483649" r:id="R86fc59cef4cc4bd9"/>
+    <p:sldLayoutId xmlns:r="http://schemas.openxmlformats.org/officeDocument/2006/relationships" id="2147483649" r:id="R7a017d10b17f4db0"/>
   </p:sldLayoutIdLst>
   <p:txStyles>
     <p:titleStyle>
@@ -1897,7 +1897,7 @@
           <p:cNvPr id="5" name="">
             <a:extLst xmlns:a="http://schemas.openxmlformats.org/drawingml/2006/main">
               <a:ext uri="{FF2B5EF4-FFF2-40B4-BE49-F238E27FC236}">
-                <a16:creationId xmlns:a16="http://schemas.microsoft.com/office/drawing/2014/main" id="{0083F6C9-064E-4AC0-BC22-FD7950EB0E69}"/>
+                <a16:creationId xmlns:a16="http://schemas.microsoft.com/office/drawing/2014/main" id="{1AFB3E0D-0A86-475C-8333-6440C07C64D4}"/>
               </a:ext>
             </a:extLst>
           </p:cNvPr>
@@ -1977,7 +1977,7 @@
           <p:cNvPr id="2" name="">
             <a:extLst xmlns:a="http://schemas.openxmlformats.org/drawingml/2006/main">
               <a:ext uri="{FF2B5EF4-FFF2-40B4-BE49-F238E27FC236}">
-                <a16:creationId xmlns:a16="http://schemas.microsoft.com/office/drawing/2014/main" id="{CA77416B-3E3A-4FC1-99CE-08A0B1325E91}"/>
+                <a16:creationId xmlns:a16="http://schemas.microsoft.com/office/drawing/2014/main" id="{5AD31F58-716D-4E0F-8F53-7244230247DC}"/>
               </a:ext>
             </a:extLst>
           </p:cNvPr>
@@ -2034,7 +2034,7 @@
           <p:cNvPr id="3" name="">
             <a:extLst xmlns:a="http://schemas.openxmlformats.org/drawingml/2006/main">
               <a:ext uri="{FF2B5EF4-FFF2-40B4-BE49-F238E27FC236}">
-                <a16:creationId xmlns:a16="http://schemas.microsoft.com/office/drawing/2014/main" id="{729ED2C2-6CE8-4694-A7FB-88FE7A1C49BF}"/>
+                <a16:creationId xmlns:a16="http://schemas.microsoft.com/office/drawing/2014/main" id="{6FE1112A-2C6A-4D1F-9010-5B6B14C54F3F}"/>
               </a:ext>
             </a:extLst>
           </p:cNvPr>
@@ -2114,7 +2114,7 @@
           <p:cNvPr id="4" name="">
             <a:extLst xmlns:a="http://schemas.openxmlformats.org/drawingml/2006/main">
               <a:ext uri="{FF2B5EF4-FFF2-40B4-BE49-F238E27FC236}">
-                <a16:creationId xmlns:a16="http://schemas.microsoft.com/office/drawing/2014/main" id="{AD7ED854-66F7-4D0A-9500-5B7E16E53A87}"/>
+                <a16:creationId xmlns:a16="http://schemas.microsoft.com/office/drawing/2014/main" id="{0E3506ED-EDBD-4D46-B276-AD8C2DCA8C5F}"/>
               </a:ext>
             </a:extLst>
           </p:cNvPr>
@@ -2192,7 +2192,7 @@
     </p:spTree>
     <p:extLst>
       <p:ext uri="{BB962C8B-B14F-4D97-AF65-F5344CB8AC3E}">
-        <p14:creationId xmlns:p14="http://schemas.microsoft.com/office/powerpoint/2010/main" val="1360643397"/>
+        <p14:creationId xmlns:p14="http://schemas.microsoft.com/office/powerpoint/2010/main" val="342263749"/>
       </p:ext>
     </p:extLst>
   </p:cSld>
@@ -2223,7 +2223,7 @@
           <p:cNvPr id="12" name="">
             <a:extLst xmlns:a="http://schemas.openxmlformats.org/drawingml/2006/main">
               <a:ext uri="{FF2B5EF4-FFF2-40B4-BE49-F238E27FC236}">
-                <a16:creationId xmlns:a16="http://schemas.microsoft.com/office/drawing/2014/main" id="{36D78879-5F73-4866-A610-B547B0341EE7}"/>
+                <a16:creationId xmlns:a16="http://schemas.microsoft.com/office/drawing/2014/main" id="{278A3353-3007-4659-AD62-B12E6B6D3DE6}"/>
               </a:ext>
             </a:extLst>
           </p:cNvPr>
@@ -2280,7 +2280,7 @@
           <p:cNvPr id="2" name="">
             <a:extLst xmlns:a="http://schemas.openxmlformats.org/drawingml/2006/main">
               <a:ext uri="{FF2B5EF4-FFF2-40B4-BE49-F238E27FC236}">
-                <a16:creationId xmlns:a16="http://schemas.microsoft.com/office/drawing/2014/main" id="{EC16CE12-13CF-49C0-AA57-E2A9FEE675C2}"/>
+                <a16:creationId xmlns:a16="http://schemas.microsoft.com/office/drawing/2014/main" id="{93343E67-D064-43FF-AAE9-1C30531107BB}"/>
               </a:ext>
             </a:extLst>
           </p:cNvPr>
@@ -2337,7 +2337,7 @@
           <p:cNvPr id="3" name="">
             <a:extLst xmlns:a="http://schemas.openxmlformats.org/drawingml/2006/main">
               <a:ext uri="{FF2B5EF4-FFF2-40B4-BE49-F238E27FC236}">
-                <a16:creationId xmlns:a16="http://schemas.microsoft.com/office/drawing/2014/main" id="{56D9B3A9-4AC3-49AF-AC7E-BBE5220AF32C}"/>
+                <a16:creationId xmlns:a16="http://schemas.microsoft.com/office/drawing/2014/main" id="{1E9C44BB-44F4-43C6-B542-F5A21F6861F4}"/>
               </a:ext>
             </a:extLst>
           </p:cNvPr>
@@ -2394,7 +2394,7 @@
           <p:cNvPr id="4" name="">
             <a:extLst xmlns:a="http://schemas.openxmlformats.org/drawingml/2006/main">
               <a:ext uri="{FF2B5EF4-FFF2-40B4-BE49-F238E27FC236}">
-                <a16:creationId xmlns:a16="http://schemas.microsoft.com/office/drawing/2014/main" id="{F49DBAAB-5BCE-466D-BCBF-259FC5D03AAA}"/>
+                <a16:creationId xmlns:a16="http://schemas.microsoft.com/office/drawing/2014/main" id="{774CB688-A8F9-4C85-8693-E3B96991118F}"/>
               </a:ext>
             </a:extLst>
           </p:cNvPr>
@@ -2451,7 +2451,7 @@
           <p:cNvPr id="5" name="">
             <a:extLst xmlns:a="http://schemas.openxmlformats.org/drawingml/2006/main">
               <a:ext uri="{FF2B5EF4-FFF2-40B4-BE49-F238E27FC236}">
-                <a16:creationId xmlns:a16="http://schemas.microsoft.com/office/drawing/2014/main" id="{BFED5486-F42D-4753-9745-8A72D4767392}"/>
+                <a16:creationId xmlns:a16="http://schemas.microsoft.com/office/drawing/2014/main" id="{41A00E98-01F8-47D5-825E-B12690A807FE}"/>
               </a:ext>
             </a:extLst>
           </p:cNvPr>
@@ -2508,7 +2508,7 @@
           <p:cNvPr id="6" name="">
             <a:extLst xmlns:a="http://schemas.openxmlformats.org/drawingml/2006/main">
               <a:ext uri="{FF2B5EF4-FFF2-40B4-BE49-F238E27FC236}">
-                <a16:creationId xmlns:a16="http://schemas.microsoft.com/office/drawing/2014/main" id="{8AB7CA77-9160-451D-A324-CFEC1261745E}"/>
+                <a16:creationId xmlns:a16="http://schemas.microsoft.com/office/drawing/2014/main" id="{30D387A9-7BF4-40FE-9636-01862AD6FC81}"/>
               </a:ext>
             </a:extLst>
           </p:cNvPr>
@@ -2565,7 +2565,7 @@
           <p:cNvPr id="7" name="">
             <a:extLst xmlns:a="http://schemas.openxmlformats.org/drawingml/2006/main">
               <a:ext uri="{FF2B5EF4-FFF2-40B4-BE49-F238E27FC236}">
-                <a16:creationId xmlns:a16="http://schemas.microsoft.com/office/drawing/2014/main" id="{8E8FF009-EFC7-4A31-AEA4-8818BF0A0F25}"/>
+                <a16:creationId xmlns:a16="http://schemas.microsoft.com/office/drawing/2014/main" id="{46F5F9D2-79A9-4ECA-9D21-3986D78267C5}"/>
               </a:ext>
             </a:extLst>
           </p:cNvPr>
@@ -2622,7 +2622,7 @@
           <p:cNvPr id="8" name="">
             <a:extLst xmlns:a="http://schemas.openxmlformats.org/drawingml/2006/main">
               <a:ext uri="{FF2B5EF4-FFF2-40B4-BE49-F238E27FC236}">
-                <a16:creationId xmlns:a16="http://schemas.microsoft.com/office/drawing/2014/main" id="{21B13FA9-BC4E-4357-A68E-5D0EFC1027CF}"/>
+                <a16:creationId xmlns:a16="http://schemas.microsoft.com/office/drawing/2014/main" id="{127EE18A-2BE5-4B47-ADB4-70601CC67188}"/>
               </a:ext>
             </a:extLst>
           </p:cNvPr>
@@ -2679,7 +2679,7 @@
           <p:cNvPr id="9" name="">
             <a:extLst xmlns:a="http://schemas.openxmlformats.org/drawingml/2006/main">
               <a:ext uri="{FF2B5EF4-FFF2-40B4-BE49-F238E27FC236}">
-                <a16:creationId xmlns:a16="http://schemas.microsoft.com/office/drawing/2014/main" id="{D6059348-2B67-4552-92A1-6FC234E4EB37}"/>
+                <a16:creationId xmlns:a16="http://schemas.microsoft.com/office/drawing/2014/main" id="{B850CD7A-F56A-4988-A9A9-F40C35FE8057}"/>
               </a:ext>
             </a:extLst>
           </p:cNvPr>
@@ -2736,7 +2736,7 @@
           <p:cNvPr id="10" name="">
             <a:extLst xmlns:a="http://schemas.openxmlformats.org/drawingml/2006/main">
               <a:ext uri="{FF2B5EF4-FFF2-40B4-BE49-F238E27FC236}">
-                <a16:creationId xmlns:a16="http://schemas.microsoft.com/office/drawing/2014/main" id="{6A1BD701-14CF-4A5B-9A84-738C5EB944C6}"/>
+                <a16:creationId xmlns:a16="http://schemas.microsoft.com/office/drawing/2014/main" id="{9506D55F-5D2D-45FC-9648-E4AAE0D84384}"/>
               </a:ext>
             </a:extLst>
           </p:cNvPr>
@@ -2793,7 +2793,7 @@
           <p:cNvPr id="11" name="">
             <a:extLst xmlns:a="http://schemas.openxmlformats.org/drawingml/2006/main">
               <a:ext uri="{FF2B5EF4-FFF2-40B4-BE49-F238E27FC236}">
-                <a16:creationId xmlns:a16="http://schemas.microsoft.com/office/drawing/2014/main" id="{D0448F4E-2581-446F-AB92-E08C1B53E9BF}"/>
+                <a16:creationId xmlns:a16="http://schemas.microsoft.com/office/drawing/2014/main" id="{FD44704D-5413-4017-AFDF-BB6CFFEB7A7E}"/>
               </a:ext>
             </a:extLst>
           </p:cNvPr>
@@ -2848,7 +2848,7 @@
     </p:spTree>
     <p:extLst>
       <p:ext uri="{BB962C8B-B14F-4D97-AF65-F5344CB8AC3E}">
-        <p14:creationId xmlns:p14="http://schemas.microsoft.com/office/powerpoint/2010/main" val="1552719397"/>
+        <p14:creationId xmlns:p14="http://schemas.microsoft.com/office/powerpoint/2010/main" val="1913727199"/>
       </p:ext>
     </p:extLst>
   </p:cSld>
@@ -2879,7 +2879,7 @@
           <p:cNvPr id="11" name="">
             <a:extLst xmlns:a="http://schemas.openxmlformats.org/drawingml/2006/main">
               <a:ext uri="{FF2B5EF4-FFF2-40B4-BE49-F238E27FC236}">
-                <a16:creationId xmlns:a16="http://schemas.microsoft.com/office/drawing/2014/main" id="{EE311292-90B9-448A-822E-9D498FD8DBDC}"/>
+                <a16:creationId xmlns:a16="http://schemas.microsoft.com/office/drawing/2014/main" id="{E58852E3-FC2D-4ED7-AE53-AA70647E3FE3}"/>
               </a:ext>
             </a:extLst>
           </p:cNvPr>
@@ -2936,7 +2936,7 @@
           <p:cNvPr id="2" name="">
             <a:extLst xmlns:a="http://schemas.openxmlformats.org/drawingml/2006/main">
               <a:ext uri="{FF2B5EF4-FFF2-40B4-BE49-F238E27FC236}">
-                <a16:creationId xmlns:a16="http://schemas.microsoft.com/office/drawing/2014/main" id="{3FD85FA0-5A06-4197-8B90-46022FF4C3A0}"/>
+                <a16:creationId xmlns:a16="http://schemas.microsoft.com/office/drawing/2014/main" id="{6D73994C-55DC-43B5-9F66-811F05EB7661}"/>
               </a:ext>
             </a:extLst>
           </p:cNvPr>
@@ -2993,7 +2993,7 @@
           <p:cNvPr id="3" name="">
             <a:extLst xmlns:a="http://schemas.openxmlformats.org/drawingml/2006/main">
               <a:ext uri="{FF2B5EF4-FFF2-40B4-BE49-F238E27FC236}">
-                <a16:creationId xmlns:a16="http://schemas.microsoft.com/office/drawing/2014/main" id="{14ADAC8A-3481-4B03-93CD-C8F054DD7E7E}"/>
+                <a16:creationId xmlns:a16="http://schemas.microsoft.com/office/drawing/2014/main" id="{41ADF466-3375-4257-B7E8-0963D5F850D8}"/>
               </a:ext>
             </a:extLst>
           </p:cNvPr>
@@ -3050,7 +3050,7 @@
           <p:cNvPr id="4" name="">
             <a:extLst xmlns:a="http://schemas.openxmlformats.org/drawingml/2006/main">
               <a:ext uri="{FF2B5EF4-FFF2-40B4-BE49-F238E27FC236}">
-                <a16:creationId xmlns:a16="http://schemas.microsoft.com/office/drawing/2014/main" id="{0344AAE0-4029-41E3-AA91-E072F89DB0EC}"/>
+                <a16:creationId xmlns:a16="http://schemas.microsoft.com/office/drawing/2014/main" id="{666582C4-98F0-47B8-B64B-79D31B785B2F}"/>
               </a:ext>
             </a:extLst>
           </p:cNvPr>
@@ -3107,7 +3107,7 @@
           <p:cNvPr id="5" name="">
             <a:extLst xmlns:a="http://schemas.openxmlformats.org/drawingml/2006/main">
               <a:ext uri="{FF2B5EF4-FFF2-40B4-BE49-F238E27FC236}">
-                <a16:creationId xmlns:a16="http://schemas.microsoft.com/office/drawing/2014/main" id="{E37FB388-DF7B-4CFC-99E6-501CDB2F9C7D}"/>
+                <a16:creationId xmlns:a16="http://schemas.microsoft.com/office/drawing/2014/main" id="{06F07AA9-AA9D-4409-8077-B980FE60C1E7}"/>
               </a:ext>
             </a:extLst>
           </p:cNvPr>
@@ -3164,7 +3164,7 @@
           <p:cNvPr id="6" name="">
             <a:extLst xmlns:a="http://schemas.openxmlformats.org/drawingml/2006/main">
               <a:ext uri="{FF2B5EF4-FFF2-40B4-BE49-F238E27FC236}">
-                <a16:creationId xmlns:a16="http://schemas.microsoft.com/office/drawing/2014/main" id="{24E9C66E-9C36-4A16-B03E-0EB7F1605B7B}"/>
+                <a16:creationId xmlns:a16="http://schemas.microsoft.com/office/drawing/2014/main" id="{01FE8BCA-F2CC-4A9F-8485-B37E7DE16853}"/>
               </a:ext>
             </a:extLst>
           </p:cNvPr>
@@ -3221,7 +3221,7 @@
           <p:cNvPr id="7" name="">
             <a:extLst xmlns:a="http://schemas.openxmlformats.org/drawingml/2006/main">
               <a:ext uri="{FF2B5EF4-FFF2-40B4-BE49-F238E27FC236}">
-                <a16:creationId xmlns:a16="http://schemas.microsoft.com/office/drawing/2014/main" id="{5D5935C5-8CBC-45E8-A6ED-53977146F813}"/>
+                <a16:creationId xmlns:a16="http://schemas.microsoft.com/office/drawing/2014/main" id="{32CE7D57-1E5E-42F3-A482-2D1D2F1B5EE1}"/>
               </a:ext>
             </a:extLst>
           </p:cNvPr>
@@ -3278,7 +3278,7 @@
           <p:cNvPr id="8" name="">
             <a:extLst xmlns:a="http://schemas.openxmlformats.org/drawingml/2006/main">
               <a:ext uri="{FF2B5EF4-FFF2-40B4-BE49-F238E27FC236}">
-                <a16:creationId xmlns:a16="http://schemas.microsoft.com/office/drawing/2014/main" id="{D8D70723-E528-45C7-9579-F863285DD739}"/>
+                <a16:creationId xmlns:a16="http://schemas.microsoft.com/office/drawing/2014/main" id="{22C97FC2-583C-4586-A7A8-EC0F16402513}"/>
               </a:ext>
             </a:extLst>
           </p:cNvPr>
@@ -3335,7 +3335,7 @@
           <p:cNvPr id="9" name="">
             <a:extLst xmlns:a="http://schemas.openxmlformats.org/drawingml/2006/main">
               <a:ext uri="{FF2B5EF4-FFF2-40B4-BE49-F238E27FC236}">
-                <a16:creationId xmlns:a16="http://schemas.microsoft.com/office/drawing/2014/main" id="{AD2C44D3-781D-4AFA-A07F-EF532CEDF16D}"/>
+                <a16:creationId xmlns:a16="http://schemas.microsoft.com/office/drawing/2014/main" id="{36C1B411-DA4F-44CA-9B90-6BD1436D4969}"/>
               </a:ext>
             </a:extLst>
           </p:cNvPr>
@@ -3392,7 +3392,7 @@
           <p:cNvPr id="10" name="">
             <a:extLst xmlns:a="http://schemas.openxmlformats.org/drawingml/2006/main">
               <a:ext uri="{FF2B5EF4-FFF2-40B4-BE49-F238E27FC236}">
-                <a16:creationId xmlns:a16="http://schemas.microsoft.com/office/drawing/2014/main" id="{9B000D1A-41D3-438F-8135-07B8DCDBCC73}"/>
+                <a16:creationId xmlns:a16="http://schemas.microsoft.com/office/drawing/2014/main" id="{AA723140-7B4B-49DB-9E01-B86F4B9FFCE8}"/>
               </a:ext>
             </a:extLst>
           </p:cNvPr>
@@ -3447,7 +3447,7 @@
     </p:spTree>
     <p:extLst>
       <p:ext uri="{BB962C8B-B14F-4D97-AF65-F5344CB8AC3E}">
-        <p14:creationId xmlns:p14="http://schemas.microsoft.com/office/powerpoint/2010/main" val="1625911739"/>
+        <p14:creationId xmlns:p14="http://schemas.microsoft.com/office/powerpoint/2010/main" val="2120012563"/>
       </p:ext>
     </p:extLst>
   </p:cSld>
@@ -3478,7 +3478,7 @@
           <p:cNvPr id="6" name="">
             <a:extLst xmlns:a="http://schemas.openxmlformats.org/drawingml/2006/main">
               <a:ext uri="{FF2B5EF4-FFF2-40B4-BE49-F238E27FC236}">
-                <a16:creationId xmlns:a16="http://schemas.microsoft.com/office/drawing/2014/main" id="{9285CC9F-73FE-44B4-A9BB-0EEFFC5D6A61}"/>
+                <a16:creationId xmlns:a16="http://schemas.microsoft.com/office/drawing/2014/main" id="{A31D84BE-8BCD-42C0-8882-7E6C89CB5AD3}"/>
               </a:ext>
             </a:extLst>
           </p:cNvPr>
@@ -3535,7 +3535,7 @@
           <p:cNvPr id="2" name="">
             <a:extLst xmlns:a="http://schemas.openxmlformats.org/drawingml/2006/main">
               <a:ext uri="{FF2B5EF4-FFF2-40B4-BE49-F238E27FC236}">
-                <a16:creationId xmlns:a16="http://schemas.microsoft.com/office/drawing/2014/main" id="{434F81D9-B9D1-48B1-8C1B-E317518038E5}"/>
+                <a16:creationId xmlns:a16="http://schemas.microsoft.com/office/drawing/2014/main" id="{3530068A-D368-4750-9EE6-C27215FE8BE8}"/>
               </a:ext>
             </a:extLst>
           </p:cNvPr>
@@ -3592,7 +3592,7 @@
           <p:cNvPr id="3" name="">
             <a:extLst xmlns:a="http://schemas.openxmlformats.org/drawingml/2006/main">
               <a:ext uri="{FF2B5EF4-FFF2-40B4-BE49-F238E27FC236}">
-                <a16:creationId xmlns:a16="http://schemas.microsoft.com/office/drawing/2014/main" id="{5C40AC95-27DB-47C7-BB10-C0C64DB940FB}"/>
+                <a16:creationId xmlns:a16="http://schemas.microsoft.com/office/drawing/2014/main" id="{C124748E-8E90-46F4-A977-A930310E6536}"/>
               </a:ext>
             </a:extLst>
           </p:cNvPr>
@@ -3672,7 +3672,7 @@
           <p:cNvPr id="4" name="">
             <a:extLst xmlns:a="http://schemas.openxmlformats.org/drawingml/2006/main">
               <a:ext uri="{FF2B5EF4-FFF2-40B4-BE49-F238E27FC236}">
-                <a16:creationId xmlns:a16="http://schemas.microsoft.com/office/drawing/2014/main" id="{1C5ACAFE-11FC-4D98-9EA9-6CCA6B31FED3}"/>
+                <a16:creationId xmlns:a16="http://schemas.microsoft.com/office/drawing/2014/main" id="{95ACB529-0B7D-4F50-96F3-E0D0B82C7EEA}"/>
               </a:ext>
             </a:extLst>
           </p:cNvPr>
@@ -3752,7 +3752,7 @@
           <p:cNvPr id="5" name="">
             <a:extLst xmlns:a="http://schemas.openxmlformats.org/drawingml/2006/main">
               <a:ext uri="{FF2B5EF4-FFF2-40B4-BE49-F238E27FC236}">
-                <a16:creationId xmlns:a16="http://schemas.microsoft.com/office/drawing/2014/main" id="{B928963D-9603-4A99-936E-78C82DC5B240}"/>
+                <a16:creationId xmlns:a16="http://schemas.microsoft.com/office/drawing/2014/main" id="{449D94FE-7AC4-43F8-B8B0-90B3E5865D36}"/>
               </a:ext>
             </a:extLst>
           </p:cNvPr>
@@ -3830,7 +3830,7 @@
     </p:spTree>
     <p:extLst>
       <p:ext uri="{BB962C8B-B14F-4D97-AF65-F5344CB8AC3E}">
-        <p14:creationId xmlns:p14="http://schemas.microsoft.com/office/powerpoint/2010/main" val="217330017"/>
+        <p14:creationId xmlns:p14="http://schemas.microsoft.com/office/powerpoint/2010/main" val="292383290"/>
       </p:ext>
     </p:extLst>
   </p:cSld>
@@ -3861,7 +3861,7 @@
           <p:cNvPr id="11" name="">
             <a:extLst xmlns:a="http://schemas.openxmlformats.org/drawingml/2006/main">
               <a:ext uri="{FF2B5EF4-FFF2-40B4-BE49-F238E27FC236}">
-                <a16:creationId xmlns:a16="http://schemas.microsoft.com/office/drawing/2014/main" id="{F062B7A1-8180-431A-A2B5-CAA20AB5E46A}"/>
+                <a16:creationId xmlns:a16="http://schemas.microsoft.com/office/drawing/2014/main" id="{7FE74C74-BBA8-43C1-A4E4-08FBBCE20A7E}"/>
               </a:ext>
             </a:extLst>
           </p:cNvPr>
@@ -3918,7 +3918,7 @@
           <p:cNvPr id="2" name="">
             <a:extLst xmlns:a="http://schemas.openxmlformats.org/drawingml/2006/main">
               <a:ext uri="{FF2B5EF4-FFF2-40B4-BE49-F238E27FC236}">
-                <a16:creationId xmlns:a16="http://schemas.microsoft.com/office/drawing/2014/main" id="{3B4A5A89-65D8-4874-AAC8-7361F0616646}"/>
+                <a16:creationId xmlns:a16="http://schemas.microsoft.com/office/drawing/2014/main" id="{E1B71178-BF23-487D-BB8F-C81273CC5D75}"/>
               </a:ext>
             </a:extLst>
           </p:cNvPr>
@@ -3975,7 +3975,7 @@
           <p:cNvPr id="3" name="">
             <a:extLst xmlns:a="http://schemas.openxmlformats.org/drawingml/2006/main">
               <a:ext uri="{FF2B5EF4-FFF2-40B4-BE49-F238E27FC236}">
-                <a16:creationId xmlns:a16="http://schemas.microsoft.com/office/drawing/2014/main" id="{78CB4F18-E811-478F-96CB-BC998AB88DDD}"/>
+                <a16:creationId xmlns:a16="http://schemas.microsoft.com/office/drawing/2014/main" id="{44860BDA-259C-4EB9-911D-CC455EC3FB99}"/>
               </a:ext>
             </a:extLst>
           </p:cNvPr>
@@ -4032,7 +4032,7 @@
           <p:cNvPr id="4" name="">
             <a:extLst xmlns:a="http://schemas.openxmlformats.org/drawingml/2006/main">
               <a:ext uri="{FF2B5EF4-FFF2-40B4-BE49-F238E27FC236}">
-                <a16:creationId xmlns:a16="http://schemas.microsoft.com/office/drawing/2014/main" id="{1CE869EB-0585-4C61-BF27-D01231B1FE99}"/>
+                <a16:creationId xmlns:a16="http://schemas.microsoft.com/office/drawing/2014/main" id="{38A27848-EA0B-4F9B-9E1B-3295BA50F872}"/>
               </a:ext>
             </a:extLst>
           </p:cNvPr>
@@ -4089,7 +4089,7 @@
           <p:cNvPr id="5" name="">
             <a:extLst xmlns:a="http://schemas.openxmlformats.org/drawingml/2006/main">
               <a:ext uri="{FF2B5EF4-FFF2-40B4-BE49-F238E27FC236}">
-                <a16:creationId xmlns:a16="http://schemas.microsoft.com/office/drawing/2014/main" id="{CAB0E76D-C14F-4855-9BE1-FDEB239B603C}"/>
+                <a16:creationId xmlns:a16="http://schemas.microsoft.com/office/drawing/2014/main" id="{94CA72B3-6D1D-4940-93B2-7D8AE242FBAF}"/>
               </a:ext>
             </a:extLst>
           </p:cNvPr>
@@ -4169,7 +4169,7 @@
           <p:cNvPr id="6" name="">
             <a:extLst xmlns:a="http://schemas.openxmlformats.org/drawingml/2006/main">
               <a:ext uri="{FF2B5EF4-FFF2-40B4-BE49-F238E27FC236}">
-                <a16:creationId xmlns:a16="http://schemas.microsoft.com/office/drawing/2014/main" id="{37B82FF7-BFDB-4D7A-9496-39F3EF82AF22}"/>
+                <a16:creationId xmlns:a16="http://schemas.microsoft.com/office/drawing/2014/main" id="{1C74511A-5165-4B0B-99D4-32E12B90B91A}"/>
               </a:ext>
             </a:extLst>
           </p:cNvPr>
@@ -4226,7 +4226,7 @@
           <p:cNvPr id="7" name="">
             <a:extLst xmlns:a="http://schemas.openxmlformats.org/drawingml/2006/main">
               <a:ext uri="{FF2B5EF4-FFF2-40B4-BE49-F238E27FC236}">
-                <a16:creationId xmlns:a16="http://schemas.microsoft.com/office/drawing/2014/main" id="{B0AC9EC7-83DB-4A79-AC72-653E9F689F96}"/>
+                <a16:creationId xmlns:a16="http://schemas.microsoft.com/office/drawing/2014/main" id="{54316E95-5A13-4531-B292-FEAC4A2CFF2F}"/>
               </a:ext>
             </a:extLst>
           </p:cNvPr>
@@ -4306,7 +4306,7 @@
           <p:cNvPr id="8" name="">
             <a:extLst xmlns:a="http://schemas.openxmlformats.org/drawingml/2006/main">
               <a:ext uri="{FF2B5EF4-FFF2-40B4-BE49-F238E27FC236}">
-                <a16:creationId xmlns:a16="http://schemas.microsoft.com/office/drawing/2014/main" id="{EBA12308-ED6D-411F-9EEF-5B65A1CC13A8}"/>
+                <a16:creationId xmlns:a16="http://schemas.microsoft.com/office/drawing/2014/main" id="{01899AA3-A5A3-4C35-8EE4-47DE00C0EDA1}"/>
               </a:ext>
             </a:extLst>
           </p:cNvPr>
@@ -4363,7 +4363,7 @@
           <p:cNvPr id="9" name="">
             <a:extLst xmlns:a="http://schemas.openxmlformats.org/drawingml/2006/main">
               <a:ext uri="{FF2B5EF4-FFF2-40B4-BE49-F238E27FC236}">
-                <a16:creationId xmlns:a16="http://schemas.microsoft.com/office/drawing/2014/main" id="{90A4C5D2-BF19-4377-960A-444795B60A7A}"/>
+                <a16:creationId xmlns:a16="http://schemas.microsoft.com/office/drawing/2014/main" id="{19208BFF-572C-49B3-89A9-112C43B77E7A}"/>
               </a:ext>
             </a:extLst>
           </p:cNvPr>
@@ -4443,7 +4443,7 @@
           <p:cNvPr id="10" name="">
             <a:extLst xmlns:a="http://schemas.openxmlformats.org/drawingml/2006/main">
               <a:ext uri="{FF2B5EF4-FFF2-40B4-BE49-F238E27FC236}">
-                <a16:creationId xmlns:a16="http://schemas.microsoft.com/office/drawing/2014/main" id="{8708BE72-D542-437D-BC5C-913A83207110}"/>
+                <a16:creationId xmlns:a16="http://schemas.microsoft.com/office/drawing/2014/main" id="{1DE9DCCD-33D4-4B52-BD2A-7E9F4ABD8207}"/>
               </a:ext>
             </a:extLst>
           </p:cNvPr>
@@ -4498,7 +4498,7 @@
     </p:spTree>
     <p:extLst>
       <p:ext uri="{BB962C8B-B14F-4D97-AF65-F5344CB8AC3E}">
-        <p14:creationId xmlns:p14="http://schemas.microsoft.com/office/powerpoint/2010/main" val="1894995903"/>
+        <p14:creationId xmlns:p14="http://schemas.microsoft.com/office/powerpoint/2010/main" val="1183561894"/>
       </p:ext>
     </p:extLst>
   </p:cSld>
@@ -4529,7 +4529,7 @@
           <p:cNvPr id="11" name="">
             <a:extLst xmlns:a="http://schemas.openxmlformats.org/drawingml/2006/main">
               <a:ext uri="{FF2B5EF4-FFF2-40B4-BE49-F238E27FC236}">
-                <a16:creationId xmlns:a16="http://schemas.microsoft.com/office/drawing/2014/main" id="{F9D3F223-0823-4D5E-945C-5E788D2D5162}"/>
+                <a16:creationId xmlns:a16="http://schemas.microsoft.com/office/drawing/2014/main" id="{DE4CA4CE-FF9C-42A5-92A2-9DBCC50D4633}"/>
               </a:ext>
             </a:extLst>
           </p:cNvPr>
@@ -4586,7 +4586,7 @@
           <p:cNvPr id="2" name="">
             <a:extLst xmlns:a="http://schemas.openxmlformats.org/drawingml/2006/main">
               <a:ext uri="{FF2B5EF4-FFF2-40B4-BE49-F238E27FC236}">
-                <a16:creationId xmlns:a16="http://schemas.microsoft.com/office/drawing/2014/main" id="{813C9807-0219-434D-A1DE-163FD0042BCE}"/>
+                <a16:creationId xmlns:a16="http://schemas.microsoft.com/office/drawing/2014/main" id="{95F191A0-5301-4B9E-966A-EB9E55317B8B}"/>
               </a:ext>
             </a:extLst>
           </p:cNvPr>
@@ -4643,7 +4643,7 @@
           <p:cNvPr id="3" name="">
             <a:extLst xmlns:a="http://schemas.openxmlformats.org/drawingml/2006/main">
               <a:ext uri="{FF2B5EF4-FFF2-40B4-BE49-F238E27FC236}">
-                <a16:creationId xmlns:a16="http://schemas.microsoft.com/office/drawing/2014/main" id="{459E4880-E769-4936-A02B-DAEDDAE94668}"/>
+                <a16:creationId xmlns:a16="http://schemas.microsoft.com/office/drawing/2014/main" id="{628AF501-7F17-4B5D-8FCE-3012B7E058C3}"/>
               </a:ext>
             </a:extLst>
           </p:cNvPr>
@@ -4700,7 +4700,7 @@
           <p:cNvPr id="4" name="">
             <a:extLst xmlns:a="http://schemas.openxmlformats.org/drawingml/2006/main">
               <a:ext uri="{FF2B5EF4-FFF2-40B4-BE49-F238E27FC236}">
-                <a16:creationId xmlns:a16="http://schemas.microsoft.com/office/drawing/2014/main" id="{885DBFED-30B2-4E9F-8330-B44B5B4476A8}"/>
+                <a16:creationId xmlns:a16="http://schemas.microsoft.com/office/drawing/2014/main" id="{B1643E5C-2626-4E6E-963F-D6BE25D36969}"/>
               </a:ext>
             </a:extLst>
           </p:cNvPr>
@@ -4757,7 +4757,7 @@
           <p:cNvPr id="5" name="">
             <a:extLst xmlns:a="http://schemas.openxmlformats.org/drawingml/2006/main">
               <a:ext uri="{FF2B5EF4-FFF2-40B4-BE49-F238E27FC236}">
-                <a16:creationId xmlns:a16="http://schemas.microsoft.com/office/drawing/2014/main" id="{3202D581-EC27-4C05-BF52-9964F1588022}"/>
+                <a16:creationId xmlns:a16="http://schemas.microsoft.com/office/drawing/2014/main" id="{2217D622-4565-41E1-92E1-6BA09BC2A881}"/>
               </a:ext>
             </a:extLst>
           </p:cNvPr>
@@ -4814,7 +4814,7 @@
           <p:cNvPr id="6" name="">
             <a:extLst xmlns:a="http://schemas.openxmlformats.org/drawingml/2006/main">
               <a:ext uri="{FF2B5EF4-FFF2-40B4-BE49-F238E27FC236}">
-                <a16:creationId xmlns:a16="http://schemas.microsoft.com/office/drawing/2014/main" id="{01942CE3-B21E-4D14-97D3-4679B51FD6BB}"/>
+                <a16:creationId xmlns:a16="http://schemas.microsoft.com/office/drawing/2014/main" id="{D18483C9-28CF-4428-BCC1-E63E89035FE7}"/>
               </a:ext>
             </a:extLst>
           </p:cNvPr>
@@ -4871,7 +4871,7 @@
           <p:cNvPr id="7" name="">
             <a:extLst xmlns:a="http://schemas.openxmlformats.org/drawingml/2006/main">
               <a:ext uri="{FF2B5EF4-FFF2-40B4-BE49-F238E27FC236}">
-                <a16:creationId xmlns:a16="http://schemas.microsoft.com/office/drawing/2014/main" id="{6E3D247E-EBD5-4473-86C3-B03AFF5B554E}"/>
+                <a16:creationId xmlns:a16="http://schemas.microsoft.com/office/drawing/2014/main" id="{1270A4FD-5B99-4A8F-9F40-F8BCD0528A75}"/>
               </a:ext>
             </a:extLst>
           </p:cNvPr>
@@ -4928,7 +4928,7 @@
           <p:cNvPr id="8" name="">
             <a:extLst xmlns:a="http://schemas.openxmlformats.org/drawingml/2006/main">
               <a:ext uri="{FF2B5EF4-FFF2-40B4-BE49-F238E27FC236}">
-                <a16:creationId xmlns:a16="http://schemas.microsoft.com/office/drawing/2014/main" id="{F50C3AB3-56C5-44B5-961C-E5DC3EE995DE}"/>
+                <a16:creationId xmlns:a16="http://schemas.microsoft.com/office/drawing/2014/main" id="{8E55A1CE-AA8C-434F-9969-3D646047950A}"/>
               </a:ext>
             </a:extLst>
           </p:cNvPr>
@@ -4985,7 +4985,7 @@
           <p:cNvPr id="9" name="">
             <a:extLst xmlns:a="http://schemas.openxmlformats.org/drawingml/2006/main">
               <a:ext uri="{FF2B5EF4-FFF2-40B4-BE49-F238E27FC236}">
-                <a16:creationId xmlns:a16="http://schemas.microsoft.com/office/drawing/2014/main" id="{0A75B68E-5901-4F73-BD62-80C81E8D5C8B}"/>
+                <a16:creationId xmlns:a16="http://schemas.microsoft.com/office/drawing/2014/main" id="{2B82C485-DBD7-4AFE-BEEA-B9E476464422}"/>
               </a:ext>
             </a:extLst>
           </p:cNvPr>
@@ -5042,7 +5042,7 @@
           <p:cNvPr id="10" name="">
             <a:extLst xmlns:a="http://schemas.openxmlformats.org/drawingml/2006/main">
               <a:ext uri="{FF2B5EF4-FFF2-40B4-BE49-F238E27FC236}">
-                <a16:creationId xmlns:a16="http://schemas.microsoft.com/office/drawing/2014/main" id="{680499D0-6ED0-4326-AB55-A16FD8C091B1}"/>
+                <a16:creationId xmlns:a16="http://schemas.microsoft.com/office/drawing/2014/main" id="{109FD16D-6310-47DA-8D75-5E788B8BF2EE}"/>
               </a:ext>
             </a:extLst>
           </p:cNvPr>
@@ -5097,7 +5097,7 @@
     </p:spTree>
     <p:extLst>
       <p:ext uri="{BB962C8B-B14F-4D97-AF65-F5344CB8AC3E}">
-        <p14:creationId xmlns:p14="http://schemas.microsoft.com/office/powerpoint/2010/main" val="1188562381"/>
+        <p14:creationId xmlns:p14="http://schemas.microsoft.com/office/powerpoint/2010/main" val="770352893"/>
       </p:ext>
     </p:extLst>
   </p:cSld>
@@ -5128,7 +5128,7 @@
           <p:cNvPr id="11" name="">
             <a:extLst xmlns:a="http://schemas.openxmlformats.org/drawingml/2006/main">
               <a:ext uri="{FF2B5EF4-FFF2-40B4-BE49-F238E27FC236}">
-                <a16:creationId xmlns:a16="http://schemas.microsoft.com/office/drawing/2014/main" id="{AF02A8D5-03A2-4A38-9368-AE2F5E5438C2}"/>
+                <a16:creationId xmlns:a16="http://schemas.microsoft.com/office/drawing/2014/main" id="{89C2A355-E9C9-4515-9AC2-86A9006E66B0}"/>
               </a:ext>
             </a:extLst>
           </p:cNvPr>
@@ -5185,7 +5185,7 @@
           <p:cNvPr id="2" name="">
             <a:extLst xmlns:a="http://schemas.openxmlformats.org/drawingml/2006/main">
               <a:ext uri="{FF2B5EF4-FFF2-40B4-BE49-F238E27FC236}">
-                <a16:creationId xmlns:a16="http://schemas.microsoft.com/office/drawing/2014/main" id="{59BDCC6A-C2BF-4518-9873-FD24F555DF95}"/>
+                <a16:creationId xmlns:a16="http://schemas.microsoft.com/office/drawing/2014/main" id="{DADEDC3D-E548-4226-858F-7E49B0EE96B3}"/>
               </a:ext>
             </a:extLst>
           </p:cNvPr>
@@ -5242,7 +5242,7 @@
           <p:cNvPr id="3" name="">
             <a:extLst xmlns:a="http://schemas.openxmlformats.org/drawingml/2006/main">
               <a:ext uri="{FF2B5EF4-FFF2-40B4-BE49-F238E27FC236}">
-                <a16:creationId xmlns:a16="http://schemas.microsoft.com/office/drawing/2014/main" id="{7BA88012-487B-411B-BD67-A051A9A58B9C}"/>
+                <a16:creationId xmlns:a16="http://schemas.microsoft.com/office/drawing/2014/main" id="{43FB1909-6087-431E-879F-50F136215AF6}"/>
               </a:ext>
             </a:extLst>
           </p:cNvPr>
@@ -5299,7 +5299,7 @@
           <p:cNvPr id="4" name="">
             <a:extLst xmlns:a="http://schemas.openxmlformats.org/drawingml/2006/main">
               <a:ext uri="{FF2B5EF4-FFF2-40B4-BE49-F238E27FC236}">
-                <a16:creationId xmlns:a16="http://schemas.microsoft.com/office/drawing/2014/main" id="{6E29F4AC-5006-452A-BE29-4320689CD864}"/>
+                <a16:creationId xmlns:a16="http://schemas.microsoft.com/office/drawing/2014/main" id="{356C24F0-60CB-418D-BE0E-DCCC93F9DB19}"/>
               </a:ext>
             </a:extLst>
           </p:cNvPr>
@@ -5356,7 +5356,7 @@
           <p:cNvPr id="5" name="">
             <a:extLst xmlns:a="http://schemas.openxmlformats.org/drawingml/2006/main">
               <a:ext uri="{FF2B5EF4-FFF2-40B4-BE49-F238E27FC236}">
-                <a16:creationId xmlns:a16="http://schemas.microsoft.com/office/drawing/2014/main" id="{7756D588-FCF4-4F0D-95BC-FBFAEAE325ED}"/>
+                <a16:creationId xmlns:a16="http://schemas.microsoft.com/office/drawing/2014/main" id="{82D8E55C-1C1F-45DA-9978-993DA829AECE}"/>
               </a:ext>
             </a:extLst>
           </p:cNvPr>
@@ -5413,7 +5413,7 @@
           <p:cNvPr id="6" name="">
             <a:extLst xmlns:a="http://schemas.openxmlformats.org/drawingml/2006/main">
               <a:ext uri="{FF2B5EF4-FFF2-40B4-BE49-F238E27FC236}">
-                <a16:creationId xmlns:a16="http://schemas.microsoft.com/office/drawing/2014/main" id="{0D6092E1-E017-4704-8F71-28904F3D9471}"/>
+                <a16:creationId xmlns:a16="http://schemas.microsoft.com/office/drawing/2014/main" id="{F7EDDDF7-430B-4EE8-9D30-8138C67370DF}"/>
               </a:ext>
             </a:extLst>
           </p:cNvPr>
@@ -5493,7 +5493,7 @@
           <p:cNvPr id="7" name="">
             <a:extLst xmlns:a="http://schemas.openxmlformats.org/drawingml/2006/main">
               <a:ext uri="{FF2B5EF4-FFF2-40B4-BE49-F238E27FC236}">
-                <a16:creationId xmlns:a16="http://schemas.microsoft.com/office/drawing/2014/main" id="{546638FE-6D17-4E3C-9A09-C7D02E69A9FD}"/>
+                <a16:creationId xmlns:a16="http://schemas.microsoft.com/office/drawing/2014/main" id="{92CCE43D-0CA8-48A0-AA8C-3C97FE271B7F}"/>
               </a:ext>
             </a:extLst>
           </p:cNvPr>
@@ -5550,7 +5550,7 @@
           <p:cNvPr id="8" name="">
             <a:extLst xmlns:a="http://schemas.openxmlformats.org/drawingml/2006/main">
               <a:ext uri="{FF2B5EF4-FFF2-40B4-BE49-F238E27FC236}">
-                <a16:creationId xmlns:a16="http://schemas.microsoft.com/office/drawing/2014/main" id="{415E1526-D471-4458-8434-B6B3618243E0}"/>
+                <a16:creationId xmlns:a16="http://schemas.microsoft.com/office/drawing/2014/main" id="{394886A2-C4E8-42A5-A6D5-DC7E88937944}"/>
               </a:ext>
             </a:extLst>
           </p:cNvPr>
@@ -5607,7 +5607,7 @@
           <p:cNvPr id="9" name="">
             <a:extLst xmlns:a="http://schemas.openxmlformats.org/drawingml/2006/main">
               <a:ext uri="{FF2B5EF4-FFF2-40B4-BE49-F238E27FC236}">
-                <a16:creationId xmlns:a16="http://schemas.microsoft.com/office/drawing/2014/main" id="{1A0F46C3-F515-457D-84A2-46A1967BDD5A}"/>
+                <a16:creationId xmlns:a16="http://schemas.microsoft.com/office/drawing/2014/main" id="{D2C5D5C5-C209-4522-A5E1-57560941EE71}"/>
               </a:ext>
             </a:extLst>
           </p:cNvPr>
@@ -5687,7 +5687,7 @@
           <p:cNvPr id="10" name="">
             <a:extLst xmlns:a="http://schemas.openxmlformats.org/drawingml/2006/main">
               <a:ext uri="{FF2B5EF4-FFF2-40B4-BE49-F238E27FC236}">
-                <a16:creationId xmlns:a16="http://schemas.microsoft.com/office/drawing/2014/main" id="{BF4FF3EF-9B22-4E08-B4C5-80329B532A6B}"/>
+                <a16:creationId xmlns:a16="http://schemas.microsoft.com/office/drawing/2014/main" id="{645E2763-CA66-4083-9A97-28C8AEBF0488}"/>
               </a:ext>
             </a:extLst>
           </p:cNvPr>
@@ -5742,7 +5742,7 @@
     </p:spTree>
     <p:extLst>
       <p:ext uri="{BB962C8B-B14F-4D97-AF65-F5344CB8AC3E}">
-        <p14:creationId xmlns:p14="http://schemas.microsoft.com/office/powerpoint/2010/main" val="1117834984"/>
+        <p14:creationId xmlns:p14="http://schemas.microsoft.com/office/powerpoint/2010/main" val="449671395"/>
       </p:ext>
     </p:extLst>
   </p:cSld>
@@ -5773,7 +5773,7 @@
           <p:cNvPr id="10" name="">
             <a:extLst xmlns:a="http://schemas.openxmlformats.org/drawingml/2006/main">
               <a:ext uri="{FF2B5EF4-FFF2-40B4-BE49-F238E27FC236}">
-                <a16:creationId xmlns:a16="http://schemas.microsoft.com/office/drawing/2014/main" id="{08E05A19-F520-495F-92C7-003576210263}"/>
+                <a16:creationId xmlns:a16="http://schemas.microsoft.com/office/drawing/2014/main" id="{944DC655-6C06-48BF-985B-45799D87C2DA}"/>
               </a:ext>
             </a:extLst>
           </p:cNvPr>
@@ -5830,7 +5830,7 @@
           <p:cNvPr id="2" name="">
             <a:extLst xmlns:a="http://schemas.openxmlformats.org/drawingml/2006/main">
               <a:ext uri="{FF2B5EF4-FFF2-40B4-BE49-F238E27FC236}">
-                <a16:creationId xmlns:a16="http://schemas.microsoft.com/office/drawing/2014/main" id="{EEBD48D1-7549-486C-8651-4C6DCB8AF4A3}"/>
+                <a16:creationId xmlns:a16="http://schemas.microsoft.com/office/drawing/2014/main" id="{2EF77416-3BFE-4905-A6E4-6E6DBEE17BC3}"/>
               </a:ext>
             </a:extLst>
           </p:cNvPr>
@@ -5887,7 +5887,7 @@
           <p:cNvPr id="3" name="">
             <a:extLst xmlns:a="http://schemas.openxmlformats.org/drawingml/2006/main">
               <a:ext uri="{FF2B5EF4-FFF2-40B4-BE49-F238E27FC236}">
-                <a16:creationId xmlns:a16="http://schemas.microsoft.com/office/drawing/2014/main" id="{FB102FC8-AC9F-4686-92E8-39FC8C9828FD}"/>
+                <a16:creationId xmlns:a16="http://schemas.microsoft.com/office/drawing/2014/main" id="{A341CD29-669C-48CD-94F3-016F4C7C3F58}"/>
               </a:ext>
             </a:extLst>
           </p:cNvPr>
@@ -5944,7 +5944,7 @@
           <p:cNvPr id="4" name="">
             <a:extLst xmlns:a="http://schemas.openxmlformats.org/drawingml/2006/main">
               <a:ext uri="{FF2B5EF4-FFF2-40B4-BE49-F238E27FC236}">
-                <a16:creationId xmlns:a16="http://schemas.microsoft.com/office/drawing/2014/main" id="{CB6912EC-7BE3-4774-B478-39DEDCF10D18}"/>
+                <a16:creationId xmlns:a16="http://schemas.microsoft.com/office/drawing/2014/main" id="{DD531819-26EF-4ADD-8BAB-595C8C921D14}"/>
               </a:ext>
             </a:extLst>
           </p:cNvPr>
@@ -6001,7 +6001,7 @@
           <p:cNvPr id="5" name="">
             <a:extLst xmlns:a="http://schemas.openxmlformats.org/drawingml/2006/main">
               <a:ext uri="{FF2B5EF4-FFF2-40B4-BE49-F238E27FC236}">
-                <a16:creationId xmlns:a16="http://schemas.microsoft.com/office/drawing/2014/main" id="{DBB5212F-A401-4247-8A09-86A653409BF2}"/>
+                <a16:creationId xmlns:a16="http://schemas.microsoft.com/office/drawing/2014/main" id="{74920B02-D2E4-476C-B475-14AA977E59D0}"/>
               </a:ext>
             </a:extLst>
           </p:cNvPr>
@@ -6058,7 +6058,7 @@
           <p:cNvPr id="6" name="">
             <a:extLst xmlns:a="http://schemas.openxmlformats.org/drawingml/2006/main">
               <a:ext uri="{FF2B5EF4-FFF2-40B4-BE49-F238E27FC236}">
-                <a16:creationId xmlns:a16="http://schemas.microsoft.com/office/drawing/2014/main" id="{8780E64D-AB20-49D4-9DCF-51047B5F5C1D}"/>
+                <a16:creationId xmlns:a16="http://schemas.microsoft.com/office/drawing/2014/main" id="{808B1DDE-A80D-4FB9-BF81-C2136B4D3735}"/>
               </a:ext>
             </a:extLst>
           </p:cNvPr>
@@ -6253,7 +6253,7 @@
           <p:cNvPr id="7" name="">
             <a:extLst xmlns:a="http://schemas.openxmlformats.org/drawingml/2006/main">
               <a:ext uri="{FF2B5EF4-FFF2-40B4-BE49-F238E27FC236}">
-                <a16:creationId xmlns:a16="http://schemas.microsoft.com/office/drawing/2014/main" id="{70849157-B7EF-4FDF-96EA-6E674AA09442}"/>
+                <a16:creationId xmlns:a16="http://schemas.microsoft.com/office/drawing/2014/main" id="{70162748-2697-44B7-83D1-C10F50E353F5}"/>
               </a:ext>
             </a:extLst>
           </p:cNvPr>
@@ -6300,7 +6300,7 @@
                 <a:ea typeface="Menlo"/>
                 <a:cs typeface="Menlo"/>
               </a:rPr>
-              <a:t>const payment = {</a:t>
+              <a:t>await client.submitAndWait({</a:t>
             </a:r>
           </a:p>
           <a:p xmlns:a="http://schemas.openxmlformats.org/drawingml/2006/main">
@@ -6369,7 +6369,7 @@
                 <a:ea typeface="Menlo"/>
                 <a:cs typeface="Menlo"/>
               </a:rPr>
-              <a:t>  Destination: receiver.address,</a:t>
+              <a:t>  Destination: to.address,</a:t>
             </a:r>
           </a:p>
           <a:p xmlns:a="http://schemas.openxmlformats.org/drawingml/2006/main">
@@ -6438,7 +6438,7 @@
                 <a:ea typeface="Menlo"/>
                 <a:cs typeface="Menlo"/>
               </a:rPr>
-              <a:t>} satisfies Payment</a:t>
+              <a:t>}, { wallet: sender })</a:t>
             </a:r>
           </a:p>
         </p:txBody>
@@ -6448,7 +6448,7 @@
           <p:cNvPr id="8" name="">
             <a:extLst xmlns:a="http://schemas.openxmlformats.org/drawingml/2006/main">
               <a:ext uri="{FF2B5EF4-FFF2-40B4-BE49-F238E27FC236}">
-                <a16:creationId xmlns:a16="http://schemas.microsoft.com/office/drawing/2014/main" id="{693F540D-7F0B-4FDC-8830-69666BDED072}"/>
+                <a16:creationId xmlns:a16="http://schemas.microsoft.com/office/drawing/2014/main" id="{9C946C5F-4609-4220-88AB-4B35C5D1351E}"/>
               </a:ext>
             </a:extLst>
           </p:cNvPr>
@@ -6528,7 +6528,7 @@
           <p:cNvPr id="9" name="">
             <a:extLst xmlns:a="http://schemas.openxmlformats.org/drawingml/2006/main">
               <a:ext uri="{FF2B5EF4-FFF2-40B4-BE49-F238E27FC236}">
-                <a16:creationId xmlns:a16="http://schemas.microsoft.com/office/drawing/2014/main" id="{9CF3CDE5-6329-422A-9BB5-44ADA5F77375}"/>
+                <a16:creationId xmlns:a16="http://schemas.microsoft.com/office/drawing/2014/main" id="{28498971-ADE3-430B-BF06-4B0F5EB58FB6}"/>
               </a:ext>
             </a:extLst>
           </p:cNvPr>
@@ -6575,7 +6575,7 @@
                 <a:ea typeface="Helvetica Neue"/>
                 <a:cs typeface="Helvetica Neue"/>
               </a:rPr>
-              <a:t>Rejected at the draft.</a:t>
+              <a:t>Payment guides the fields.</a:t>
             </a:r>
           </a:p>
           <a:p xmlns:a="http://schemas.openxmlformats.org/drawingml/2006/main">
@@ -6598,7 +6598,7 @@
                 <a:ea typeface="Helvetica Neue"/>
                 <a:cs typeface="Helvetica Neue"/>
               </a:rPr>
-              <a:t>Did you mean DestinationTag?</a:t>
+              <a:t>The typo is rejected at the call.</a:t>
             </a:r>
           </a:p>
         </p:txBody>
@@ -6606,7 +6606,7 @@
     </p:spTree>
     <p:extLst>
       <p:ext uri="{BB962C8B-B14F-4D97-AF65-F5344CB8AC3E}">
-        <p14:creationId xmlns:p14="http://schemas.microsoft.com/office/powerpoint/2010/main" val="971182714"/>
+        <p14:creationId xmlns:p14="http://schemas.microsoft.com/office/powerpoint/2010/main" val="27003501"/>
       </p:ext>
     </p:extLst>
   </p:cSld>
@@ -6637,7 +6637,7 @@
           <p:cNvPr id="10" name="">
             <a:extLst xmlns:a="http://schemas.openxmlformats.org/drawingml/2006/main">
               <a:ext uri="{FF2B5EF4-FFF2-40B4-BE49-F238E27FC236}">
-                <a16:creationId xmlns:a16="http://schemas.microsoft.com/office/drawing/2014/main" id="{7AE52A9F-C3F1-4A9C-9212-12717731A62B}"/>
+                <a16:creationId xmlns:a16="http://schemas.microsoft.com/office/drawing/2014/main" id="{27343491-1F9F-4154-B651-354F1B886D8C}"/>
               </a:ext>
             </a:extLst>
           </p:cNvPr>
@@ -6694,7 +6694,7 @@
           <p:cNvPr id="2" name="">
             <a:extLst xmlns:a="http://schemas.openxmlformats.org/drawingml/2006/main">
               <a:ext uri="{FF2B5EF4-FFF2-40B4-BE49-F238E27FC236}">
-                <a16:creationId xmlns:a16="http://schemas.microsoft.com/office/drawing/2014/main" id="{B4B58655-D849-42FB-8C96-711C7FBF48F5}"/>
+                <a16:creationId xmlns:a16="http://schemas.microsoft.com/office/drawing/2014/main" id="{E7C0D3B9-9DEF-4C7E-8B76-32C7128F854E}"/>
               </a:ext>
             </a:extLst>
           </p:cNvPr>
@@ -6751,7 +6751,7 @@
           <p:cNvPr id="3" name="">
             <a:extLst xmlns:a="http://schemas.openxmlformats.org/drawingml/2006/main">
               <a:ext uri="{FF2B5EF4-FFF2-40B4-BE49-F238E27FC236}">
-                <a16:creationId xmlns:a16="http://schemas.microsoft.com/office/drawing/2014/main" id="{EA4B3C18-C6CB-4BB8-B5AF-4C54D5186FB1}"/>
+                <a16:creationId xmlns:a16="http://schemas.microsoft.com/office/drawing/2014/main" id="{605E21C7-73C1-43C5-A844-93E3BA7661AB}"/>
               </a:ext>
             </a:extLst>
           </p:cNvPr>
@@ -6808,7 +6808,7 @@
           <p:cNvPr id="4" name="">
             <a:extLst xmlns:a="http://schemas.openxmlformats.org/drawingml/2006/main">
               <a:ext uri="{FF2B5EF4-FFF2-40B4-BE49-F238E27FC236}">
-                <a16:creationId xmlns:a16="http://schemas.microsoft.com/office/drawing/2014/main" id="{102AE488-763A-4057-9EC4-5954D20E1AC2}"/>
+                <a16:creationId xmlns:a16="http://schemas.microsoft.com/office/drawing/2014/main" id="{4E0818FD-EB4F-4A9E-A0D4-C88A7A31EAE2}"/>
               </a:ext>
             </a:extLst>
           </p:cNvPr>
@@ -6865,7 +6865,7 @@
           <p:cNvPr id="5" name="">
             <a:extLst xmlns:a="http://schemas.openxmlformats.org/drawingml/2006/main">
               <a:ext uri="{FF2B5EF4-FFF2-40B4-BE49-F238E27FC236}">
-                <a16:creationId xmlns:a16="http://schemas.microsoft.com/office/drawing/2014/main" id="{80330693-1EBD-44C5-8F08-D85896900A70}"/>
+                <a16:creationId xmlns:a16="http://schemas.microsoft.com/office/drawing/2014/main" id="{F4D63050-B3FA-4902-B65E-52612E532244}"/>
               </a:ext>
             </a:extLst>
           </p:cNvPr>
@@ -6922,7 +6922,7 @@
           <p:cNvPr id="6" name="">
             <a:extLst xmlns:a="http://schemas.openxmlformats.org/drawingml/2006/main">
               <a:ext uri="{FF2B5EF4-FFF2-40B4-BE49-F238E27FC236}">
-                <a16:creationId xmlns:a16="http://schemas.microsoft.com/office/drawing/2014/main" id="{0119BFDD-9D51-4B2D-8D55-326B021F2564}"/>
+                <a16:creationId xmlns:a16="http://schemas.microsoft.com/office/drawing/2014/main" id="{C3C52E27-4944-4970-9104-233FDF76D101}"/>
               </a:ext>
             </a:extLst>
           </p:cNvPr>
@@ -7094,7 +7094,7 @@
           <p:cNvPr id="7" name="">
             <a:extLst xmlns:a="http://schemas.openxmlformats.org/drawingml/2006/main">
               <a:ext uri="{FF2B5EF4-FFF2-40B4-BE49-F238E27FC236}">
-                <a16:creationId xmlns:a16="http://schemas.microsoft.com/office/drawing/2014/main" id="{809237D4-FA3C-41B8-8FA3-8BC1CC406A67}"/>
+                <a16:creationId xmlns:a16="http://schemas.microsoft.com/office/drawing/2014/main" id="{2C43DF2D-1C3C-4805-986A-0DB629B83E61}"/>
               </a:ext>
             </a:extLst>
           </p:cNvPr>
@@ -7266,7 +7266,7 @@
           <p:cNvPr id="8" name="">
             <a:extLst xmlns:a="http://schemas.openxmlformats.org/drawingml/2006/main">
               <a:ext uri="{FF2B5EF4-FFF2-40B4-BE49-F238E27FC236}">
-                <a16:creationId xmlns:a16="http://schemas.microsoft.com/office/drawing/2014/main" id="{62B3C6C0-0277-4B42-AA22-C7F7E27C6680}"/>
+                <a16:creationId xmlns:a16="http://schemas.microsoft.com/office/drawing/2014/main" id="{5C1EA8D6-5923-4B91-B27B-68A62EFB7D37}"/>
               </a:ext>
             </a:extLst>
           </p:cNvPr>
@@ -7346,7 +7346,7 @@
           <p:cNvPr id="9" name="">
             <a:extLst xmlns:a="http://schemas.openxmlformats.org/drawingml/2006/main">
               <a:ext uri="{FF2B5EF4-FFF2-40B4-BE49-F238E27FC236}">
-                <a16:creationId xmlns:a16="http://schemas.microsoft.com/office/drawing/2014/main" id="{BD54BB9F-B1ED-4DCE-9C73-3EF3027DD680}"/>
+                <a16:creationId xmlns:a16="http://schemas.microsoft.com/office/drawing/2014/main" id="{436937EA-AAA8-4A0D-9D77-87B6F88BFA9A}"/>
               </a:ext>
             </a:extLst>
           </p:cNvPr>
@@ -7424,7 +7424,7 @@
     </p:spTree>
     <p:extLst>
       <p:ext uri="{BB962C8B-B14F-4D97-AF65-F5344CB8AC3E}">
-        <p14:creationId xmlns:p14="http://schemas.microsoft.com/office/powerpoint/2010/main" val="1051070603"/>
+        <p14:creationId xmlns:p14="http://schemas.microsoft.com/office/powerpoint/2010/main" val="48079667"/>
       </p:ext>
     </p:extLst>
   </p:cSld>
@@ -7455,7 +7455,7 @@
           <p:cNvPr id="10" name="">
             <a:extLst xmlns:a="http://schemas.openxmlformats.org/drawingml/2006/main">
               <a:ext uri="{FF2B5EF4-FFF2-40B4-BE49-F238E27FC236}">
-                <a16:creationId xmlns:a16="http://schemas.microsoft.com/office/drawing/2014/main" id="{19332DAE-A334-42CE-9E71-169CA5814D57}"/>
+                <a16:creationId xmlns:a16="http://schemas.microsoft.com/office/drawing/2014/main" id="{08BA2A90-A43D-4836-A066-C77437FCF5BA}"/>
               </a:ext>
             </a:extLst>
           </p:cNvPr>
@@ -7512,7 +7512,7 @@
           <p:cNvPr id="2" name="">
             <a:extLst xmlns:a="http://schemas.openxmlformats.org/drawingml/2006/main">
               <a:ext uri="{FF2B5EF4-FFF2-40B4-BE49-F238E27FC236}">
-                <a16:creationId xmlns:a16="http://schemas.microsoft.com/office/drawing/2014/main" id="{E61C56CF-65B6-4172-9944-9BC8D837E42F}"/>
+                <a16:creationId xmlns:a16="http://schemas.microsoft.com/office/drawing/2014/main" id="{25A3D771-20A0-4C37-A710-D1CA111E67AF}"/>
               </a:ext>
             </a:extLst>
           </p:cNvPr>
@@ -7569,7 +7569,7 @@
           <p:cNvPr id="3" name="">
             <a:extLst xmlns:a="http://schemas.openxmlformats.org/drawingml/2006/main">
               <a:ext uri="{FF2B5EF4-FFF2-40B4-BE49-F238E27FC236}">
-                <a16:creationId xmlns:a16="http://schemas.microsoft.com/office/drawing/2014/main" id="{01610D97-AE2E-4E6B-923F-96C303565D15}"/>
+                <a16:creationId xmlns:a16="http://schemas.microsoft.com/office/drawing/2014/main" id="{1C363CEF-D626-4132-891D-FA65B289B953}"/>
               </a:ext>
             </a:extLst>
           </p:cNvPr>
@@ -7626,7 +7626,7 @@
           <p:cNvPr id="4" name="">
             <a:extLst xmlns:a="http://schemas.openxmlformats.org/drawingml/2006/main">
               <a:ext uri="{FF2B5EF4-FFF2-40B4-BE49-F238E27FC236}">
-                <a16:creationId xmlns:a16="http://schemas.microsoft.com/office/drawing/2014/main" id="{9BF11E4A-ACC9-43ED-8C7A-B46D8D6C810D}"/>
+                <a16:creationId xmlns:a16="http://schemas.microsoft.com/office/drawing/2014/main" id="{1919EC6B-26DD-4437-A453-8E456B8456FE}"/>
               </a:ext>
             </a:extLst>
           </p:cNvPr>
@@ -7683,7 +7683,7 @@
           <p:cNvPr id="5" name="">
             <a:extLst xmlns:a="http://schemas.openxmlformats.org/drawingml/2006/main">
               <a:ext uri="{FF2B5EF4-FFF2-40B4-BE49-F238E27FC236}">
-                <a16:creationId xmlns:a16="http://schemas.microsoft.com/office/drawing/2014/main" id="{7EE7898A-A6B5-4FF3-A039-56BDFF40FD87}"/>
+                <a16:creationId xmlns:a16="http://schemas.microsoft.com/office/drawing/2014/main" id="{D2C6FFC9-A4E4-4CEC-A012-E2C574983BAE}"/>
               </a:ext>
             </a:extLst>
           </p:cNvPr>
@@ -7740,7 +7740,7 @@
           <p:cNvPr id="6" name="">
             <a:extLst xmlns:a="http://schemas.openxmlformats.org/drawingml/2006/main">
               <a:ext uri="{FF2B5EF4-FFF2-40B4-BE49-F238E27FC236}">
-                <a16:creationId xmlns:a16="http://schemas.microsoft.com/office/drawing/2014/main" id="{FE109A70-2BE0-4372-99D7-EEC4E65D0FC0}"/>
+                <a16:creationId xmlns:a16="http://schemas.microsoft.com/office/drawing/2014/main" id="{8A5C4F3D-60BF-4A18-BF63-587CF17DD936}"/>
               </a:ext>
             </a:extLst>
           </p:cNvPr>
@@ -7889,7 +7889,7 @@
           <p:cNvPr id="7" name="">
             <a:extLst xmlns:a="http://schemas.openxmlformats.org/drawingml/2006/main">
               <a:ext uri="{FF2B5EF4-FFF2-40B4-BE49-F238E27FC236}">
-                <a16:creationId xmlns:a16="http://schemas.microsoft.com/office/drawing/2014/main" id="{5FA01B06-79F4-4009-A044-BE03C79E11AA}"/>
+                <a16:creationId xmlns:a16="http://schemas.microsoft.com/office/drawing/2014/main" id="{A8E721CF-9CB6-4FA2-BFF5-64218B2EAC1E}"/>
               </a:ext>
             </a:extLst>
           </p:cNvPr>
@@ -8038,7 +8038,7 @@
           <p:cNvPr id="8" name="">
             <a:extLst xmlns:a="http://schemas.openxmlformats.org/drawingml/2006/main">
               <a:ext uri="{FF2B5EF4-FFF2-40B4-BE49-F238E27FC236}">
-                <a16:creationId xmlns:a16="http://schemas.microsoft.com/office/drawing/2014/main" id="{0FD4C8A1-68E0-46CC-945D-1BF005C026D3}"/>
+                <a16:creationId xmlns:a16="http://schemas.microsoft.com/office/drawing/2014/main" id="{837D4E27-3003-4974-B5B4-6263ECD6C905}"/>
               </a:ext>
             </a:extLst>
           </p:cNvPr>
@@ -8118,7 +8118,7 @@
           <p:cNvPr id="9" name="">
             <a:extLst xmlns:a="http://schemas.openxmlformats.org/drawingml/2006/main">
               <a:ext uri="{FF2B5EF4-FFF2-40B4-BE49-F238E27FC236}">
-                <a16:creationId xmlns:a16="http://schemas.microsoft.com/office/drawing/2014/main" id="{F34B8968-E88C-455F-9A56-21C90F4CF81E}"/>
+                <a16:creationId xmlns:a16="http://schemas.microsoft.com/office/drawing/2014/main" id="{D1521D29-4663-49FD-87F1-33E245085591}"/>
               </a:ext>
             </a:extLst>
           </p:cNvPr>
@@ -8196,7 +8196,7 @@
     </p:spTree>
     <p:extLst>
       <p:ext uri="{BB962C8B-B14F-4D97-AF65-F5344CB8AC3E}">
-        <p14:creationId xmlns:p14="http://schemas.microsoft.com/office/powerpoint/2010/main" val="2026503934"/>
+        <p14:creationId xmlns:p14="http://schemas.microsoft.com/office/powerpoint/2010/main" val="1990152426"/>
       </p:ext>
     </p:extLst>
   </p:cSld>
@@ -8227,7 +8227,7 @@
           <p:cNvPr id="10" name="">
             <a:extLst xmlns:a="http://schemas.openxmlformats.org/drawingml/2006/main">
               <a:ext uri="{FF2B5EF4-FFF2-40B4-BE49-F238E27FC236}">
-                <a16:creationId xmlns:a16="http://schemas.microsoft.com/office/drawing/2014/main" id="{0B86B8A4-7B08-4737-AE99-D6A06CFD8FB8}"/>
+                <a16:creationId xmlns:a16="http://schemas.microsoft.com/office/drawing/2014/main" id="{897CD95F-D2DE-4048-8F82-0E56A756A52F}"/>
               </a:ext>
             </a:extLst>
           </p:cNvPr>
@@ -8284,7 +8284,7 @@
           <p:cNvPr id="2" name="">
             <a:extLst xmlns:a="http://schemas.openxmlformats.org/drawingml/2006/main">
               <a:ext uri="{FF2B5EF4-FFF2-40B4-BE49-F238E27FC236}">
-                <a16:creationId xmlns:a16="http://schemas.microsoft.com/office/drawing/2014/main" id="{3E813C65-5351-4617-8F1B-0EEFA645B55A}"/>
+                <a16:creationId xmlns:a16="http://schemas.microsoft.com/office/drawing/2014/main" id="{FD8231D5-43B6-4A5A-9745-C45F64843FD6}"/>
               </a:ext>
             </a:extLst>
           </p:cNvPr>
@@ -8341,7 +8341,7 @@
           <p:cNvPr id="3" name="">
             <a:extLst xmlns:a="http://schemas.openxmlformats.org/drawingml/2006/main">
               <a:ext uri="{FF2B5EF4-FFF2-40B4-BE49-F238E27FC236}">
-                <a16:creationId xmlns:a16="http://schemas.microsoft.com/office/drawing/2014/main" id="{AE04C753-FBB3-4CF1-8D12-B889805C78CD}"/>
+                <a16:creationId xmlns:a16="http://schemas.microsoft.com/office/drawing/2014/main" id="{4C74D134-256D-4DCE-AE45-D42662B69065}"/>
               </a:ext>
             </a:extLst>
           </p:cNvPr>
@@ -8398,7 +8398,7 @@
           <p:cNvPr id="4" name="">
             <a:extLst xmlns:a="http://schemas.openxmlformats.org/drawingml/2006/main">
               <a:ext uri="{FF2B5EF4-FFF2-40B4-BE49-F238E27FC236}">
-                <a16:creationId xmlns:a16="http://schemas.microsoft.com/office/drawing/2014/main" id="{AAECF52D-FDE8-4BBB-B25B-F08C994D4550}"/>
+                <a16:creationId xmlns:a16="http://schemas.microsoft.com/office/drawing/2014/main" id="{22D8C996-795F-45EF-8851-2A5B2DC92910}"/>
               </a:ext>
             </a:extLst>
           </p:cNvPr>
@@ -8455,7 +8455,7 @@
           <p:cNvPr id="5" name="">
             <a:extLst xmlns:a="http://schemas.openxmlformats.org/drawingml/2006/main">
               <a:ext uri="{FF2B5EF4-FFF2-40B4-BE49-F238E27FC236}">
-                <a16:creationId xmlns:a16="http://schemas.microsoft.com/office/drawing/2014/main" id="{60D7048B-71AC-4CCF-9663-794B80703D0B}"/>
+                <a16:creationId xmlns:a16="http://schemas.microsoft.com/office/drawing/2014/main" id="{286E1756-7C6C-487F-B650-69899F93EB27}"/>
               </a:ext>
             </a:extLst>
           </p:cNvPr>
@@ -8512,7 +8512,7 @@
           <p:cNvPr id="6" name="">
             <a:extLst xmlns:a="http://schemas.openxmlformats.org/drawingml/2006/main">
               <a:ext uri="{FF2B5EF4-FFF2-40B4-BE49-F238E27FC236}">
-                <a16:creationId xmlns:a16="http://schemas.microsoft.com/office/drawing/2014/main" id="{A33B8AA8-76F8-4BA2-889A-52206015CC71}"/>
+                <a16:creationId xmlns:a16="http://schemas.microsoft.com/office/drawing/2014/main" id="{EFC072F2-BC79-43A1-8214-A2587FAF784C}"/>
               </a:ext>
             </a:extLst>
           </p:cNvPr>
@@ -8707,7 +8707,7 @@
           <p:cNvPr id="7" name="">
             <a:extLst xmlns:a="http://schemas.openxmlformats.org/drawingml/2006/main">
               <a:ext uri="{FF2B5EF4-FFF2-40B4-BE49-F238E27FC236}">
-                <a16:creationId xmlns:a16="http://schemas.microsoft.com/office/drawing/2014/main" id="{B9CF448C-8BCB-4F03-B3E8-4C00AE51C4BC}"/>
+                <a16:creationId xmlns:a16="http://schemas.microsoft.com/office/drawing/2014/main" id="{D4985832-1CC0-4252-9ABC-3F0FC17BBF46}"/>
               </a:ext>
             </a:extLst>
           </p:cNvPr>
@@ -8833,7 +8833,7 @@
           <p:cNvPr id="8" name="">
             <a:extLst xmlns:a="http://schemas.openxmlformats.org/drawingml/2006/main">
               <a:ext uri="{FF2B5EF4-FFF2-40B4-BE49-F238E27FC236}">
-                <a16:creationId xmlns:a16="http://schemas.microsoft.com/office/drawing/2014/main" id="{C403FA8D-30DA-458E-B9A5-3B017805B5DF}"/>
+                <a16:creationId xmlns:a16="http://schemas.microsoft.com/office/drawing/2014/main" id="{16D2D0BD-BFE6-4339-8955-6725CC525392}"/>
               </a:ext>
             </a:extLst>
           </p:cNvPr>
@@ -8913,7 +8913,7 @@
           <p:cNvPr id="9" name="">
             <a:extLst xmlns:a="http://schemas.openxmlformats.org/drawingml/2006/main">
               <a:ext uri="{FF2B5EF4-FFF2-40B4-BE49-F238E27FC236}">
-                <a16:creationId xmlns:a16="http://schemas.microsoft.com/office/drawing/2014/main" id="{467DFA9D-06AD-4B79-A003-EBBCD77834BC}"/>
+                <a16:creationId xmlns:a16="http://schemas.microsoft.com/office/drawing/2014/main" id="{F490F73E-A434-4F6F-BD55-FAE8EFEE3C50}"/>
               </a:ext>
             </a:extLst>
           </p:cNvPr>
@@ -8991,7 +8991,7 @@
     </p:spTree>
     <p:extLst>
       <p:ext uri="{BB962C8B-B14F-4D97-AF65-F5344CB8AC3E}">
-        <p14:creationId xmlns:p14="http://schemas.microsoft.com/office/powerpoint/2010/main" val="764627927"/>
+        <p14:creationId xmlns:p14="http://schemas.microsoft.com/office/powerpoint/2010/main" val="67639008"/>
       </p:ext>
     </p:extLst>
   </p:cSld>
@@ -9022,7 +9022,7 @@
           <p:cNvPr id="13" name="">
             <a:extLst xmlns:a="http://schemas.openxmlformats.org/drawingml/2006/main">
               <a:ext uri="{FF2B5EF4-FFF2-40B4-BE49-F238E27FC236}">
-                <a16:creationId xmlns:a16="http://schemas.microsoft.com/office/drawing/2014/main" id="{8DA144CD-B8B9-4E46-B330-709E08D1645B}"/>
+                <a16:creationId xmlns:a16="http://schemas.microsoft.com/office/drawing/2014/main" id="{9F6E6B16-7892-4647-8DD4-8C6F22B6A9A2}"/>
               </a:ext>
             </a:extLst>
           </p:cNvPr>
@@ -9079,7 +9079,7 @@
           <p:cNvPr id="2" name="">
             <a:extLst xmlns:a="http://schemas.openxmlformats.org/drawingml/2006/main">
               <a:ext uri="{FF2B5EF4-FFF2-40B4-BE49-F238E27FC236}">
-                <a16:creationId xmlns:a16="http://schemas.microsoft.com/office/drawing/2014/main" id="{67B32554-0973-4283-859D-EB09881F065A}"/>
+                <a16:creationId xmlns:a16="http://schemas.microsoft.com/office/drawing/2014/main" id="{76D03C46-CA82-4C59-B28D-73D32BCF16C9}"/>
               </a:ext>
             </a:extLst>
           </p:cNvPr>
@@ -9136,7 +9136,7 @@
           <p:cNvPr id="3" name="">
             <a:extLst xmlns:a="http://schemas.openxmlformats.org/drawingml/2006/main">
               <a:ext uri="{FF2B5EF4-FFF2-40B4-BE49-F238E27FC236}">
-                <a16:creationId xmlns:a16="http://schemas.microsoft.com/office/drawing/2014/main" id="{775A7A4F-7D52-46CC-AF1B-2CA8C4A7BF53}"/>
+                <a16:creationId xmlns:a16="http://schemas.microsoft.com/office/drawing/2014/main" id="{BB27AE1D-2936-4C66-B4B5-0782A5ADB289}"/>
               </a:ext>
             </a:extLst>
           </p:cNvPr>
@@ -9193,7 +9193,7 @@
           <p:cNvPr id="4" name="">
             <a:extLst xmlns:a="http://schemas.openxmlformats.org/drawingml/2006/main">
               <a:ext uri="{FF2B5EF4-FFF2-40B4-BE49-F238E27FC236}">
-                <a16:creationId xmlns:a16="http://schemas.microsoft.com/office/drawing/2014/main" id="{C55204EF-999B-4E73-B8EF-8B1DEF620026}"/>
+                <a16:creationId xmlns:a16="http://schemas.microsoft.com/office/drawing/2014/main" id="{94AD1A3B-3A19-46EF-AEF5-F41125E4AA73}"/>
               </a:ext>
             </a:extLst>
           </p:cNvPr>
@@ -9250,7 +9250,7 @@
           <p:cNvPr id="5" name="">
             <a:extLst xmlns:a="http://schemas.openxmlformats.org/drawingml/2006/main">
               <a:ext uri="{FF2B5EF4-FFF2-40B4-BE49-F238E27FC236}">
-                <a16:creationId xmlns:a16="http://schemas.microsoft.com/office/drawing/2014/main" id="{B8EF7118-0405-40BB-9326-CA4642789274}"/>
+                <a16:creationId xmlns:a16="http://schemas.microsoft.com/office/drawing/2014/main" id="{419076F5-F783-4C95-9EAA-83941C99C42F}"/>
               </a:ext>
             </a:extLst>
           </p:cNvPr>
@@ -9297,7 +9297,7 @@
                 <a:ea typeface="Helvetica Neue"/>
                 <a:cs typeface="Helvetica Neue"/>
               </a:rPr>
-              <a:t>Input guidance, inferred replies and checked outcomes</a:t>
+              <a:t>Inline fields, inferred replies and checked outcomes</a:t>
             </a:r>
           </a:p>
         </p:txBody>
@@ -9307,7 +9307,7 @@
           <p:cNvPr id="6" name="">
             <a:extLst xmlns:a="http://schemas.openxmlformats.org/drawingml/2006/main">
               <a:ext uri="{FF2B5EF4-FFF2-40B4-BE49-F238E27FC236}">
-                <a16:creationId xmlns:a16="http://schemas.microsoft.com/office/drawing/2014/main" id="{811DEA9A-EC5A-4039-9614-047DA05B64BB}"/>
+                <a16:creationId xmlns:a16="http://schemas.microsoft.com/office/drawing/2014/main" id="{BA31B33D-6054-4941-9AA1-C38A10D50B1C}"/>
               </a:ext>
             </a:extLst>
           </p:cNvPr>
@@ -9364,7 +9364,7 @@
           <p:cNvPr id="7" name="">
             <a:extLst xmlns:a="http://schemas.openxmlformats.org/drawingml/2006/main">
               <a:ext uri="{FF2B5EF4-FFF2-40B4-BE49-F238E27FC236}">
-                <a16:creationId xmlns:a16="http://schemas.microsoft.com/office/drawing/2014/main" id="{3DAEF2F9-8466-4CA0-BE99-13B0AE87FC12}"/>
+                <a16:creationId xmlns:a16="http://schemas.microsoft.com/office/drawing/2014/main" id="{8D21AD98-AD59-4996-88D9-6AE14F8F8948}"/>
               </a:ext>
             </a:extLst>
           </p:cNvPr>
@@ -9421,7 +9421,7 @@
           <p:cNvPr id="8" name="">
             <a:extLst xmlns:a="http://schemas.openxmlformats.org/drawingml/2006/main">
               <a:ext uri="{FF2B5EF4-FFF2-40B4-BE49-F238E27FC236}">
-                <a16:creationId xmlns:a16="http://schemas.microsoft.com/office/drawing/2014/main" id="{341EBA9E-25AB-4A94-9179-367DA36B5461}"/>
+                <a16:creationId xmlns:a16="http://schemas.microsoft.com/office/drawing/2014/main" id="{76655B5F-6111-465A-BB5C-8C5DB53A150A}"/>
               </a:ext>
             </a:extLst>
           </p:cNvPr>
@@ -9478,7 +9478,7 @@
           <p:cNvPr id="9" name="">
             <a:extLst xmlns:a="http://schemas.openxmlformats.org/drawingml/2006/main">
               <a:ext uri="{FF2B5EF4-FFF2-40B4-BE49-F238E27FC236}">
-                <a16:creationId xmlns:a16="http://schemas.microsoft.com/office/drawing/2014/main" id="{DB02D375-1F1F-4676-8BCC-7B280032BCC9}"/>
+                <a16:creationId xmlns:a16="http://schemas.microsoft.com/office/drawing/2014/main" id="{DF80CFC8-7123-47C4-B7D0-3961F886DEA0}"/>
               </a:ext>
             </a:extLst>
           </p:cNvPr>
@@ -9535,7 +9535,7 @@
           <p:cNvPr id="10" name="">
             <a:extLst xmlns:a="http://schemas.openxmlformats.org/drawingml/2006/main">
               <a:ext uri="{FF2B5EF4-FFF2-40B4-BE49-F238E27FC236}">
-                <a16:creationId xmlns:a16="http://schemas.microsoft.com/office/drawing/2014/main" id="{C2659978-3C70-4266-BC73-0DC18B1BCAB0}"/>
+                <a16:creationId xmlns:a16="http://schemas.microsoft.com/office/drawing/2014/main" id="{29CBCED1-3215-47D6-A10D-A5F2CBEE5454}"/>
               </a:ext>
             </a:extLst>
           </p:cNvPr>
@@ -9592,7 +9592,7 @@
           <p:cNvPr id="11" name="">
             <a:extLst xmlns:a="http://schemas.openxmlformats.org/drawingml/2006/main">
               <a:ext uri="{FF2B5EF4-FFF2-40B4-BE49-F238E27FC236}">
-                <a16:creationId xmlns:a16="http://schemas.microsoft.com/office/drawing/2014/main" id="{588475DA-D2E0-45D2-AA09-DC0D6F10FBA6}"/>
+                <a16:creationId xmlns:a16="http://schemas.microsoft.com/office/drawing/2014/main" id="{D6619575-A4D9-4F56-B468-DA56867C992C}"/>
               </a:ext>
             </a:extLst>
           </p:cNvPr>
@@ -9649,7 +9649,7 @@
           <p:cNvPr id="12" name="">
             <a:extLst xmlns:a="http://schemas.openxmlformats.org/drawingml/2006/main">
               <a:ext uri="{FF2B5EF4-FFF2-40B4-BE49-F238E27FC236}">
-                <a16:creationId xmlns:a16="http://schemas.microsoft.com/office/drawing/2014/main" id="{D50229C2-2202-40EC-9CE4-0CE6BF4C2925}"/>
+                <a16:creationId xmlns:a16="http://schemas.microsoft.com/office/drawing/2014/main" id="{2BA76AEA-5A2F-45D0-9451-785287062776}"/>
               </a:ext>
             </a:extLst>
           </p:cNvPr>
@@ -9704,7 +9704,7 @@
     </p:spTree>
     <p:extLst>
       <p:ext uri="{BB962C8B-B14F-4D97-AF65-F5344CB8AC3E}">
-        <p14:creationId xmlns:p14="http://schemas.microsoft.com/office/powerpoint/2010/main" val="1646636142"/>
+        <p14:creationId xmlns:p14="http://schemas.microsoft.com/office/powerpoint/2010/main" val="105425641"/>
       </p:ext>
     </p:extLst>
   </p:cSld>

--- a/devx-audit/output/xrpl-devx-walkthrough.pptx
+++ b/devx-audit/output/xrpl-devx-walkthrough.pptx
@@ -2,24 +2,25 @@
 <file path=ppt/presentation.xml><?xml version="1.0" encoding="utf-8"?>
 <p:presentation xmlns:p="http://schemas.openxmlformats.org/presentationml/2006/main">
   <p:sldMasterIdLst>
-    <p:sldMasterId xmlns:r="http://schemas.openxmlformats.org/officeDocument/2006/relationships" id="2147483648" r:id="R41f338263ebe4fc3"/>
+    <p:sldMasterId xmlns:r="http://schemas.openxmlformats.org/officeDocument/2006/relationships" id="2147483648" r:id="R5ae0f4ff105f47fe"/>
   </p:sldMasterIdLst>
   <p:notesMasterIdLst>
-    <p:notesMasterId xmlns:r="http://schemas.openxmlformats.org/officeDocument/2006/relationships" r:id="Ref6bd65bb2dd4e94"/>
+    <p:notesMasterId xmlns:r="http://schemas.openxmlformats.org/officeDocument/2006/relationships" r:id="R4e33c3ec72ca4e69"/>
   </p:notesMasterIdLst>
   <p:sldIdLst>
-    <p:sldId xmlns:r="http://schemas.openxmlformats.org/officeDocument/2006/relationships" id="256" r:id="R94bfa6e3d8cb477c"/>
-    <p:sldId xmlns:r="http://schemas.openxmlformats.org/officeDocument/2006/relationships" id="257" r:id="R48d1be83367a4db6"/>
-    <p:sldId xmlns:r="http://schemas.openxmlformats.org/officeDocument/2006/relationships" id="258" r:id="R8046767a040d4e86"/>
-    <p:sldId xmlns:r="http://schemas.openxmlformats.org/officeDocument/2006/relationships" id="259" r:id="Rf329490c45114aab"/>
-    <p:sldId xmlns:r="http://schemas.openxmlformats.org/officeDocument/2006/relationships" id="260" r:id="R0f04d047285a48cd"/>
-    <p:sldId xmlns:r="http://schemas.openxmlformats.org/officeDocument/2006/relationships" id="261" r:id="R47500f43bd814d80"/>
-    <p:sldId xmlns:r="http://schemas.openxmlformats.org/officeDocument/2006/relationships" id="262" r:id="R4c713b769d6f48cb"/>
-    <p:sldId xmlns:r="http://schemas.openxmlformats.org/officeDocument/2006/relationships" id="263" r:id="R4ec9352cbe0841b7"/>
-    <p:sldId xmlns:r="http://schemas.openxmlformats.org/officeDocument/2006/relationships" id="264" r:id="Rfec46f70d2ff4f82"/>
-    <p:sldId xmlns:r="http://schemas.openxmlformats.org/officeDocument/2006/relationships" id="265" r:id="R7e87908a953342b3"/>
-    <p:sldId xmlns:r="http://schemas.openxmlformats.org/officeDocument/2006/relationships" id="266" r:id="R22791e3ff8344588"/>
-    <p:sldId xmlns:r="http://schemas.openxmlformats.org/officeDocument/2006/relationships" id="267" r:id="Rc42d0992cc9a4c4c"/>
+    <p:sldId xmlns:r="http://schemas.openxmlformats.org/officeDocument/2006/relationships" id="256" r:id="R7f6f075be0be4cbc"/>
+    <p:sldId xmlns:r="http://schemas.openxmlformats.org/officeDocument/2006/relationships" id="257" r:id="R05c292ce1ffd4d44"/>
+    <p:sldId xmlns:r="http://schemas.openxmlformats.org/officeDocument/2006/relationships" id="258" r:id="Rc708d7e1244341df"/>
+    <p:sldId xmlns:r="http://schemas.openxmlformats.org/officeDocument/2006/relationships" id="259" r:id="Re5aa88afb7374b09"/>
+    <p:sldId xmlns:r="http://schemas.openxmlformats.org/officeDocument/2006/relationships" id="260" r:id="R456576e48ea84a35"/>
+    <p:sldId xmlns:r="http://schemas.openxmlformats.org/officeDocument/2006/relationships" id="261" r:id="R49b1d3b7b2ee443f"/>
+    <p:sldId xmlns:r="http://schemas.openxmlformats.org/officeDocument/2006/relationships" id="262" r:id="Rf2d4f1496c4b4e09"/>
+    <p:sldId xmlns:r="http://schemas.openxmlformats.org/officeDocument/2006/relationships" id="263" r:id="Rf9e0dd9390ed4b12"/>
+    <p:sldId xmlns:r="http://schemas.openxmlformats.org/officeDocument/2006/relationships" id="264" r:id="R9cfe73b6bc6f47f1"/>
+    <p:sldId xmlns:r="http://schemas.openxmlformats.org/officeDocument/2006/relationships" id="265" r:id="R7fb0342743a54667"/>
+    <p:sldId xmlns:r="http://schemas.openxmlformats.org/officeDocument/2006/relationships" id="266" r:id="R60e3540634944e00"/>
+    <p:sldId xmlns:r="http://schemas.openxmlformats.org/officeDocument/2006/relationships" id="267" r:id="R37133eb91d4e4a78"/>
+    <p:sldId xmlns:r="http://schemas.openxmlformats.org/officeDocument/2006/relationships" id="268" r:id="R81440bd52c8b4f0c"/>
   </p:sldIdLst>
   <p:sldSz cx="12192000" cy="6858000"/>
   <p:notesSz cx="6858000" cy="9144000"/>
@@ -528,12 +529,12 @@
           <a:lstStyle xmlns:a="http://schemas.openxmlformats.org/drawingml/2006/main"/>
           <a:p xmlns:a="http://schemas.openxmlformats.org/drawingml/2006/main">
             <a:r>
-              <a:t>Events: wrong explicit callbacks accepted, once payload any, local dispatch TypeError. Pagination: NFT next-page type rejects and requestAll default fails in offline preflight; default-limit mismatch reproduced using mock. Error recovery and decoded-data guidance are bounded design/type observations. MPT balance helper omits a synthetic metadata fixture. Exact-value roundtrip at9007199254740991drops adds one drop; no live loss implied. These are prioritized topics, not incidence rates.</a:t>
-            </a:r>
-          </a:p>
-          <a:p xmlns:a="http://schemas.openxmlformats.org/drawingml/2006/main">
-            <a:r>
-              <a:t>Sources: https://github.com/theahaco/xrpl.js/blob/aha/devx-audit-2026-09/devx-audit/evidence/surface-findings.md SURF02-SURF07; https://github.com/theahaco/xrpl.js/blob/aha/devx-audit-2026-09/devx-audit/evidence/surface-runtime-probes.json</a:t>
+              <a:t>All seven tracked TS families were inspected. All compile with their existing configs against5.3.0, but this hides any-based weaknesses. Strict/noUncheckedIndexedAccess exposes the Paths empty-alternative access. Four selected teaching journeys were improved and have current-release and unreleased-prototype variants. The broad original AMM example is retained, not represented as fixed. Other legacy families remain findings. The local Realm preview rendered allfour edited tutorials.</a:t>
+            </a:r>
+          </a:p>
+          <a:p xmlns:a="http://schemas.openxmlformats.org/drawingml/2006/main">
+            <a:r>
+              <a:t>Sources: https://github.com/theahaco/xrpl.js/blob/aha/devx-audit-2026-09/devx-audit/evidence/portal-review.md; https://github.com/theahaco/xrpl.js/blob/aha/devx-audit-2026-09/devx-audit/evidence/portal-coverage.json; https://github.com/theahaco/xrpl.js/blob/aha/devx-audit-2026-09/devx-audit/evidence/runtime-baseline.json; https://github.com/theahaco/xrpl.js/blob/aha/devx-audit-2026-09/devx-audit/evidence/preview-status.md; https://github.com/theahaco/xrpl-dev-portal/tree/aha/devx-audit-2026-09/_code-samples/devx-after/README.md</a:t>
             </a:r>
           </a:p>
         </p:txBody>
@@ -603,12 +604,12 @@
           <a:lstStyle xmlns:a="http://schemas.openxmlformats.org/drawingml/2006/main"/>
           <a:p xmlns:a="http://schemas.openxmlformats.org/drawingml/2006/main">
             <a:r>
-              <a:t>Do not ship the combined prototype wholesale. Independent review rejected overconfident simulation types and premature finality handling in proposed fixes. Compatibility work includes strict-input migration, explicit extension paths, minimum TypeScript version and broad/union regression cases. Prioritize the first bounded implementation scope jointly with maintainers. Acceptance evidence should test what the developer installs and reads.</a:t>
-            </a:r>
-          </a:p>
-          <a:p xmlns:a="http://schemas.openxmlformats.org/drawingml/2006/main">
-            <a:r>
-              <a:t>Sources: https://github.com/theahaco/xrpl.js/blob/aha/devx-audit-2026-09/devx-audit/output/report.md implementation roadmap; https://github.com/theahaco/xrpl.js/blob/aha/devx-audit-2026-09/devx-audit/evidence/prototype-review.md; https://github.com/theahaco/xrpl.js/blob/aha/devx-audit-2026-09/devx-audit/evidence/validation-summary.md</a:t>
+              <a:t>Events: wrong explicit callbacks accepted, once payload any, local dispatch TypeError. Pagination: NFT next-page type rejects and requestAll default fails in offline preflight; default-limit mismatch reproduced using mock. Error recovery and decoded-data guidance are bounded design/type observations. MPT balance helper omits a synthetic metadata fixture. Exact-value roundtrip at9007199254740991drops adds one drop; no live loss implied. These are prioritized topics, not incidence rates.</a:t>
+            </a:r>
+          </a:p>
+          <a:p xmlns:a="http://schemas.openxmlformats.org/drawingml/2006/main">
+            <a:r>
+              <a:t>Sources: https://github.com/theahaco/xrpl.js/blob/aha/devx-audit-2026-09/devx-audit/evidence/surface-findings.md SURF02-SURF07; https://github.com/theahaco/xrpl.js/blob/aha/devx-audit-2026-09/devx-audit/evidence/surface-runtime-probes.json</a:t>
             </a:r>
           </a:p>
         </p:txBody>
@@ -678,6 +679,81 @@
           <a:lstStyle xmlns:a="http://schemas.openxmlformats.org/drawingml/2006/main"/>
           <a:p xmlns:a="http://schemas.openxmlformats.org/drawingml/2006/main">
             <a:r>
+              <a:t>Do not ship the combined prototype wholesale. Independent review rejected overconfident simulation types and premature finality handling in proposed fixes. Compatibility work includes submitAndWait failure migration, wallet-bound builders, strict-input migration, explicit extension paths, minimum TypeScript version and broad/union regression cases. Prioritize the first bounded implementation scope jointly with maintainers. Acceptance evidence should test what the developer installs and reads.</a:t>
+            </a:r>
+          </a:p>
+          <a:p xmlns:a="http://schemas.openxmlformats.org/drawingml/2006/main">
+            <a:r>
+              <a:t>Sources: https://github.com/theahaco/xrpl.js/blob/aha/devx-audit-2026-09/devx-audit/output/report.md implementation roadmap; https://github.com/theahaco/xrpl.js/blob/aha/devx-audit-2026-09/devx-audit/evidence/prototype-review.md; https://github.com/theahaco/xrpl.js/blob/aha/devx-audit-2026-09/devx-audit/evidence/validation-summary.md</a:t>
+            </a:r>
+          </a:p>
+        </p:txBody>
+      </p:sp>
+      <p:sp>
+        <p:nvSpPr>
+          <p:cNvPr id="4" name="Slide Number Placeholder 3"/>
+          <p:cNvSpPr>
+            <a:spLocks xmlns:a="http://schemas.openxmlformats.org/drawingml/2006/main" noGrp="1"/>
+          </p:cNvSpPr>
+          <p:nvPr>
+            <p:ph type="sldNum" idx="5"/>
+          </p:nvPr>
+        </p:nvSpPr>
+        <p:spPr/>
+        <p:txBody>
+          <a:bodyPr xmlns:a="http://schemas.openxmlformats.org/drawingml/2006/main"/>
+          <a:lstStyle xmlns:a="http://schemas.openxmlformats.org/drawingml/2006/main"/>
+          <a:p xmlns:a="http://schemas.openxmlformats.org/drawingml/2006/main"/>
+        </p:txBody>
+      </p:sp>
+    </p:spTree>
+  </p:cSld>
+  <p:clrMapOvr>
+    <a:masterClrMapping xmlns:a="http://schemas.openxmlformats.org/drawingml/2006/main"/>
+  </p:clrMapOvr>
+</p:notes>
+</file>
+
+<file path=ppt/notesSlides/notesSlide13.xml><?xml version="1.0" encoding="utf-8"?>
+<p:notes xmlns:p="http://schemas.openxmlformats.org/presentationml/2006/main">
+  <p:cSld>
+    <p:spTree>
+      <p:nvGrpSpPr>
+        <p:cNvPr id="1" name=""/>
+        <p:cNvGrpSpPr/>
+        <p:nvPr/>
+      </p:nvGrpSpPr>
+      <p:grpSpPr>
+        <a:xfrm xmlns:a="http://schemas.openxmlformats.org/drawingml/2006/main"/>
+      </p:grpSpPr>
+      <p:sp>
+        <p:nvSpPr>
+          <p:cNvPr id="2" name="Slide Image Placeholder 1"/>
+          <p:cNvSpPr>
+            <a:spLocks xmlns:a="http://schemas.openxmlformats.org/drawingml/2006/main" noGrp="1"/>
+          </p:cNvSpPr>
+          <p:nvPr>
+            <p:ph type="sldImg" idx="0"/>
+          </p:nvPr>
+        </p:nvSpPr>
+        <p:spPr/>
+      </p:sp>
+      <p:sp>
+        <p:nvSpPr>
+          <p:cNvPr id="3" name="Notes Placeholder 2"/>
+          <p:cNvSpPr>
+            <a:spLocks xmlns:a="http://schemas.openxmlformats.org/drawingml/2006/main" noGrp="1"/>
+          </p:cNvSpPr>
+          <p:nvPr>
+            <p:ph type="body" idx="1"/>
+          </p:nvPr>
+        </p:nvSpPr>
+        <p:spPr/>
+        <p:txBody>
+          <a:bodyPr xmlns:a="http://schemas.openxmlformats.org/drawingml/2006/main"/>
+          <a:lstStyle xmlns:a="http://schemas.openxmlformats.org/drawingml/2006/main"/>
+          <a:p xmlns:a="http://schemas.openxmlformats.org/drawingml/2006/main">
+            <a:r>
               <a:t>Proposed commercial direction, not a contracted commitment or price. Start with a bounded xrpl.js implementation phase and acceptance checks agreed by Ripple DevRel and maintainers. Establish a shared prioritized backlog, implement and verify fixes, keep examples/docs aligned, and prevent regression. The next audit phase covers xrpl-rust API and CLI discovery/help/errors/scripting. This deck is supported by the report, detailed evidence register and fork-only implementation. All external issues/PRs remain aha-owned. Hosted docs preview remains optional pending Realm-compatible infrastructure.</a:t>
             </a:r>
           </a:p>
@@ -973,7 +1049,7 @@
           <a:lstStyle xmlns:a="http://schemas.openxmlformats.org/drawingml/2006/main"/>
           <a:p xmlns:a="http://schemas.openxmlformats.org/drawingml/2006/main">
             <a:r>
-              <a:t>The retained published example names Payment with satisfies, but its typo still compiles because BaseTransaction extends Record&lt;string,unknown&gt;. The proposed experience passes the literal directly to submitAndWait. TransactionType drives Payment completions; DestinationTagg is rejected without an extra annotation. Separate probes verify direct generic request and submission calls, valid inputs, and Omit preserving other required fields. This is not a claim that all invalid transactions can be rejected statically.</a:t>
+              <a:t>The retained published example names Payment with satisfies, but its typo still compiles because BaseTransaction extends Record&lt;string,unknown&gt;. The proposed experience uses client.tx.payment. The factory supplies the discriminator and wallet account; Payment fields guide completion; DestinationTagg is rejected without an extra annotation. Separate probes verify direct generic request and submission calls, valid inputs, and Omit preserving other required fields. This is not a claim that all invalid transactions can be rejected statically.</a:t>
             </a:r>
           </a:p>
           <a:p xmlns:a="http://schemas.openxmlformats.org/drawingml/2006/main">
@@ -1198,12 +1274,12 @@
           <a:lstStyle xmlns:a="http://schemas.openxmlformats.org/drawingml/2006/main"/>
           <a:p xmlns:a="http://schemas.openxmlformats.org/drawingml/2006/main">
             <a:r>
-              <a:t>The prototype validates its promised metadata shape at runtime before presenting a validated parsed response. It does not equate validation with tesSUCCESS. Domain absence checks also remain. Across four paired workflows5 parsed guards,2 ledger-kind comparisons and1 autofill generic disappear. Getting Started also removes2 satisfies clauses and1 redundant validate call. The main walkthrough now uses the prototype; its5.3.0 comparison is retained separately. Five editor checks and positive/negative real-ledger Getting Started runs pass. These are source-scaffolding counts, not time-saved or quality-score claims.</a:t>
-            </a:r>
-          </a:p>
-          <a:p xmlns:a="http://schemas.openxmlformats.org/drawingml/2006/main">
-            <a:r>
-              <a:t>Sources: https://github.com/theahaco/xrpl.js/blob/aha/devx-audit-2026-09/devx-audit/evidence/prototype-example-diffs.md; https://github.com/theahaco/xrpl-dev-portal/tree/aha/devx-audit-2026-09/_code-samples/devx-after/get-started.ts; https://github.com/theahaco/xrpl.js/blob/aha/devx-audit-2026-09/devx-audit/evidence/prototype-review.md</a:t>
+              <a:t>The wallet-bound prototype supplies Account and TransactionType. signAndSubmit and submitAndWait resolve only with a validated successful response. An unsuccessful validated transaction throws TransactionFailedError with the response preserved. trySignAndSubmit and trySubmitAndWait return an ok-discriminated response/error union. This changes published submitAndWait behavior and requires migration review. Existing nonfinal polling remains. Transport failure may leave outcome unknown. Real ledger tests cover success and validated failure.</a:t>
+            </a:r>
+          </a:p>
+          <a:p xmlns:a="http://schemas.openxmlformats.org/drawingml/2006/main">
+            <a:r>
+              <a:t>Sources: https://github.com/theahaco/xrpl.js/blob/aha/devx-audit-2026-09/devx-audit/evidence/builders-follow-up.md; https://github.com/theahaco/xrpl.js/blob/aha/devx-audit-2026-09/devx-audit/evidence/builders-runtime.json; https://github.com/theahaco/xrpl-dev-portal/tree/aha/devx-audit-2026-09/_code-samples/get-started/ts/get-acct-info.ts</a:t>
             </a:r>
           </a:p>
         </p:txBody>
@@ -1273,12 +1349,7 @@
           <a:lstStyle xmlns:a="http://schemas.openxmlformats.org/drawingml/2006/main"/>
           <a:p xmlns:a="http://schemas.openxmlformats.org/drawingml/2006/main">
             <a:r>
-              <a:t>All seven tracked TS families were inspected. All compile with their existing configs against5.3.0, but this hides any-based weaknesses. Strict/noUncheckedIndexedAccess exposes the Paths empty-alternative access. Four selected teaching journeys were improved and have current-release and unreleased-prototype variants. The broad original AMM example is retained, not represented as fixed. Other legacy families remain findings. The local Realm preview rendered allfour edited tutorials.</a:t>
-            </a:r>
-          </a:p>
-          <a:p xmlns:a="http://schemas.openxmlformats.org/drawingml/2006/main">
-            <a:r>
-              <a:t>Sources: https://github.com/theahaco/xrpl.js/blob/aha/devx-audit-2026-09/devx-audit/evidence/portal-review.md; https://github.com/theahaco/xrpl.js/blob/aha/devx-audit-2026-09/devx-audit/evidence/portal-coverage.json; https://github.com/theahaco/xrpl.js/blob/aha/devx-audit-2026-09/devx-audit/evidence/runtime-baseline.json; https://github.com/theahaco/xrpl.js/blob/aha/devx-audit-2026-09/devx-audit/evidence/preview-status.md; https://github.com/theahaco/xrpl-dev-portal/tree/aha/devx-audit-2026-09/_code-samples/devx-after/README.md</a:t>
+              <a:t>WalletClient binds the wallet once. Factories add Account and TransactionType, preserving explicit Account overrides for regular-key use. Factories do not send transactions. Actual TypeScript language-service checks show all 78 modeled transaction factories and 45 command methods, with representative hover prose, field completion and safe response inference. Registry coverage is not runtime execution of every modeled transaction or command. Sources: https://github.com/theahaco/xrpl.js/blob/aha/devx-audit-2026-09/devx-audit/evidence/builders-editor.json; https://github.com/theahaco/xrpl.js/blob/aha/devx-audit-2026-09/devx-audit/evidence/builders-follow-up.md</a:t>
             </a:r>
           </a:p>
         </p:txBody>
@@ -1346,7 +1417,7 @@
   </p:cSld>
   <p:clrMap bg1="lt1" tx1="dk1" bg2="lt2" tx2="dk2" accent1="accent1" accent2="accent2" accent3="accent3" accent4="accent4" accent5="accent5" accent6="accent6" hlink="hlink" folHlink="folHlink"/>
   <p:sldLayoutIdLst>
-    <p:sldLayoutId xmlns:r="http://schemas.openxmlformats.org/officeDocument/2006/relationships" id="2147483649" r:id="R7a017d10b17f4db0"/>
+    <p:sldLayoutId xmlns:r="http://schemas.openxmlformats.org/officeDocument/2006/relationships" id="2147483649" r:id="R15f64b8d95cd404e"/>
   </p:sldLayoutIdLst>
   <p:txStyles>
     <p:titleStyle>
@@ -1897,7 +1968,7 @@
           <p:cNvPr id="5" name="">
             <a:extLst xmlns:a="http://schemas.openxmlformats.org/drawingml/2006/main">
               <a:ext uri="{FF2B5EF4-FFF2-40B4-BE49-F238E27FC236}">
-                <a16:creationId xmlns:a16="http://schemas.microsoft.com/office/drawing/2014/main" id="{1AFB3E0D-0A86-475C-8333-6440C07C64D4}"/>
+                <a16:creationId xmlns:a16="http://schemas.microsoft.com/office/drawing/2014/main" id="{24DC6647-A5FB-4603-915D-F1FDC0A2F7B2}"/>
               </a:ext>
             </a:extLst>
           </p:cNvPr>
@@ -1977,7 +2048,7 @@
           <p:cNvPr id="2" name="">
             <a:extLst xmlns:a="http://schemas.openxmlformats.org/drawingml/2006/main">
               <a:ext uri="{FF2B5EF4-FFF2-40B4-BE49-F238E27FC236}">
-                <a16:creationId xmlns:a16="http://schemas.microsoft.com/office/drawing/2014/main" id="{5AD31F58-716D-4E0F-8F53-7244230247DC}"/>
+                <a16:creationId xmlns:a16="http://schemas.microsoft.com/office/drawing/2014/main" id="{CC2A514F-FE72-4576-9CAE-EF0E61A8ED16}"/>
               </a:ext>
             </a:extLst>
           </p:cNvPr>
@@ -2034,7 +2105,7 @@
           <p:cNvPr id="3" name="">
             <a:extLst xmlns:a="http://schemas.openxmlformats.org/drawingml/2006/main">
               <a:ext uri="{FF2B5EF4-FFF2-40B4-BE49-F238E27FC236}">
-                <a16:creationId xmlns:a16="http://schemas.microsoft.com/office/drawing/2014/main" id="{6FE1112A-2C6A-4D1F-9010-5B6B14C54F3F}"/>
+                <a16:creationId xmlns:a16="http://schemas.microsoft.com/office/drawing/2014/main" id="{8F017D5F-3DBD-482F-B171-18C2C336B9A4}"/>
               </a:ext>
             </a:extLst>
           </p:cNvPr>
@@ -2114,7 +2185,7 @@
           <p:cNvPr id="4" name="">
             <a:extLst xmlns:a="http://schemas.openxmlformats.org/drawingml/2006/main">
               <a:ext uri="{FF2B5EF4-FFF2-40B4-BE49-F238E27FC236}">
-                <a16:creationId xmlns:a16="http://schemas.microsoft.com/office/drawing/2014/main" id="{0E3506ED-EDBD-4D46-B276-AD8C2DCA8C5F}"/>
+                <a16:creationId xmlns:a16="http://schemas.microsoft.com/office/drawing/2014/main" id="{7ED9E48E-6E84-4DF7-B453-2612E9388252}"/>
               </a:ext>
             </a:extLst>
           </p:cNvPr>
@@ -2192,7 +2263,7 @@
     </p:spTree>
     <p:extLst>
       <p:ext uri="{BB962C8B-B14F-4D97-AF65-F5344CB8AC3E}">
-        <p14:creationId xmlns:p14="http://schemas.microsoft.com/office/powerpoint/2010/main" val="342263749"/>
+        <p14:creationId xmlns:p14="http://schemas.microsoft.com/office/powerpoint/2010/main" val="414787687"/>
       </p:ext>
     </p:extLst>
   </p:cSld>
@@ -2220,10 +2291,10 @@
       </p:grpSpPr>
       <p:sp>
         <p:nvSpPr>
-          <p:cNvPr id="12" name="">
-            <a:extLst xmlns:a="http://schemas.openxmlformats.org/drawingml/2006/main">
-              <a:ext uri="{FF2B5EF4-FFF2-40B4-BE49-F238E27FC236}">
-                <a16:creationId xmlns:a16="http://schemas.microsoft.com/office/drawing/2014/main" id="{278A3353-3007-4659-AD62-B12E6B6D3DE6}"/>
+          <p:cNvPr id="13" name="">
+            <a:extLst xmlns:a="http://schemas.openxmlformats.org/drawingml/2006/main">
+              <a:ext uri="{FF2B5EF4-FFF2-40B4-BE49-F238E27FC236}">
+                <a16:creationId xmlns:a16="http://schemas.microsoft.com/office/drawing/2014/main" id="{FA4A57AF-B722-41EF-BA32-242FA164F22A}"/>
               </a:ext>
             </a:extLst>
           </p:cNvPr>
@@ -2270,7 +2341,7 @@
                 <a:ea typeface="Helvetica Neue"/>
                 <a:cs typeface="Helvetica Neue"/>
               </a:rPr>
-              <a:t>Apply the same standard broadly</a:t>
+              <a:t>Public examples become evidence</a:t>
             </a:r>
           </a:p>
         </p:txBody>
@@ -2280,7 +2351,64 @@
           <p:cNvPr id="2" name="">
             <a:extLst xmlns:a="http://schemas.openxmlformats.org/drawingml/2006/main">
               <a:ext uri="{FF2B5EF4-FFF2-40B4-BE49-F238E27FC236}">
-                <a16:creationId xmlns:a16="http://schemas.microsoft.com/office/drawing/2014/main" id="{93343E67-D064-43FF-AAE9-1C30531107BB}"/>
+                <a16:creationId xmlns:a16="http://schemas.microsoft.com/office/drawing/2014/main" id="{370DE32D-8208-4D9B-B27C-1258C8DC8140}"/>
+              </a:ext>
+            </a:extLst>
+          </p:cNvPr>
+          <p:cNvSpPr>
+            <a:spLocks xmlns:a="http://schemas.openxmlformats.org/drawingml/2006/main" noGrp="1"/>
+          </p:cNvSpPr>
+          <p:nvPr/>
+        </p:nvSpPr>
+        <p:spPr>
+          <a:xfrm xmlns:a="http://schemas.openxmlformats.org/drawingml/2006/main">
+            <a:off x="685800" y="1581150"/>
+            <a:ext cx="10820400" cy="666750"/>
+          </a:xfrm>
+          <a:prstGeom xmlns:a="http://schemas.openxmlformats.org/drawingml/2006/main" prst="rect">
+            <a:avLst/>
+          </a:prstGeom>
+          <a:noFill xmlns:a="http://schemas.openxmlformats.org/drawingml/2006/main"/>
+          <a:ln xmlns:a="http://schemas.openxmlformats.org/drawingml/2006/main" w="0">
+            <a:noFill/>
+          </a:ln>
+        </p:spPr>
+        <p:txBody>
+          <a:bodyPr xmlns:a="http://schemas.openxmlformats.org/drawingml/2006/main">
+            <a:noAutofit/>
+          </a:bodyPr>
+          <a:lstStyle xmlns:a="http://schemas.openxmlformats.org/drawingml/2006/main"/>
+          <a:p xmlns:a="http://schemas.openxmlformats.org/drawingml/2006/main">
+            <a:pPr>
+              <a:defRPr sz="2025" b="0">
+                <a:solidFill>
+                  <a:srgbClr val="506471"/>
+                </a:solidFill>
+                <a:latin typeface="Helvetica Neue"/>
+                <a:ea typeface="Helvetica Neue"/>
+                <a:cs typeface="Helvetica Neue"/>
+              </a:defRPr>
+            </a:pPr>
+            <a:r>
+              <a:rPr sz="2025" b="0">
+                <a:solidFill>
+                  <a:srgbClr val="506471"/>
+                </a:solidFill>
+                <a:latin typeface="Helvetica Neue"/>
+                <a:ea typeface="Helvetica Neue"/>
+                <a:cs typeface="Helvetica Neue"/>
+              </a:rPr>
+              <a:t>Current-release fixes and SDK-dependent improvements are clearly separated</a:t>
+            </a:r>
+          </a:p>
+        </p:txBody>
+      </p:sp>
+      <p:sp>
+        <p:nvSpPr>
+          <p:cNvPr id="3" name="">
+            <a:extLst xmlns:a="http://schemas.openxmlformats.org/drawingml/2006/main">
+              <a:ext uri="{FF2B5EF4-FFF2-40B4-BE49-F238E27FC236}">
+                <a16:creationId xmlns:a16="http://schemas.microsoft.com/office/drawing/2014/main" id="{89A7B309-8DC5-49E2-BB21-E70999ED37B9}"/>
               </a:ext>
             </a:extLst>
           </p:cNvPr>
@@ -2334,39 +2462,39 @@
       </p:sp>
       <p:sp>
         <p:nvSpPr>
-          <p:cNvPr id="3" name="">
-            <a:extLst xmlns:a="http://schemas.openxmlformats.org/drawingml/2006/main">
-              <a:ext uri="{FF2B5EF4-FFF2-40B4-BE49-F238E27FC236}">
-                <a16:creationId xmlns:a16="http://schemas.microsoft.com/office/drawing/2014/main" id="{1E9C44BB-44F4-43C6-B542-F5A21F6861F4}"/>
-              </a:ext>
-            </a:extLst>
-          </p:cNvPr>
-          <p:cNvSpPr>
-            <a:spLocks xmlns:a="http://schemas.openxmlformats.org/drawingml/2006/main" noGrp="1"/>
-          </p:cNvSpPr>
-          <p:nvPr/>
-        </p:nvSpPr>
-        <p:spPr>
-          <a:xfrm xmlns:a="http://schemas.openxmlformats.org/drawingml/2006/main">
-            <a:off x="685800" y="2095500"/>
-            <a:ext cx="3143250" cy="590550"/>
-          </a:xfrm>
-          <a:prstGeom xmlns:a="http://schemas.openxmlformats.org/drawingml/2006/main" prst="rect">
-            <a:avLst/>
-          </a:prstGeom>
-          <a:noFill xmlns:a="http://schemas.openxmlformats.org/drawingml/2006/main"/>
-          <a:ln xmlns:a="http://schemas.openxmlformats.org/drawingml/2006/main" w="0">
-            <a:noFill/>
-          </a:ln>
-        </p:spPr>
-        <p:txBody>
-          <a:bodyPr xmlns:a="http://schemas.openxmlformats.org/drawingml/2006/main">
-            <a:noAutofit/>
-          </a:bodyPr>
-          <a:lstStyle xmlns:a="http://schemas.openxmlformats.org/drawingml/2006/main"/>
-          <a:p xmlns:a="http://schemas.openxmlformats.org/drawingml/2006/main">
-            <a:pPr>
-              <a:defRPr sz="2325" b="1">
+          <p:cNvPr id="4" name="">
+            <a:extLst xmlns:a="http://schemas.openxmlformats.org/drawingml/2006/main">
+              <a:ext uri="{FF2B5EF4-FFF2-40B4-BE49-F238E27FC236}">
+                <a16:creationId xmlns:a16="http://schemas.microsoft.com/office/drawing/2014/main" id="{7FBC9B83-DDAC-46D4-B66F-98F93ACBCDC5}"/>
+              </a:ext>
+            </a:extLst>
+          </p:cNvPr>
+          <p:cNvSpPr>
+            <a:spLocks xmlns:a="http://schemas.openxmlformats.org/drawingml/2006/main" noGrp="1"/>
+          </p:cNvSpPr>
+          <p:nvPr/>
+        </p:nvSpPr>
+        <p:spPr>
+          <a:xfrm xmlns:a="http://schemas.openxmlformats.org/drawingml/2006/main">
+            <a:off x="685800" y="2476500"/>
+            <a:ext cx="2952750" cy="523875"/>
+          </a:xfrm>
+          <a:prstGeom xmlns:a="http://schemas.openxmlformats.org/drawingml/2006/main" prst="rect">
+            <a:avLst/>
+          </a:prstGeom>
+          <a:noFill xmlns:a="http://schemas.openxmlformats.org/drawingml/2006/main"/>
+          <a:ln xmlns:a="http://schemas.openxmlformats.org/drawingml/2006/main" w="0">
+            <a:noFill/>
+          </a:ln>
+        </p:spPr>
+        <p:txBody>
+          <a:bodyPr xmlns:a="http://schemas.openxmlformats.org/drawingml/2006/main">
+            <a:noAutofit/>
+          </a:bodyPr>
+          <a:lstStyle xmlns:a="http://schemas.openxmlformats.org/drawingml/2006/main"/>
+          <a:p xmlns:a="http://schemas.openxmlformats.org/drawingml/2006/main">
+            <a:pPr>
+              <a:defRPr sz="2250" b="1">
                 <a:solidFill>
                   <a:srgbClr val="1D7479"/>
                 </a:solidFill>
@@ -2376,7 +2504,7 @@
               </a:defRPr>
             </a:pPr>
             <a:r>
-              <a:rPr sz="2325" b="1">
+              <a:rPr sz="2250" b="1">
                 <a:solidFill>
                   <a:srgbClr val="1D7479"/>
                 </a:solidFill>
@@ -2384,64 +2512,7 @@
                 <a:ea typeface="Helvetica Neue"/>
                 <a:cs typeface="Helvetica Neue"/>
               </a:rPr>
-              <a:t>Events</a:t>
-            </a:r>
-          </a:p>
-        </p:txBody>
-      </p:sp>
-      <p:sp>
-        <p:nvSpPr>
-          <p:cNvPr id="4" name="">
-            <a:extLst xmlns:a="http://schemas.openxmlformats.org/drawingml/2006/main">
-              <a:ext uri="{FF2B5EF4-FFF2-40B4-BE49-F238E27FC236}">
-                <a16:creationId xmlns:a16="http://schemas.microsoft.com/office/drawing/2014/main" id="{774CB688-A8F9-4C85-8693-E3B96991118F}"/>
-              </a:ext>
-            </a:extLst>
-          </p:cNvPr>
-          <p:cNvSpPr>
-            <a:spLocks xmlns:a="http://schemas.openxmlformats.org/drawingml/2006/main" noGrp="1"/>
-          </p:cNvSpPr>
-          <p:nvPr/>
-        </p:nvSpPr>
-        <p:spPr>
-          <a:xfrm xmlns:a="http://schemas.openxmlformats.org/drawingml/2006/main">
-            <a:off x="4000500" y="2095500"/>
-            <a:ext cx="7381875" cy="723900"/>
-          </a:xfrm>
-          <a:prstGeom xmlns:a="http://schemas.openxmlformats.org/drawingml/2006/main" prst="rect">
-            <a:avLst/>
-          </a:prstGeom>
-          <a:noFill xmlns:a="http://schemas.openxmlformats.org/drawingml/2006/main"/>
-          <a:ln xmlns:a="http://schemas.openxmlformats.org/drawingml/2006/main" w="0">
-            <a:noFill/>
-          </a:ln>
-        </p:spPr>
-        <p:txBody>
-          <a:bodyPr xmlns:a="http://schemas.openxmlformats.org/drawingml/2006/main">
-            <a:noAutofit/>
-          </a:bodyPr>
-          <a:lstStyle xmlns:a="http://schemas.openxmlformats.org/drawingml/2006/main"/>
-          <a:p xmlns:a="http://schemas.openxmlformats.org/drawingml/2006/main">
-            <a:pPr>
-              <a:defRPr sz="2175" b="0">
-                <a:solidFill>
-                  <a:srgbClr val="172F3F"/>
-                </a:solidFill>
-                <a:latin typeface="Helvetica Neue"/>
-                <a:ea typeface="Helvetica Neue"/>
-                <a:cs typeface="Helvetica Neue"/>
-              </a:defRPr>
-            </a:pPr>
-            <a:r>
-              <a:rPr sz="2175" b="0">
-                <a:solidFill>
-                  <a:srgbClr val="172F3F"/>
-                </a:solidFill>
-                <a:latin typeface="Helvetica Neue"/>
-                <a:ea typeface="Helvetica Neue"/>
-                <a:cs typeface="Helvetica Neue"/>
-              </a:rPr>
-              <a:t>Consistent payload types for on, once and aliases</a:t>
+              <a:t>Get Started</a:t>
             </a:r>
           </a:p>
         </p:txBody>
@@ -2451,36 +2522,93 @@
           <p:cNvPr id="5" name="">
             <a:extLst xmlns:a="http://schemas.openxmlformats.org/drawingml/2006/main">
               <a:ext uri="{FF2B5EF4-FFF2-40B4-BE49-F238E27FC236}">
-                <a16:creationId xmlns:a16="http://schemas.microsoft.com/office/drawing/2014/main" id="{41A00E98-01F8-47D5-825E-B12690A807FE}"/>
-              </a:ext>
-            </a:extLst>
-          </p:cNvPr>
-          <p:cNvSpPr>
-            <a:spLocks xmlns:a="http://schemas.openxmlformats.org/drawingml/2006/main" noGrp="1"/>
-          </p:cNvSpPr>
-          <p:nvPr/>
-        </p:nvSpPr>
-        <p:spPr>
-          <a:xfrm xmlns:a="http://schemas.openxmlformats.org/drawingml/2006/main">
-            <a:off x="685800" y="2990850"/>
-            <a:ext cx="3143250" cy="590550"/>
-          </a:xfrm>
-          <a:prstGeom xmlns:a="http://schemas.openxmlformats.org/drawingml/2006/main" prst="rect">
-            <a:avLst/>
-          </a:prstGeom>
-          <a:noFill xmlns:a="http://schemas.openxmlformats.org/drawingml/2006/main"/>
-          <a:ln xmlns:a="http://schemas.openxmlformats.org/drawingml/2006/main" w="0">
-            <a:noFill/>
-          </a:ln>
-        </p:spPr>
-        <p:txBody>
-          <a:bodyPr xmlns:a="http://schemas.openxmlformats.org/drawingml/2006/main">
-            <a:noAutofit/>
-          </a:bodyPr>
-          <a:lstStyle xmlns:a="http://schemas.openxmlformats.org/drawingml/2006/main"/>
-          <a:p xmlns:a="http://schemas.openxmlformats.org/drawingml/2006/main">
-            <a:pPr>
-              <a:defRPr sz="2325" b="1">
+                <a16:creationId xmlns:a16="http://schemas.microsoft.com/office/drawing/2014/main" id="{BBDDEA65-3A52-462A-9DC3-0EDD62B4AAA8}"/>
+              </a:ext>
+            </a:extLst>
+          </p:cNvPr>
+          <p:cNvSpPr>
+            <a:spLocks xmlns:a="http://schemas.openxmlformats.org/drawingml/2006/main" noGrp="1"/>
+          </p:cNvSpPr>
+          <p:nvPr/>
+        </p:nvSpPr>
+        <p:spPr>
+          <a:xfrm xmlns:a="http://schemas.openxmlformats.org/drawingml/2006/main">
+            <a:off x="3714750" y="2476500"/>
+            <a:ext cx="7715250" cy="590550"/>
+          </a:xfrm>
+          <a:prstGeom xmlns:a="http://schemas.openxmlformats.org/drawingml/2006/main" prst="rect">
+            <a:avLst/>
+          </a:prstGeom>
+          <a:noFill xmlns:a="http://schemas.openxmlformats.org/drawingml/2006/main"/>
+          <a:ln xmlns:a="http://schemas.openxmlformats.org/drawingml/2006/main" w="0">
+            <a:noFill/>
+          </a:ln>
+        </p:spPr>
+        <p:txBody>
+          <a:bodyPr xmlns:a="http://schemas.openxmlformats.org/drawingml/2006/main">
+            <a:noAutofit/>
+          </a:bodyPr>
+          <a:lstStyle xmlns:a="http://schemas.openxmlformats.org/drawingml/2006/main"/>
+          <a:p xmlns:a="http://schemas.openxmlformats.org/drawingml/2006/main">
+            <a:pPr>
+              <a:defRPr sz="2100" b="0">
+                <a:solidFill>
+                  <a:srgbClr val="172F3F"/>
+                </a:solidFill>
+                <a:latin typeface="Helvetica Neue"/>
+                <a:ea typeface="Helvetica Neue"/>
+                <a:cs typeface="Helvetica Neue"/>
+              </a:defRPr>
+            </a:pPr>
+            <a:r>
+              <a:rPr sz="2100" b="0">
+                <a:solidFill>
+                  <a:srgbClr val="172F3F"/>
+                </a:solidFill>
+                <a:latin typeface="Helvetica Neue"/>
+                <a:ea typeface="Helvetica Neue"/>
+                <a:cs typeface="Helvetica Neue"/>
+              </a:rPr>
+              <a:t>Discover transactions and commands in the editor</a:t>
+            </a:r>
+          </a:p>
+        </p:txBody>
+      </p:sp>
+      <p:sp>
+        <p:nvSpPr>
+          <p:cNvPr id="6" name="">
+            <a:extLst xmlns:a="http://schemas.openxmlformats.org/drawingml/2006/main">
+              <a:ext uri="{FF2B5EF4-FFF2-40B4-BE49-F238E27FC236}">
+                <a16:creationId xmlns:a16="http://schemas.microsoft.com/office/drawing/2014/main" id="{1F36DB95-440B-4777-9087-52DCF8843B22}"/>
+              </a:ext>
+            </a:extLst>
+          </p:cNvPr>
+          <p:cNvSpPr>
+            <a:spLocks xmlns:a="http://schemas.openxmlformats.org/drawingml/2006/main" noGrp="1"/>
+          </p:cNvSpPr>
+          <p:nvPr/>
+        </p:nvSpPr>
+        <p:spPr>
+          <a:xfrm xmlns:a="http://schemas.openxmlformats.org/drawingml/2006/main">
+            <a:off x="685800" y="3238500"/>
+            <a:ext cx="2952750" cy="523875"/>
+          </a:xfrm>
+          <a:prstGeom xmlns:a="http://schemas.openxmlformats.org/drawingml/2006/main" prst="rect">
+            <a:avLst/>
+          </a:prstGeom>
+          <a:noFill xmlns:a="http://schemas.openxmlformats.org/drawingml/2006/main"/>
+          <a:ln xmlns:a="http://schemas.openxmlformats.org/drawingml/2006/main" w="0">
+            <a:noFill/>
+          </a:ln>
+        </p:spPr>
+        <p:txBody>
+          <a:bodyPr xmlns:a="http://schemas.openxmlformats.org/drawingml/2006/main">
+            <a:noAutofit/>
+          </a:bodyPr>
+          <a:lstStyle xmlns:a="http://schemas.openxmlformats.org/drawingml/2006/main"/>
+          <a:p xmlns:a="http://schemas.openxmlformats.org/drawingml/2006/main">
+            <a:pPr>
+              <a:defRPr sz="2250" b="1">
                 <a:solidFill>
                   <a:srgbClr val="1D7479"/>
                 </a:solidFill>
@@ -2490,7 +2618,7 @@
               </a:defRPr>
             </a:pPr>
             <a:r>
-              <a:rPr sz="2325" b="1">
+              <a:rPr sz="2250" b="1">
                 <a:solidFill>
                   <a:srgbClr val="1D7479"/>
                 </a:solidFill>
@@ -2498,64 +2626,7 @@
                 <a:ea typeface="Helvetica Neue"/>
                 <a:cs typeface="Helvetica Neue"/>
               </a:rPr>
-              <a:t>Pagination</a:t>
-            </a:r>
-          </a:p>
-        </p:txBody>
-      </p:sp>
-      <p:sp>
-        <p:nvSpPr>
-          <p:cNvPr id="6" name="">
-            <a:extLst xmlns:a="http://schemas.openxmlformats.org/drawingml/2006/main">
-              <a:ext uri="{FF2B5EF4-FFF2-40B4-BE49-F238E27FC236}">
-                <a16:creationId xmlns:a16="http://schemas.microsoft.com/office/drawing/2014/main" id="{30D387A9-7BF4-40FE-9636-01862AD6FC81}"/>
-              </a:ext>
-            </a:extLst>
-          </p:cNvPr>
-          <p:cNvSpPr>
-            <a:spLocks xmlns:a="http://schemas.openxmlformats.org/drawingml/2006/main" noGrp="1"/>
-          </p:cNvSpPr>
-          <p:nvPr/>
-        </p:nvSpPr>
-        <p:spPr>
-          <a:xfrm xmlns:a="http://schemas.openxmlformats.org/drawingml/2006/main">
-            <a:off x="4000500" y="2990850"/>
-            <a:ext cx="7381875" cy="723900"/>
-          </a:xfrm>
-          <a:prstGeom xmlns:a="http://schemas.openxmlformats.org/drawingml/2006/main" prst="rect">
-            <a:avLst/>
-          </a:prstGeom>
-          <a:noFill xmlns:a="http://schemas.openxmlformats.org/drawingml/2006/main"/>
-          <a:ln xmlns:a="http://schemas.openxmlformats.org/drawingml/2006/main" w="0">
-            <a:noFill/>
-          </a:ln>
-        </p:spPr>
-        <p:txBody>
-          <a:bodyPr xmlns:a="http://schemas.openxmlformats.org/drawingml/2006/main">
-            <a:noAutofit/>
-          </a:bodyPr>
-          <a:lstStyle xmlns:a="http://schemas.openxmlformats.org/drawingml/2006/main"/>
-          <a:p xmlns:a="http://schemas.openxmlformats.org/drawingml/2006/main">
-            <a:pPr>
-              <a:defRPr sz="2175" b="0">
-                <a:solidFill>
-                  <a:srgbClr val="172F3F"/>
-                </a:solidFill>
-                <a:latin typeface="Helvetica Neue"/>
-                <a:ea typeface="Helvetica Neue"/>
-                <a:cs typeface="Helvetica Neue"/>
-              </a:defRPr>
-            </a:pPr>
-            <a:r>
-              <a:rPr sz="2175" b="0">
-                <a:solidFill>
-                  <a:srgbClr val="172F3F"/>
-                </a:solidFill>
-                <a:latin typeface="Helvetica Neue"/>
-                <a:ea typeface="Helvetica Neue"/>
-                <a:cs typeface="Helvetica Neue"/>
-              </a:rPr>
-              <a:t>Supported commands with predictable defaults</a:t>
+              <a:t>MPT issuance</a:t>
             </a:r>
           </a:p>
         </p:txBody>
@@ -2565,36 +2636,93 @@
           <p:cNvPr id="7" name="">
             <a:extLst xmlns:a="http://schemas.openxmlformats.org/drawingml/2006/main">
               <a:ext uri="{FF2B5EF4-FFF2-40B4-BE49-F238E27FC236}">
-                <a16:creationId xmlns:a16="http://schemas.microsoft.com/office/drawing/2014/main" id="{46F5F9D2-79A9-4ECA-9D21-3986D78267C5}"/>
-              </a:ext>
-            </a:extLst>
-          </p:cNvPr>
-          <p:cNvSpPr>
-            <a:spLocks xmlns:a="http://schemas.openxmlformats.org/drawingml/2006/main" noGrp="1"/>
-          </p:cNvSpPr>
-          <p:nvPr/>
-        </p:nvSpPr>
-        <p:spPr>
-          <a:xfrm xmlns:a="http://schemas.openxmlformats.org/drawingml/2006/main">
-            <a:off x="685800" y="3886200"/>
-            <a:ext cx="3143250" cy="590550"/>
-          </a:xfrm>
-          <a:prstGeom xmlns:a="http://schemas.openxmlformats.org/drawingml/2006/main" prst="rect">
-            <a:avLst/>
-          </a:prstGeom>
-          <a:noFill xmlns:a="http://schemas.openxmlformats.org/drawingml/2006/main"/>
-          <a:ln xmlns:a="http://schemas.openxmlformats.org/drawingml/2006/main" w="0">
-            <a:noFill/>
-          </a:ln>
-        </p:spPr>
-        <p:txBody>
-          <a:bodyPr xmlns:a="http://schemas.openxmlformats.org/drawingml/2006/main">
-            <a:noAutofit/>
-          </a:bodyPr>
-          <a:lstStyle xmlns:a="http://schemas.openxmlformats.org/drawingml/2006/main"/>
-          <a:p xmlns:a="http://schemas.openxmlformats.org/drawingml/2006/main">
-            <a:pPr>
-              <a:defRPr sz="2325" b="1">
+                <a16:creationId xmlns:a16="http://schemas.microsoft.com/office/drawing/2014/main" id="{CEA575DA-8EC1-4564-B5F7-7EF4F80B53C3}"/>
+              </a:ext>
+            </a:extLst>
+          </p:cNvPr>
+          <p:cNvSpPr>
+            <a:spLocks xmlns:a="http://schemas.openxmlformats.org/drawingml/2006/main" noGrp="1"/>
+          </p:cNvSpPr>
+          <p:nvPr/>
+        </p:nvSpPr>
+        <p:spPr>
+          <a:xfrm xmlns:a="http://schemas.openxmlformats.org/drawingml/2006/main">
+            <a:off x="3714750" y="3238500"/>
+            <a:ext cx="7715250" cy="590550"/>
+          </a:xfrm>
+          <a:prstGeom xmlns:a="http://schemas.openxmlformats.org/drawingml/2006/main" prst="rect">
+            <a:avLst/>
+          </a:prstGeom>
+          <a:noFill xmlns:a="http://schemas.openxmlformats.org/drawingml/2006/main"/>
+          <a:ln xmlns:a="http://schemas.openxmlformats.org/drawingml/2006/main" w="0">
+            <a:noFill/>
+          </a:ln>
+        </p:spPr>
+        <p:txBody>
+          <a:bodyPr xmlns:a="http://schemas.openxmlformats.org/drawingml/2006/main">
+            <a:noAutofit/>
+          </a:bodyPr>
+          <a:lstStyle xmlns:a="http://schemas.openxmlformats.org/drawingml/2006/main"/>
+          <a:p xmlns:a="http://schemas.openxmlformats.org/drawingml/2006/main">
+            <a:pPr>
+              <a:defRPr sz="2100" b="0">
+                <a:solidFill>
+                  <a:srgbClr val="172F3F"/>
+                </a:solidFill>
+                <a:latin typeface="Helvetica Neue"/>
+                <a:ea typeface="Helvetica Neue"/>
+                <a:cs typeface="Helvetica Neue"/>
+              </a:defRPr>
+            </a:pPr>
+            <a:r>
+              <a:rPr sz="2100" b="0">
+                <a:solidFill>
+                  <a:srgbClr val="172F3F"/>
+                </a:solidFill>
+                <a:latin typeface="Helvetica Neue"/>
+                <a:ea typeface="Helvetica Neue"/>
+                <a:cs typeface="Helvetica Neue"/>
+              </a:rPr>
+              <a:t>Create, inspect, update and confirm metadata</a:t>
+            </a:r>
+          </a:p>
+        </p:txBody>
+      </p:sp>
+      <p:sp>
+        <p:nvSpPr>
+          <p:cNvPr id="8" name="">
+            <a:extLst xmlns:a="http://schemas.openxmlformats.org/drawingml/2006/main">
+              <a:ext uri="{FF2B5EF4-FFF2-40B4-BE49-F238E27FC236}">
+                <a16:creationId xmlns:a16="http://schemas.microsoft.com/office/drawing/2014/main" id="{7F2CF5CB-B153-41E2-B0B0-A0EAC96D69A9}"/>
+              </a:ext>
+            </a:extLst>
+          </p:cNvPr>
+          <p:cNvSpPr>
+            <a:spLocks xmlns:a="http://schemas.openxmlformats.org/drawingml/2006/main" noGrp="1"/>
+          </p:cNvSpPr>
+          <p:nvPr/>
+        </p:nvSpPr>
+        <p:spPr>
+          <a:xfrm xmlns:a="http://schemas.openxmlformats.org/drawingml/2006/main">
+            <a:off x="685800" y="4000500"/>
+            <a:ext cx="2952750" cy="523875"/>
+          </a:xfrm>
+          <a:prstGeom xmlns:a="http://schemas.openxmlformats.org/drawingml/2006/main" prst="rect">
+            <a:avLst/>
+          </a:prstGeom>
+          <a:noFill xmlns:a="http://schemas.openxmlformats.org/drawingml/2006/main"/>
+          <a:ln xmlns:a="http://schemas.openxmlformats.org/drawingml/2006/main" w="0">
+            <a:noFill/>
+          </a:ln>
+        </p:spPr>
+        <p:txBody>
+          <a:bodyPr xmlns:a="http://schemas.openxmlformats.org/drawingml/2006/main">
+            <a:noAutofit/>
+          </a:bodyPr>
+          <a:lstStyle xmlns:a="http://schemas.openxmlformats.org/drawingml/2006/main"/>
+          <a:p xmlns:a="http://schemas.openxmlformats.org/drawingml/2006/main">
+            <a:pPr>
+              <a:defRPr sz="2250" b="1">
                 <a:solidFill>
                   <a:srgbClr val="1D7479"/>
                 </a:solidFill>
@@ -2604,7 +2732,7 @@
               </a:defRPr>
             </a:pPr>
             <a:r>
-              <a:rPr sz="2325" b="1">
+              <a:rPr sz="2250" b="1">
                 <a:solidFill>
                   <a:srgbClr val="1D7479"/>
                 </a:solidFill>
@@ -2612,64 +2740,7 @@
                 <a:ea typeface="Helvetica Neue"/>
                 <a:cs typeface="Helvetica Neue"/>
               </a:rPr>
-              <a:t>Recovery</a:t>
-            </a:r>
-          </a:p>
-        </p:txBody>
-      </p:sp>
-      <p:sp>
-        <p:nvSpPr>
-          <p:cNvPr id="8" name="">
-            <a:extLst xmlns:a="http://schemas.openxmlformats.org/drawingml/2006/main">
-              <a:ext uri="{FF2B5EF4-FFF2-40B4-BE49-F238E27FC236}">
-                <a16:creationId xmlns:a16="http://schemas.microsoft.com/office/drawing/2014/main" id="{127EE18A-2BE5-4B47-ADB4-70601CC67188}"/>
-              </a:ext>
-            </a:extLst>
-          </p:cNvPr>
-          <p:cNvSpPr>
-            <a:spLocks xmlns:a="http://schemas.openxmlformats.org/drawingml/2006/main" noGrp="1"/>
-          </p:cNvSpPr>
-          <p:nvPr/>
-        </p:nvSpPr>
-        <p:spPr>
-          <a:xfrm xmlns:a="http://schemas.openxmlformats.org/drawingml/2006/main">
-            <a:off x="4000500" y="3886200"/>
-            <a:ext cx="7381875" cy="723900"/>
-          </a:xfrm>
-          <a:prstGeom xmlns:a="http://schemas.openxmlformats.org/drawingml/2006/main" prst="rect">
-            <a:avLst/>
-          </a:prstGeom>
-          <a:noFill xmlns:a="http://schemas.openxmlformats.org/drawingml/2006/main"/>
-          <a:ln xmlns:a="http://schemas.openxmlformats.org/drawingml/2006/main" w="0">
-            <a:noFill/>
-          </a:ln>
-        </p:spPr>
-        <p:txBody>
-          <a:bodyPr xmlns:a="http://schemas.openxmlformats.org/drawingml/2006/main">
-            <a:noAutofit/>
-          </a:bodyPr>
-          <a:lstStyle xmlns:a="http://schemas.openxmlformats.org/drawingml/2006/main"/>
-          <a:p xmlns:a="http://schemas.openxmlformats.org/drawingml/2006/main">
-            <a:pPr>
-              <a:defRPr sz="2175" b="0">
-                <a:solidFill>
-                  <a:srgbClr val="172F3F"/>
-                </a:solidFill>
-                <a:latin typeface="Helvetica Neue"/>
-                <a:ea typeface="Helvetica Neue"/>
-                <a:cs typeface="Helvetica Neue"/>
-              </a:defRPr>
-            </a:pPr>
-            <a:r>
-              <a:rPr sz="2175" b="0">
-                <a:solidFill>
-                  <a:srgbClr val="172F3F"/>
-                </a:solidFill>
-                <a:latin typeface="Helvetica Neue"/>
-                <a:ea typeface="Helvetica Neue"/>
-                <a:cs typeface="Helvetica Neue"/>
-              </a:rPr>
-              <a:t>Checked error fields and validated decoding paths</a:t>
+              <a:t>Send XRP</a:t>
             </a:r>
           </a:p>
         </p:txBody>
@@ -2679,36 +2750,93 @@
           <p:cNvPr id="9" name="">
             <a:extLst xmlns:a="http://schemas.openxmlformats.org/drawingml/2006/main">
               <a:ext uri="{FF2B5EF4-FFF2-40B4-BE49-F238E27FC236}">
-                <a16:creationId xmlns:a16="http://schemas.microsoft.com/office/drawing/2014/main" id="{B850CD7A-F56A-4988-A9A9-F40C35FE8057}"/>
-              </a:ext>
-            </a:extLst>
-          </p:cNvPr>
-          <p:cNvSpPr>
-            <a:spLocks xmlns:a="http://schemas.openxmlformats.org/drawingml/2006/main" noGrp="1"/>
-          </p:cNvSpPr>
-          <p:nvPr/>
-        </p:nvSpPr>
-        <p:spPr>
-          <a:xfrm xmlns:a="http://schemas.openxmlformats.org/drawingml/2006/main">
-            <a:off x="685800" y="4781550"/>
-            <a:ext cx="3143250" cy="590550"/>
-          </a:xfrm>
-          <a:prstGeom xmlns:a="http://schemas.openxmlformats.org/drawingml/2006/main" prst="rect">
-            <a:avLst/>
-          </a:prstGeom>
-          <a:noFill xmlns:a="http://schemas.openxmlformats.org/drawingml/2006/main"/>
-          <a:ln xmlns:a="http://schemas.openxmlformats.org/drawingml/2006/main" w="0">
-            <a:noFill/>
-          </a:ln>
-        </p:spPr>
-        <p:txBody>
-          <a:bodyPr xmlns:a="http://schemas.openxmlformats.org/drawingml/2006/main">
-            <a:noAutofit/>
-          </a:bodyPr>
-          <a:lstStyle xmlns:a="http://schemas.openxmlformats.org/drawingml/2006/main"/>
-          <a:p xmlns:a="http://schemas.openxmlformats.org/drawingml/2006/main">
-            <a:pPr>
-              <a:defRPr sz="2325" b="1">
+                <a16:creationId xmlns:a16="http://schemas.microsoft.com/office/drawing/2014/main" id="{DD78DD38-3999-4C57-8269-A6E1B75C6E75}"/>
+              </a:ext>
+            </a:extLst>
+          </p:cNvPr>
+          <p:cNvSpPr>
+            <a:spLocks xmlns:a="http://schemas.openxmlformats.org/drawingml/2006/main" noGrp="1"/>
+          </p:cNvSpPr>
+          <p:nvPr/>
+        </p:nvSpPr>
+        <p:spPr>
+          <a:xfrm xmlns:a="http://schemas.openxmlformats.org/drawingml/2006/main">
+            <a:off x="3714750" y="4000500"/>
+            <a:ext cx="7715250" cy="590550"/>
+          </a:xfrm>
+          <a:prstGeom xmlns:a="http://schemas.openxmlformats.org/drawingml/2006/main" prst="rect">
+            <a:avLst/>
+          </a:prstGeom>
+          <a:noFill xmlns:a="http://schemas.openxmlformats.org/drawingml/2006/main"/>
+          <a:ln xmlns:a="http://schemas.openxmlformats.org/drawingml/2006/main" w="0">
+            <a:noFill/>
+          </a:ln>
+        </p:spPr>
+        <p:txBody>
+          <a:bodyPr xmlns:a="http://schemas.openxmlformats.org/drawingml/2006/main">
+            <a:noAutofit/>
+          </a:bodyPr>
+          <a:lstStyle xmlns:a="http://schemas.openxmlformats.org/drawingml/2006/main"/>
+          <a:p xmlns:a="http://schemas.openxmlformats.org/drawingml/2006/main">
+            <a:pPr>
+              <a:defRPr sz="2100" b="0">
+                <a:solidFill>
+                  <a:srgbClr val="172F3F"/>
+                </a:solidFill>
+                <a:latin typeface="Helvetica Neue"/>
+                <a:ea typeface="Helvetica Neue"/>
+                <a:cs typeface="Helvetica Neue"/>
+              </a:defRPr>
+            </a:pPr>
+            <a:r>
+              <a:rPr sz="2100" b="0">
+                <a:solidFill>
+                  <a:srgbClr val="172F3F"/>
+                </a:solidFill>
+                <a:latin typeface="Helvetica Neue"/>
+                <a:ea typeface="Helvetica Neue"/>
+                <a:cs typeface="Helvetica Neue"/>
+              </a:rPr>
+              <a:t>Prepare, sign and confirm the same transaction</a:t>
+            </a:r>
+          </a:p>
+        </p:txBody>
+      </p:sp>
+      <p:sp>
+        <p:nvSpPr>
+          <p:cNvPr id="10" name="">
+            <a:extLst xmlns:a="http://schemas.openxmlformats.org/drawingml/2006/main">
+              <a:ext uri="{FF2B5EF4-FFF2-40B4-BE49-F238E27FC236}">
+                <a16:creationId xmlns:a16="http://schemas.microsoft.com/office/drawing/2014/main" id="{BBA726AF-C90C-4367-9582-A9B5E78C1C6A}"/>
+              </a:ext>
+            </a:extLst>
+          </p:cNvPr>
+          <p:cNvSpPr>
+            <a:spLocks xmlns:a="http://schemas.openxmlformats.org/drawingml/2006/main" noGrp="1"/>
+          </p:cNvSpPr>
+          <p:nvPr/>
+        </p:nvSpPr>
+        <p:spPr>
+          <a:xfrm xmlns:a="http://schemas.openxmlformats.org/drawingml/2006/main">
+            <a:off x="685800" y="4762500"/>
+            <a:ext cx="2952750" cy="523875"/>
+          </a:xfrm>
+          <a:prstGeom xmlns:a="http://schemas.openxmlformats.org/drawingml/2006/main" prst="rect">
+            <a:avLst/>
+          </a:prstGeom>
+          <a:noFill xmlns:a="http://schemas.openxmlformats.org/drawingml/2006/main"/>
+          <a:ln xmlns:a="http://schemas.openxmlformats.org/drawingml/2006/main" w="0">
+            <a:noFill/>
+          </a:ln>
+        </p:spPr>
+        <p:txBody>
+          <a:bodyPr xmlns:a="http://schemas.openxmlformats.org/drawingml/2006/main">
+            <a:noAutofit/>
+          </a:bodyPr>
+          <a:lstStyle xmlns:a="http://schemas.openxmlformats.org/drawingml/2006/main"/>
+          <a:p xmlns:a="http://schemas.openxmlformats.org/drawingml/2006/main">
+            <a:pPr>
+              <a:defRPr sz="2250" b="1">
                 <a:solidFill>
                   <a:srgbClr val="1D7479"/>
                 </a:solidFill>
@@ -2718,7 +2846,7 @@
               </a:defRPr>
             </a:pPr>
             <a:r>
-              <a:rPr sz="2325" b="1">
+              <a:rPr sz="2250" b="1">
                 <a:solidFill>
                   <a:srgbClr val="1D7479"/>
                 </a:solidFill>
@@ -2726,64 +2854,7 @@
                 <a:ea typeface="Helvetica Neue"/>
                 <a:cs typeface="Helvetica Neue"/>
               </a:rPr>
-              <a:t>Value handling</a:t>
-            </a:r>
-          </a:p>
-        </p:txBody>
-      </p:sp>
-      <p:sp>
-        <p:nvSpPr>
-          <p:cNvPr id="10" name="">
-            <a:extLst xmlns:a="http://schemas.openxmlformats.org/drawingml/2006/main">
-              <a:ext uri="{FF2B5EF4-FFF2-40B4-BE49-F238E27FC236}">
-                <a16:creationId xmlns:a16="http://schemas.microsoft.com/office/drawing/2014/main" id="{9506D55F-5D2D-45FC-9648-E4AAE0D84384}"/>
-              </a:ext>
-            </a:extLst>
-          </p:cNvPr>
-          <p:cNvSpPr>
-            <a:spLocks xmlns:a="http://schemas.openxmlformats.org/drawingml/2006/main" noGrp="1"/>
-          </p:cNvSpPr>
-          <p:nvPr/>
-        </p:nvSpPr>
-        <p:spPr>
-          <a:xfrm xmlns:a="http://schemas.openxmlformats.org/drawingml/2006/main">
-            <a:off x="4000500" y="4781550"/>
-            <a:ext cx="7381875" cy="723900"/>
-          </a:xfrm>
-          <a:prstGeom xmlns:a="http://schemas.openxmlformats.org/drawingml/2006/main" prst="rect">
-            <a:avLst/>
-          </a:prstGeom>
-          <a:noFill xmlns:a="http://schemas.openxmlformats.org/drawingml/2006/main"/>
-          <a:ln xmlns:a="http://schemas.openxmlformats.org/drawingml/2006/main" w="0">
-            <a:noFill/>
-          </a:ln>
-        </p:spPr>
-        <p:txBody>
-          <a:bodyPr xmlns:a="http://schemas.openxmlformats.org/drawingml/2006/main">
-            <a:noAutofit/>
-          </a:bodyPr>
-          <a:lstStyle xmlns:a="http://schemas.openxmlformats.org/drawingml/2006/main"/>
-          <a:p xmlns:a="http://schemas.openxmlformats.org/drawingml/2006/main">
-            <a:pPr>
-              <a:defRPr sz="2175" b="0">
-                <a:solidFill>
-                  <a:srgbClr val="172F3F"/>
-                </a:solidFill>
-                <a:latin typeface="Helvetica Neue"/>
-                <a:ea typeface="Helvetica Neue"/>
-                <a:cs typeface="Helvetica Neue"/>
-              </a:defRPr>
-            </a:pPr>
-            <a:r>
-              <a:rPr sz="2175" b="0">
-                <a:solidFill>
-                  <a:srgbClr val="172F3F"/>
-                </a:solidFill>
-                <a:latin typeface="Helvetica Neue"/>
-                <a:ea typeface="Helvetica Neue"/>
-                <a:cs typeface="Helvetica Neue"/>
-              </a:rPr>
-              <a:t>Exact values and an explicit MPT support contract</a:t>
+              <a:t>Create AMM</a:t>
             </a:r>
           </a:p>
         </p:txBody>
@@ -2793,19 +2864,76 @@
           <p:cNvPr id="11" name="">
             <a:extLst xmlns:a="http://schemas.openxmlformats.org/drawingml/2006/main">
               <a:ext uri="{FF2B5EF4-FFF2-40B4-BE49-F238E27FC236}">
-                <a16:creationId xmlns:a16="http://schemas.microsoft.com/office/drawing/2014/main" id="{FD44704D-5413-4017-AFDF-BB6CFFEB7A7E}"/>
-              </a:ext>
-            </a:extLst>
-          </p:cNvPr>
-          <p:cNvSpPr>
-            <a:spLocks xmlns:a="http://schemas.openxmlformats.org/drawingml/2006/main" noGrp="1"/>
-          </p:cNvSpPr>
-          <p:nvPr/>
-        </p:nvSpPr>
-        <p:spPr>
-          <a:xfrm xmlns:a="http://schemas.openxmlformats.org/drawingml/2006/main">
-            <a:off x="685800" y="5810250"/>
-            <a:ext cx="10572750" cy="476250"/>
+                <a16:creationId xmlns:a16="http://schemas.microsoft.com/office/drawing/2014/main" id="{4FA63FE6-9B23-4C2B-84AD-DB78255EBE08}"/>
+              </a:ext>
+            </a:extLst>
+          </p:cNvPr>
+          <p:cNvSpPr>
+            <a:spLocks xmlns:a="http://schemas.openxmlformats.org/drawingml/2006/main" noGrp="1"/>
+          </p:cNvSpPr>
+          <p:nvPr/>
+        </p:nvSpPr>
+        <p:spPr>
+          <a:xfrm xmlns:a="http://schemas.openxmlformats.org/drawingml/2006/main">
+            <a:off x="3714750" y="4762500"/>
+            <a:ext cx="7715250" cy="590550"/>
+          </a:xfrm>
+          <a:prstGeom xmlns:a="http://schemas.openxmlformats.org/drawingml/2006/main" prst="rect">
+            <a:avLst/>
+          </a:prstGeom>
+          <a:noFill xmlns:a="http://schemas.openxmlformats.org/drawingml/2006/main"/>
+          <a:ln xmlns:a="http://schemas.openxmlformats.org/drawingml/2006/main" w="0">
+            <a:noFill/>
+          </a:ln>
+        </p:spPr>
+        <p:txBody>
+          <a:bodyPr xmlns:a="http://schemas.openxmlformats.org/drawingml/2006/main">
+            <a:noAutofit/>
+          </a:bodyPr>
+          <a:lstStyle xmlns:a="http://schemas.openxmlformats.org/drawingml/2006/main"/>
+          <a:p xmlns:a="http://schemas.openxmlformats.org/drawingml/2006/main">
+            <a:pPr>
+              <a:defRPr sz="2100" b="0">
+                <a:solidFill>
+                  <a:srgbClr val="172F3F"/>
+                </a:solidFill>
+                <a:latin typeface="Helvetica Neue"/>
+                <a:ea typeface="Helvetica Neue"/>
+                <a:cs typeface="Helvetica Neue"/>
+              </a:defRPr>
+            </a:pPr>
+            <a:r>
+              <a:rPr sz="2100" b="0">
+                <a:solidFill>
+                  <a:srgbClr val="172F3F"/>
+                </a:solidFill>
+                <a:latin typeface="Helvetica Neue"/>
+                <a:ea typeface="Helvetica Neue"/>
+                <a:cs typeface="Helvetica Neue"/>
+              </a:rPr>
+              <a:t>Typed setup and SDK-checked success at each step</a:t>
+            </a:r>
+          </a:p>
+        </p:txBody>
+      </p:sp>
+      <p:sp>
+        <p:nvSpPr>
+          <p:cNvPr id="12" name="">
+            <a:extLst xmlns:a="http://schemas.openxmlformats.org/drawingml/2006/main">
+              <a:ext uri="{FF2B5EF4-FFF2-40B4-BE49-F238E27FC236}">
+                <a16:creationId xmlns:a16="http://schemas.microsoft.com/office/drawing/2014/main" id="{DB0CA5DD-5CF2-45C0-B991-590D0EF8FC60}"/>
+              </a:ext>
+            </a:extLst>
+          </p:cNvPr>
+          <p:cNvSpPr>
+            <a:spLocks xmlns:a="http://schemas.openxmlformats.org/drawingml/2006/main" noGrp="1"/>
+          </p:cNvSpPr>
+          <p:nvPr/>
+        </p:nvSpPr>
+        <p:spPr>
+          <a:xfrm xmlns:a="http://schemas.openxmlformats.org/drawingml/2006/main">
+            <a:off x="685800" y="5715000"/>
+            <a:ext cx="10668000" cy="514350"/>
           </a:xfrm>
           <a:prstGeom xmlns:a="http://schemas.openxmlformats.org/drawingml/2006/main" prst="rect">
             <a:avLst/>
@@ -2840,7 +2968,7 @@
                 <a:ea typeface="Helvetica Neue"/>
                 <a:cs typeface="Helvetica Neue"/>
               </a:rPr>
-              <a:t>The register distinguishes compiler, source, mock, synthetic and ledger evidence.</a:t>
+              <a:t>Five other legacy families and the original broad AMM example still need remediation.</a:t>
             </a:r>
           </a:p>
         </p:txBody>
@@ -2848,7 +2976,7 @@
     </p:spTree>
     <p:extLst>
       <p:ext uri="{BB962C8B-B14F-4D97-AF65-F5344CB8AC3E}">
-        <p14:creationId xmlns:p14="http://schemas.microsoft.com/office/powerpoint/2010/main" val="1913727199"/>
+        <p14:creationId xmlns:p14="http://schemas.microsoft.com/office/powerpoint/2010/main" val="1124182474"/>
       </p:ext>
     </p:extLst>
   </p:cSld>
@@ -2876,10 +3004,10 @@
       </p:grpSpPr>
       <p:sp>
         <p:nvSpPr>
-          <p:cNvPr id="11" name="">
-            <a:extLst xmlns:a="http://schemas.openxmlformats.org/drawingml/2006/main">
-              <a:ext uri="{FF2B5EF4-FFF2-40B4-BE49-F238E27FC236}">
-                <a16:creationId xmlns:a16="http://schemas.microsoft.com/office/drawing/2014/main" id="{E58852E3-FC2D-4ED7-AE53-AA70647E3FE3}"/>
+          <p:cNvPr id="12" name="">
+            <a:extLst xmlns:a="http://schemas.openxmlformats.org/drawingml/2006/main">
+              <a:ext uri="{FF2B5EF4-FFF2-40B4-BE49-F238E27FC236}">
+                <a16:creationId xmlns:a16="http://schemas.microsoft.com/office/drawing/2014/main" id="{9BA4FE8C-6C0D-4E20-95FC-DC8587B3B4B6}"/>
               </a:ext>
             </a:extLst>
           </p:cNvPr>
@@ -2926,7 +3054,7 @@
                 <a:ea typeface="Helvetica Neue"/>
                 <a:cs typeface="Helvetica Neue"/>
               </a:rPr>
-              <a:t>Make improvement repeatable</a:t>
+              <a:t>Apply the same standard broadly</a:t>
             </a:r>
           </a:p>
         </p:txBody>
@@ -2936,7 +3064,7 @@
           <p:cNvPr id="2" name="">
             <a:extLst xmlns:a="http://schemas.openxmlformats.org/drawingml/2006/main">
               <a:ext uri="{FF2B5EF4-FFF2-40B4-BE49-F238E27FC236}">
-                <a16:creationId xmlns:a16="http://schemas.microsoft.com/office/drawing/2014/main" id="{6D73994C-55DC-43B5-9F66-811F05EB7661}"/>
+                <a16:creationId xmlns:a16="http://schemas.microsoft.com/office/drawing/2014/main" id="{84951918-6A4F-4100-9167-8F6B88468CF8}"/>
               </a:ext>
             </a:extLst>
           </p:cNvPr>
@@ -2993,36 +3121,36 @@
           <p:cNvPr id="3" name="">
             <a:extLst xmlns:a="http://schemas.openxmlformats.org/drawingml/2006/main">
               <a:ext uri="{FF2B5EF4-FFF2-40B4-BE49-F238E27FC236}">
-                <a16:creationId xmlns:a16="http://schemas.microsoft.com/office/drawing/2014/main" id="{41ADF466-3375-4257-B7E8-0963D5F850D8}"/>
-              </a:ext>
-            </a:extLst>
-          </p:cNvPr>
-          <p:cNvSpPr>
-            <a:spLocks xmlns:a="http://schemas.openxmlformats.org/drawingml/2006/main" noGrp="1"/>
-          </p:cNvSpPr>
-          <p:nvPr/>
-        </p:nvSpPr>
-        <p:spPr>
-          <a:xfrm xmlns:a="http://schemas.openxmlformats.org/drawingml/2006/main">
-            <a:off x="685800" y="2143125"/>
-            <a:ext cx="762000" cy="571500"/>
-          </a:xfrm>
-          <a:prstGeom xmlns:a="http://schemas.openxmlformats.org/drawingml/2006/main" prst="rect">
-            <a:avLst/>
-          </a:prstGeom>
-          <a:noFill xmlns:a="http://schemas.openxmlformats.org/drawingml/2006/main"/>
-          <a:ln xmlns:a="http://schemas.openxmlformats.org/drawingml/2006/main" w="0">
-            <a:noFill/>
-          </a:ln>
-        </p:spPr>
-        <p:txBody>
-          <a:bodyPr xmlns:a="http://schemas.openxmlformats.org/drawingml/2006/main">
-            <a:noAutofit/>
-          </a:bodyPr>
-          <a:lstStyle xmlns:a="http://schemas.openxmlformats.org/drawingml/2006/main"/>
-          <a:p xmlns:a="http://schemas.openxmlformats.org/drawingml/2006/main">
-            <a:pPr>
-              <a:defRPr sz="3000" b="1">
+                <a16:creationId xmlns:a16="http://schemas.microsoft.com/office/drawing/2014/main" id="{2ABDD374-94E8-4FFF-AD21-734B0F10A012}"/>
+              </a:ext>
+            </a:extLst>
+          </p:cNvPr>
+          <p:cNvSpPr>
+            <a:spLocks xmlns:a="http://schemas.openxmlformats.org/drawingml/2006/main" noGrp="1"/>
+          </p:cNvSpPr>
+          <p:nvPr/>
+        </p:nvSpPr>
+        <p:spPr>
+          <a:xfrm xmlns:a="http://schemas.openxmlformats.org/drawingml/2006/main">
+            <a:off x="685800" y="2095500"/>
+            <a:ext cx="3143250" cy="590550"/>
+          </a:xfrm>
+          <a:prstGeom xmlns:a="http://schemas.openxmlformats.org/drawingml/2006/main" prst="rect">
+            <a:avLst/>
+          </a:prstGeom>
+          <a:noFill xmlns:a="http://schemas.openxmlformats.org/drawingml/2006/main"/>
+          <a:ln xmlns:a="http://schemas.openxmlformats.org/drawingml/2006/main" w="0">
+            <a:noFill/>
+          </a:ln>
+        </p:spPr>
+        <p:txBody>
+          <a:bodyPr xmlns:a="http://schemas.openxmlformats.org/drawingml/2006/main">
+            <a:noAutofit/>
+          </a:bodyPr>
+          <a:lstStyle xmlns:a="http://schemas.openxmlformats.org/drawingml/2006/main"/>
+          <a:p xmlns:a="http://schemas.openxmlformats.org/drawingml/2006/main">
+            <a:pPr>
+              <a:defRPr sz="2325" b="1">
                 <a:solidFill>
                   <a:srgbClr val="1D7479"/>
                 </a:solidFill>
@@ -3032,7 +3160,7 @@
               </a:defRPr>
             </a:pPr>
             <a:r>
-              <a:rPr sz="3000" b="1">
+              <a:rPr sz="2325" b="1">
                 <a:solidFill>
                   <a:srgbClr val="1D7479"/>
                 </a:solidFill>
@@ -3040,7 +3168,7 @@
                 <a:ea typeface="Helvetica Neue"/>
                 <a:cs typeface="Helvetica Neue"/>
               </a:rPr>
-              <a:t>1</a:t>
+              <a:t>Events</a:t>
             </a:r>
           </a:p>
         </p:txBody>
@@ -3050,54 +3178,54 @@
           <p:cNvPr id="4" name="">
             <a:extLst xmlns:a="http://schemas.openxmlformats.org/drawingml/2006/main">
               <a:ext uri="{FF2B5EF4-FFF2-40B4-BE49-F238E27FC236}">
-                <a16:creationId xmlns:a16="http://schemas.microsoft.com/office/drawing/2014/main" id="{666582C4-98F0-47B8-B64B-79D31B785B2F}"/>
-              </a:ext>
-            </a:extLst>
-          </p:cNvPr>
-          <p:cNvSpPr>
-            <a:spLocks xmlns:a="http://schemas.openxmlformats.org/drawingml/2006/main" noGrp="1"/>
-          </p:cNvSpPr>
-          <p:nvPr/>
-        </p:nvSpPr>
-        <p:spPr>
-          <a:xfrm xmlns:a="http://schemas.openxmlformats.org/drawingml/2006/main">
-            <a:off x="1619250" y="2143125"/>
-            <a:ext cx="9715500" cy="723900"/>
-          </a:xfrm>
-          <a:prstGeom xmlns:a="http://schemas.openxmlformats.org/drawingml/2006/main" prst="rect">
-            <a:avLst/>
-          </a:prstGeom>
-          <a:noFill xmlns:a="http://schemas.openxmlformats.org/drawingml/2006/main"/>
-          <a:ln xmlns:a="http://schemas.openxmlformats.org/drawingml/2006/main" w="0">
-            <a:noFill/>
-          </a:ln>
-        </p:spPr>
-        <p:txBody>
-          <a:bodyPr xmlns:a="http://schemas.openxmlformats.org/drawingml/2006/main">
-            <a:noAutofit/>
-          </a:bodyPr>
-          <a:lstStyle xmlns:a="http://schemas.openxmlformats.org/drawingml/2006/main"/>
-          <a:p xmlns:a="http://schemas.openxmlformats.org/drawingml/2006/main">
-            <a:pPr>
-              <a:defRPr sz="2400" b="0">
-                <a:solidFill>
-                  <a:srgbClr val="172F3F"/>
-                </a:solidFill>
-                <a:latin typeface="Helvetica Neue"/>
-                <a:ea typeface="Helvetica Neue"/>
-                <a:cs typeface="Helvetica Neue"/>
-              </a:defRPr>
-            </a:pPr>
-            <a:r>
-              <a:rPr sz="2400" b="0">
-                <a:solidFill>
-                  <a:srgbClr val="172F3F"/>
-                </a:solidFill>
-                <a:latin typeface="Helvetica Neue"/>
-                <a:ea typeface="Helvetica Neue"/>
-                <a:cs typeface="Helvetica Neue"/>
-              </a:rPr>
-              <a:t>Restore accurate guidance in the published declarations.</a:t>
+                <a16:creationId xmlns:a16="http://schemas.microsoft.com/office/drawing/2014/main" id="{6AC2F033-9041-42D6-A8D2-71131F3DA1CD}"/>
+              </a:ext>
+            </a:extLst>
+          </p:cNvPr>
+          <p:cNvSpPr>
+            <a:spLocks xmlns:a="http://schemas.openxmlformats.org/drawingml/2006/main" noGrp="1"/>
+          </p:cNvSpPr>
+          <p:nvPr/>
+        </p:nvSpPr>
+        <p:spPr>
+          <a:xfrm xmlns:a="http://schemas.openxmlformats.org/drawingml/2006/main">
+            <a:off x="4000500" y="2095500"/>
+            <a:ext cx="7381875" cy="723900"/>
+          </a:xfrm>
+          <a:prstGeom xmlns:a="http://schemas.openxmlformats.org/drawingml/2006/main" prst="rect">
+            <a:avLst/>
+          </a:prstGeom>
+          <a:noFill xmlns:a="http://schemas.openxmlformats.org/drawingml/2006/main"/>
+          <a:ln xmlns:a="http://schemas.openxmlformats.org/drawingml/2006/main" w="0">
+            <a:noFill/>
+          </a:ln>
+        </p:spPr>
+        <p:txBody>
+          <a:bodyPr xmlns:a="http://schemas.openxmlformats.org/drawingml/2006/main">
+            <a:noAutofit/>
+          </a:bodyPr>
+          <a:lstStyle xmlns:a="http://schemas.openxmlformats.org/drawingml/2006/main"/>
+          <a:p xmlns:a="http://schemas.openxmlformats.org/drawingml/2006/main">
+            <a:pPr>
+              <a:defRPr sz="2175" b="0">
+                <a:solidFill>
+                  <a:srgbClr val="172F3F"/>
+                </a:solidFill>
+                <a:latin typeface="Helvetica Neue"/>
+                <a:ea typeface="Helvetica Neue"/>
+                <a:cs typeface="Helvetica Neue"/>
+              </a:defRPr>
+            </a:pPr>
+            <a:r>
+              <a:rPr sz="2175" b="0">
+                <a:solidFill>
+                  <a:srgbClr val="172F3F"/>
+                </a:solidFill>
+                <a:latin typeface="Helvetica Neue"/>
+                <a:ea typeface="Helvetica Neue"/>
+                <a:cs typeface="Helvetica Neue"/>
+              </a:rPr>
+              <a:t>Consistent payload types for on, once and aliases</a:t>
             </a:r>
           </a:p>
         </p:txBody>
@@ -3107,36 +3235,36 @@
           <p:cNvPr id="5" name="">
             <a:extLst xmlns:a="http://schemas.openxmlformats.org/drawingml/2006/main">
               <a:ext uri="{FF2B5EF4-FFF2-40B4-BE49-F238E27FC236}">
-                <a16:creationId xmlns:a16="http://schemas.microsoft.com/office/drawing/2014/main" id="{06F07AA9-AA9D-4409-8077-B980FE60C1E7}"/>
-              </a:ext>
-            </a:extLst>
-          </p:cNvPr>
-          <p:cNvSpPr>
-            <a:spLocks xmlns:a="http://schemas.openxmlformats.org/drawingml/2006/main" noGrp="1"/>
-          </p:cNvSpPr>
-          <p:nvPr/>
-        </p:nvSpPr>
-        <p:spPr>
-          <a:xfrm xmlns:a="http://schemas.openxmlformats.org/drawingml/2006/main">
-            <a:off x="685800" y="3038475"/>
-            <a:ext cx="762000" cy="571500"/>
-          </a:xfrm>
-          <a:prstGeom xmlns:a="http://schemas.openxmlformats.org/drawingml/2006/main" prst="rect">
-            <a:avLst/>
-          </a:prstGeom>
-          <a:noFill xmlns:a="http://schemas.openxmlformats.org/drawingml/2006/main"/>
-          <a:ln xmlns:a="http://schemas.openxmlformats.org/drawingml/2006/main" w="0">
-            <a:noFill/>
-          </a:ln>
-        </p:spPr>
-        <p:txBody>
-          <a:bodyPr xmlns:a="http://schemas.openxmlformats.org/drawingml/2006/main">
-            <a:noAutofit/>
-          </a:bodyPr>
-          <a:lstStyle xmlns:a="http://schemas.openxmlformats.org/drawingml/2006/main"/>
-          <a:p xmlns:a="http://schemas.openxmlformats.org/drawingml/2006/main">
-            <a:pPr>
-              <a:defRPr sz="3000" b="1">
+                <a16:creationId xmlns:a16="http://schemas.microsoft.com/office/drawing/2014/main" id="{FAEA54C8-B4D0-460A-BCCD-FBA7D6E127A0}"/>
+              </a:ext>
+            </a:extLst>
+          </p:cNvPr>
+          <p:cNvSpPr>
+            <a:spLocks xmlns:a="http://schemas.openxmlformats.org/drawingml/2006/main" noGrp="1"/>
+          </p:cNvSpPr>
+          <p:nvPr/>
+        </p:nvSpPr>
+        <p:spPr>
+          <a:xfrm xmlns:a="http://schemas.openxmlformats.org/drawingml/2006/main">
+            <a:off x="685800" y="2990850"/>
+            <a:ext cx="3143250" cy="590550"/>
+          </a:xfrm>
+          <a:prstGeom xmlns:a="http://schemas.openxmlformats.org/drawingml/2006/main" prst="rect">
+            <a:avLst/>
+          </a:prstGeom>
+          <a:noFill xmlns:a="http://schemas.openxmlformats.org/drawingml/2006/main"/>
+          <a:ln xmlns:a="http://schemas.openxmlformats.org/drawingml/2006/main" w="0">
+            <a:noFill/>
+          </a:ln>
+        </p:spPr>
+        <p:txBody>
+          <a:bodyPr xmlns:a="http://schemas.openxmlformats.org/drawingml/2006/main">
+            <a:noAutofit/>
+          </a:bodyPr>
+          <a:lstStyle xmlns:a="http://schemas.openxmlformats.org/drawingml/2006/main"/>
+          <a:p xmlns:a="http://schemas.openxmlformats.org/drawingml/2006/main">
+            <a:pPr>
+              <a:defRPr sz="2325" b="1">
                 <a:solidFill>
                   <a:srgbClr val="1D7479"/>
                 </a:solidFill>
@@ -3146,7 +3274,7 @@
               </a:defRPr>
             </a:pPr>
             <a:r>
-              <a:rPr sz="3000" b="1">
+              <a:rPr sz="2325" b="1">
                 <a:solidFill>
                   <a:srgbClr val="1D7479"/>
                 </a:solidFill>
@@ -3154,7 +3282,7 @@
                 <a:ea typeface="Helvetica Neue"/>
                 <a:cs typeface="Helvetica Neue"/>
               </a:rPr>
-              <a:t>2</a:t>
+              <a:t>Pagination</a:t>
             </a:r>
           </a:p>
         </p:txBody>
@@ -3164,54 +3292,54 @@
           <p:cNvPr id="6" name="">
             <a:extLst xmlns:a="http://schemas.openxmlformats.org/drawingml/2006/main">
               <a:ext uri="{FF2B5EF4-FFF2-40B4-BE49-F238E27FC236}">
-                <a16:creationId xmlns:a16="http://schemas.microsoft.com/office/drawing/2014/main" id="{01FE8BCA-F2CC-4A9F-8485-B37E7DE16853}"/>
-              </a:ext>
-            </a:extLst>
-          </p:cNvPr>
-          <p:cNvSpPr>
-            <a:spLocks xmlns:a="http://schemas.openxmlformats.org/drawingml/2006/main" noGrp="1"/>
-          </p:cNvSpPr>
-          <p:nvPr/>
-        </p:nvSpPr>
-        <p:spPr>
-          <a:xfrm xmlns:a="http://schemas.openxmlformats.org/drawingml/2006/main">
-            <a:off x="1619250" y="3038475"/>
-            <a:ext cx="9715500" cy="723900"/>
-          </a:xfrm>
-          <a:prstGeom xmlns:a="http://schemas.openxmlformats.org/drawingml/2006/main" prst="rect">
-            <a:avLst/>
-          </a:prstGeom>
-          <a:noFill xmlns:a="http://schemas.openxmlformats.org/drawingml/2006/main"/>
-          <a:ln xmlns:a="http://schemas.openxmlformats.org/drawingml/2006/main" w="0">
-            <a:noFill/>
-          </a:ln>
-        </p:spPr>
-        <p:txBody>
-          <a:bodyPr xmlns:a="http://schemas.openxmlformats.org/drawingml/2006/main">
-            <a:noAutofit/>
-          </a:bodyPr>
-          <a:lstStyle xmlns:a="http://schemas.openxmlformats.org/drawingml/2006/main"/>
-          <a:p xmlns:a="http://schemas.openxmlformats.org/drawingml/2006/main">
-            <a:pPr>
-              <a:defRPr sz="2400" b="0">
-                <a:solidFill>
-                  <a:srgbClr val="172F3F"/>
-                </a:solidFill>
-                <a:latin typeface="Helvetica Neue"/>
-                <a:ea typeface="Helvetica Neue"/>
-                <a:cs typeface="Helvetica Neue"/>
-              </a:defRPr>
-            </a:pPr>
-            <a:r>
-              <a:rPr sz="2400" b="0">
-                <a:solidFill>
-                  <a:srgbClr val="172F3F"/>
-                </a:solidFill>
-                <a:latin typeface="Helvetica Neue"/>
-                <a:ea typeface="Helvetica Neue"/>
-                <a:cs typeface="Helvetica Neue"/>
-              </a:rPr>
-              <a:t>Review and release coherent input, query and lifecycle types.</a:t>
+                <a16:creationId xmlns:a16="http://schemas.microsoft.com/office/drawing/2014/main" id="{797A4DEA-D327-4C69-8E41-0E9354445D92}"/>
+              </a:ext>
+            </a:extLst>
+          </p:cNvPr>
+          <p:cNvSpPr>
+            <a:spLocks xmlns:a="http://schemas.openxmlformats.org/drawingml/2006/main" noGrp="1"/>
+          </p:cNvSpPr>
+          <p:nvPr/>
+        </p:nvSpPr>
+        <p:spPr>
+          <a:xfrm xmlns:a="http://schemas.openxmlformats.org/drawingml/2006/main">
+            <a:off x="4000500" y="2990850"/>
+            <a:ext cx="7381875" cy="723900"/>
+          </a:xfrm>
+          <a:prstGeom xmlns:a="http://schemas.openxmlformats.org/drawingml/2006/main" prst="rect">
+            <a:avLst/>
+          </a:prstGeom>
+          <a:noFill xmlns:a="http://schemas.openxmlformats.org/drawingml/2006/main"/>
+          <a:ln xmlns:a="http://schemas.openxmlformats.org/drawingml/2006/main" w="0">
+            <a:noFill/>
+          </a:ln>
+        </p:spPr>
+        <p:txBody>
+          <a:bodyPr xmlns:a="http://schemas.openxmlformats.org/drawingml/2006/main">
+            <a:noAutofit/>
+          </a:bodyPr>
+          <a:lstStyle xmlns:a="http://schemas.openxmlformats.org/drawingml/2006/main"/>
+          <a:p xmlns:a="http://schemas.openxmlformats.org/drawingml/2006/main">
+            <a:pPr>
+              <a:defRPr sz="2175" b="0">
+                <a:solidFill>
+                  <a:srgbClr val="172F3F"/>
+                </a:solidFill>
+                <a:latin typeface="Helvetica Neue"/>
+                <a:ea typeface="Helvetica Neue"/>
+                <a:cs typeface="Helvetica Neue"/>
+              </a:defRPr>
+            </a:pPr>
+            <a:r>
+              <a:rPr sz="2175" b="0">
+                <a:solidFill>
+                  <a:srgbClr val="172F3F"/>
+                </a:solidFill>
+                <a:latin typeface="Helvetica Neue"/>
+                <a:ea typeface="Helvetica Neue"/>
+                <a:cs typeface="Helvetica Neue"/>
+              </a:rPr>
+              <a:t>Supported commands with predictable defaults</a:t>
             </a:r>
           </a:p>
         </p:txBody>
@@ -3221,36 +3349,36 @@
           <p:cNvPr id="7" name="">
             <a:extLst xmlns:a="http://schemas.openxmlformats.org/drawingml/2006/main">
               <a:ext uri="{FF2B5EF4-FFF2-40B4-BE49-F238E27FC236}">
-                <a16:creationId xmlns:a16="http://schemas.microsoft.com/office/drawing/2014/main" id="{32CE7D57-1E5E-42F3-A482-2D1D2F1B5EE1}"/>
-              </a:ext>
-            </a:extLst>
-          </p:cNvPr>
-          <p:cNvSpPr>
-            <a:spLocks xmlns:a="http://schemas.openxmlformats.org/drawingml/2006/main" noGrp="1"/>
-          </p:cNvSpPr>
-          <p:nvPr/>
-        </p:nvSpPr>
-        <p:spPr>
-          <a:xfrm xmlns:a="http://schemas.openxmlformats.org/drawingml/2006/main">
-            <a:off x="685800" y="3933825"/>
-            <a:ext cx="762000" cy="571500"/>
-          </a:xfrm>
-          <a:prstGeom xmlns:a="http://schemas.openxmlformats.org/drawingml/2006/main" prst="rect">
-            <a:avLst/>
-          </a:prstGeom>
-          <a:noFill xmlns:a="http://schemas.openxmlformats.org/drawingml/2006/main"/>
-          <a:ln xmlns:a="http://schemas.openxmlformats.org/drawingml/2006/main" w="0">
-            <a:noFill/>
-          </a:ln>
-        </p:spPr>
-        <p:txBody>
-          <a:bodyPr xmlns:a="http://schemas.openxmlformats.org/drawingml/2006/main">
-            <a:noAutofit/>
-          </a:bodyPr>
-          <a:lstStyle xmlns:a="http://schemas.openxmlformats.org/drawingml/2006/main"/>
-          <a:p xmlns:a="http://schemas.openxmlformats.org/drawingml/2006/main">
-            <a:pPr>
-              <a:defRPr sz="3000" b="1">
+                <a16:creationId xmlns:a16="http://schemas.microsoft.com/office/drawing/2014/main" id="{BB67102A-74A4-47DC-AB2A-2EBA1C78C68B}"/>
+              </a:ext>
+            </a:extLst>
+          </p:cNvPr>
+          <p:cNvSpPr>
+            <a:spLocks xmlns:a="http://schemas.openxmlformats.org/drawingml/2006/main" noGrp="1"/>
+          </p:cNvSpPr>
+          <p:nvPr/>
+        </p:nvSpPr>
+        <p:spPr>
+          <a:xfrm xmlns:a="http://schemas.openxmlformats.org/drawingml/2006/main">
+            <a:off x="685800" y="3886200"/>
+            <a:ext cx="3143250" cy="590550"/>
+          </a:xfrm>
+          <a:prstGeom xmlns:a="http://schemas.openxmlformats.org/drawingml/2006/main" prst="rect">
+            <a:avLst/>
+          </a:prstGeom>
+          <a:noFill xmlns:a="http://schemas.openxmlformats.org/drawingml/2006/main"/>
+          <a:ln xmlns:a="http://schemas.openxmlformats.org/drawingml/2006/main" w="0">
+            <a:noFill/>
+          </a:ln>
+        </p:spPr>
+        <p:txBody>
+          <a:bodyPr xmlns:a="http://schemas.openxmlformats.org/drawingml/2006/main">
+            <a:noAutofit/>
+          </a:bodyPr>
+          <a:lstStyle xmlns:a="http://schemas.openxmlformats.org/drawingml/2006/main"/>
+          <a:p xmlns:a="http://schemas.openxmlformats.org/drawingml/2006/main">
+            <a:pPr>
+              <a:defRPr sz="2325" b="1">
                 <a:solidFill>
                   <a:srgbClr val="1D7479"/>
                 </a:solidFill>
@@ -3260,7 +3388,7 @@
               </a:defRPr>
             </a:pPr>
             <a:r>
-              <a:rPr sz="3000" b="1">
+              <a:rPr sz="2325" b="1">
                 <a:solidFill>
                   <a:srgbClr val="1D7479"/>
                 </a:solidFill>
@@ -3268,7 +3396,7 @@
                 <a:ea typeface="Helvetica Neue"/>
                 <a:cs typeface="Helvetica Neue"/>
               </a:rPr>
-              <a:t>3</a:t>
+              <a:t>Recovery</a:t>
             </a:r>
           </a:p>
         </p:txBody>
@@ -3278,54 +3406,54 @@
           <p:cNvPr id="8" name="">
             <a:extLst xmlns:a="http://schemas.openxmlformats.org/drawingml/2006/main">
               <a:ext uri="{FF2B5EF4-FFF2-40B4-BE49-F238E27FC236}">
-                <a16:creationId xmlns:a16="http://schemas.microsoft.com/office/drawing/2014/main" id="{22C97FC2-583C-4586-A7A8-EC0F16402513}"/>
-              </a:ext>
-            </a:extLst>
-          </p:cNvPr>
-          <p:cNvSpPr>
-            <a:spLocks xmlns:a="http://schemas.openxmlformats.org/drawingml/2006/main" noGrp="1"/>
-          </p:cNvSpPr>
-          <p:nvPr/>
-        </p:nvSpPr>
-        <p:spPr>
-          <a:xfrm xmlns:a="http://schemas.openxmlformats.org/drawingml/2006/main">
-            <a:off x="1619250" y="3933825"/>
-            <a:ext cx="9715500" cy="723900"/>
-          </a:xfrm>
-          <a:prstGeom xmlns:a="http://schemas.openxmlformats.org/drawingml/2006/main" prst="rect">
-            <a:avLst/>
-          </a:prstGeom>
-          <a:noFill xmlns:a="http://schemas.openxmlformats.org/drawingml/2006/main"/>
-          <a:ln xmlns:a="http://schemas.openxmlformats.org/drawingml/2006/main" w="0">
-            <a:noFill/>
-          </a:ln>
-        </p:spPr>
-        <p:txBody>
-          <a:bodyPr xmlns:a="http://schemas.openxmlformats.org/drawingml/2006/main">
-            <a:noAutofit/>
-          </a:bodyPr>
-          <a:lstStyle xmlns:a="http://schemas.openxmlformats.org/drawingml/2006/main"/>
-          <a:p xmlns:a="http://schemas.openxmlformats.org/drawingml/2006/main">
-            <a:pPr>
-              <a:defRPr sz="2400" b="0">
-                <a:solidFill>
-                  <a:srgbClr val="172F3F"/>
-                </a:solidFill>
-                <a:latin typeface="Helvetica Neue"/>
-                <a:ea typeface="Helvetica Neue"/>
-                <a:cs typeface="Helvetica Neue"/>
-              </a:defRPr>
-            </a:pPr>
-            <a:r>
-              <a:rPr sz="2400" b="0">
-                <a:solidFill>
-                  <a:srgbClr val="172F3F"/>
-                </a:solidFill>
-                <a:latin typeface="Helvetica Neue"/>
-                <a:ea typeface="Helvetica Neue"/>
-                <a:cs typeface="Helvetica Neue"/>
-              </a:rPr>
-              <a:t>Maintain executable examples and matching tutorials.</a:t>
+                <a16:creationId xmlns:a16="http://schemas.microsoft.com/office/drawing/2014/main" id="{14CB3AB0-DC7E-486A-AF0D-569A4CF2A1A0}"/>
+              </a:ext>
+            </a:extLst>
+          </p:cNvPr>
+          <p:cNvSpPr>
+            <a:spLocks xmlns:a="http://schemas.openxmlformats.org/drawingml/2006/main" noGrp="1"/>
+          </p:cNvSpPr>
+          <p:nvPr/>
+        </p:nvSpPr>
+        <p:spPr>
+          <a:xfrm xmlns:a="http://schemas.openxmlformats.org/drawingml/2006/main">
+            <a:off x="4000500" y="3886200"/>
+            <a:ext cx="7381875" cy="723900"/>
+          </a:xfrm>
+          <a:prstGeom xmlns:a="http://schemas.openxmlformats.org/drawingml/2006/main" prst="rect">
+            <a:avLst/>
+          </a:prstGeom>
+          <a:noFill xmlns:a="http://schemas.openxmlformats.org/drawingml/2006/main"/>
+          <a:ln xmlns:a="http://schemas.openxmlformats.org/drawingml/2006/main" w="0">
+            <a:noFill/>
+          </a:ln>
+        </p:spPr>
+        <p:txBody>
+          <a:bodyPr xmlns:a="http://schemas.openxmlformats.org/drawingml/2006/main">
+            <a:noAutofit/>
+          </a:bodyPr>
+          <a:lstStyle xmlns:a="http://schemas.openxmlformats.org/drawingml/2006/main"/>
+          <a:p xmlns:a="http://schemas.openxmlformats.org/drawingml/2006/main">
+            <a:pPr>
+              <a:defRPr sz="2175" b="0">
+                <a:solidFill>
+                  <a:srgbClr val="172F3F"/>
+                </a:solidFill>
+                <a:latin typeface="Helvetica Neue"/>
+                <a:ea typeface="Helvetica Neue"/>
+                <a:cs typeface="Helvetica Neue"/>
+              </a:defRPr>
+            </a:pPr>
+            <a:r>
+              <a:rPr sz="2175" b="0">
+                <a:solidFill>
+                  <a:srgbClr val="172F3F"/>
+                </a:solidFill>
+                <a:latin typeface="Helvetica Neue"/>
+                <a:ea typeface="Helvetica Neue"/>
+                <a:cs typeface="Helvetica Neue"/>
+              </a:rPr>
+              <a:t>Checked error fields and validated decoding paths</a:t>
             </a:r>
           </a:p>
         </p:txBody>
@@ -3335,36 +3463,36 @@
           <p:cNvPr id="9" name="">
             <a:extLst xmlns:a="http://schemas.openxmlformats.org/drawingml/2006/main">
               <a:ext uri="{FF2B5EF4-FFF2-40B4-BE49-F238E27FC236}">
-                <a16:creationId xmlns:a16="http://schemas.microsoft.com/office/drawing/2014/main" id="{36C1B411-DA4F-44CA-9B90-6BD1436D4969}"/>
-              </a:ext>
-            </a:extLst>
-          </p:cNvPr>
-          <p:cNvSpPr>
-            <a:spLocks xmlns:a="http://schemas.openxmlformats.org/drawingml/2006/main" noGrp="1"/>
-          </p:cNvSpPr>
-          <p:nvPr/>
-        </p:nvSpPr>
-        <p:spPr>
-          <a:xfrm xmlns:a="http://schemas.openxmlformats.org/drawingml/2006/main">
-            <a:off x="685800" y="4829175"/>
-            <a:ext cx="762000" cy="571500"/>
-          </a:xfrm>
-          <a:prstGeom xmlns:a="http://schemas.openxmlformats.org/drawingml/2006/main" prst="rect">
-            <a:avLst/>
-          </a:prstGeom>
-          <a:noFill xmlns:a="http://schemas.openxmlformats.org/drawingml/2006/main"/>
-          <a:ln xmlns:a="http://schemas.openxmlformats.org/drawingml/2006/main" w="0">
-            <a:noFill/>
-          </a:ln>
-        </p:spPr>
-        <p:txBody>
-          <a:bodyPr xmlns:a="http://schemas.openxmlformats.org/drawingml/2006/main">
-            <a:noAutofit/>
-          </a:bodyPr>
-          <a:lstStyle xmlns:a="http://schemas.openxmlformats.org/drawingml/2006/main"/>
-          <a:p xmlns:a="http://schemas.openxmlformats.org/drawingml/2006/main">
-            <a:pPr>
-              <a:defRPr sz="3000" b="1">
+                <a16:creationId xmlns:a16="http://schemas.microsoft.com/office/drawing/2014/main" id="{D811C4DE-E61A-4236-BB23-90D735029CA7}"/>
+              </a:ext>
+            </a:extLst>
+          </p:cNvPr>
+          <p:cNvSpPr>
+            <a:spLocks xmlns:a="http://schemas.openxmlformats.org/drawingml/2006/main" noGrp="1"/>
+          </p:cNvSpPr>
+          <p:nvPr/>
+        </p:nvSpPr>
+        <p:spPr>
+          <a:xfrm xmlns:a="http://schemas.openxmlformats.org/drawingml/2006/main">
+            <a:off x="685800" y="4781550"/>
+            <a:ext cx="3143250" cy="590550"/>
+          </a:xfrm>
+          <a:prstGeom xmlns:a="http://schemas.openxmlformats.org/drawingml/2006/main" prst="rect">
+            <a:avLst/>
+          </a:prstGeom>
+          <a:noFill xmlns:a="http://schemas.openxmlformats.org/drawingml/2006/main"/>
+          <a:ln xmlns:a="http://schemas.openxmlformats.org/drawingml/2006/main" w="0">
+            <a:noFill/>
+          </a:ln>
+        </p:spPr>
+        <p:txBody>
+          <a:bodyPr xmlns:a="http://schemas.openxmlformats.org/drawingml/2006/main">
+            <a:noAutofit/>
+          </a:bodyPr>
+          <a:lstStyle xmlns:a="http://schemas.openxmlformats.org/drawingml/2006/main"/>
+          <a:p xmlns:a="http://schemas.openxmlformats.org/drawingml/2006/main">
+            <a:pPr>
+              <a:defRPr sz="2325" b="1">
                 <a:solidFill>
                   <a:srgbClr val="1D7479"/>
                 </a:solidFill>
@@ -3374,7 +3502,7 @@
               </a:defRPr>
             </a:pPr>
             <a:r>
-              <a:rPr sz="3000" b="1">
+              <a:rPr sz="2325" b="1">
                 <a:solidFill>
                   <a:srgbClr val="1D7479"/>
                 </a:solidFill>
@@ -3382,7 +3510,7 @@
                 <a:ea typeface="Helvetica Neue"/>
                 <a:cs typeface="Helvetica Neue"/>
               </a:rPr>
-              <a:t>4</a:t>
+              <a:t>Value handling</a:t>
             </a:r>
           </a:p>
         </p:txBody>
@@ -3392,54 +3520,111 @@
           <p:cNvPr id="10" name="">
             <a:extLst xmlns:a="http://schemas.openxmlformats.org/drawingml/2006/main">
               <a:ext uri="{FF2B5EF4-FFF2-40B4-BE49-F238E27FC236}">
-                <a16:creationId xmlns:a16="http://schemas.microsoft.com/office/drawing/2014/main" id="{AA723140-7B4B-49DB-9E01-B86F4B9FFCE8}"/>
-              </a:ext>
-            </a:extLst>
-          </p:cNvPr>
-          <p:cNvSpPr>
-            <a:spLocks xmlns:a="http://schemas.openxmlformats.org/drawingml/2006/main" noGrp="1"/>
-          </p:cNvSpPr>
-          <p:nvPr/>
-        </p:nvSpPr>
-        <p:spPr>
-          <a:xfrm xmlns:a="http://schemas.openxmlformats.org/drawingml/2006/main">
-            <a:off x="1619250" y="4829175"/>
-            <a:ext cx="9715500" cy="723900"/>
-          </a:xfrm>
-          <a:prstGeom xmlns:a="http://schemas.openxmlformats.org/drawingml/2006/main" prst="rect">
-            <a:avLst/>
-          </a:prstGeom>
-          <a:noFill xmlns:a="http://schemas.openxmlformats.org/drawingml/2006/main"/>
-          <a:ln xmlns:a="http://schemas.openxmlformats.org/drawingml/2006/main" w="0">
-            <a:noFill/>
-          </a:ln>
-        </p:spPr>
-        <p:txBody>
-          <a:bodyPr xmlns:a="http://schemas.openxmlformats.org/drawingml/2006/main">
-            <a:noAutofit/>
-          </a:bodyPr>
-          <a:lstStyle xmlns:a="http://schemas.openxmlformats.org/drawingml/2006/main"/>
-          <a:p xmlns:a="http://schemas.openxmlformats.org/drawingml/2006/main">
-            <a:pPr>
-              <a:defRPr sz="2400" b="0">
-                <a:solidFill>
-                  <a:srgbClr val="172F3F"/>
-                </a:solidFill>
-                <a:latin typeface="Helvetica Neue"/>
-                <a:ea typeface="Helvetica Neue"/>
-                <a:cs typeface="Helvetica Neue"/>
-              </a:defRPr>
-            </a:pPr>
-            <a:r>
-              <a:rPr sz="2400" b="0">
-                <a:solidFill>
-                  <a:srgbClr val="172F3F"/>
-                </a:solidFill>
-                <a:latin typeface="Helvetica Neue"/>
-                <a:ea typeface="Helvetica Neue"/>
-                <a:cs typeface="Helvetica Neue"/>
-              </a:rPr>
-              <a:t>Check package consumers and teaching journeys on each release.</a:t>
+                <a16:creationId xmlns:a16="http://schemas.microsoft.com/office/drawing/2014/main" id="{26C2A524-9E46-463C-B354-82750FD5DC79}"/>
+              </a:ext>
+            </a:extLst>
+          </p:cNvPr>
+          <p:cNvSpPr>
+            <a:spLocks xmlns:a="http://schemas.openxmlformats.org/drawingml/2006/main" noGrp="1"/>
+          </p:cNvSpPr>
+          <p:nvPr/>
+        </p:nvSpPr>
+        <p:spPr>
+          <a:xfrm xmlns:a="http://schemas.openxmlformats.org/drawingml/2006/main">
+            <a:off x="4000500" y="4781550"/>
+            <a:ext cx="7381875" cy="723900"/>
+          </a:xfrm>
+          <a:prstGeom xmlns:a="http://schemas.openxmlformats.org/drawingml/2006/main" prst="rect">
+            <a:avLst/>
+          </a:prstGeom>
+          <a:noFill xmlns:a="http://schemas.openxmlformats.org/drawingml/2006/main"/>
+          <a:ln xmlns:a="http://schemas.openxmlformats.org/drawingml/2006/main" w="0">
+            <a:noFill/>
+          </a:ln>
+        </p:spPr>
+        <p:txBody>
+          <a:bodyPr xmlns:a="http://schemas.openxmlformats.org/drawingml/2006/main">
+            <a:noAutofit/>
+          </a:bodyPr>
+          <a:lstStyle xmlns:a="http://schemas.openxmlformats.org/drawingml/2006/main"/>
+          <a:p xmlns:a="http://schemas.openxmlformats.org/drawingml/2006/main">
+            <a:pPr>
+              <a:defRPr sz="2175" b="0">
+                <a:solidFill>
+                  <a:srgbClr val="172F3F"/>
+                </a:solidFill>
+                <a:latin typeface="Helvetica Neue"/>
+                <a:ea typeface="Helvetica Neue"/>
+                <a:cs typeface="Helvetica Neue"/>
+              </a:defRPr>
+            </a:pPr>
+            <a:r>
+              <a:rPr sz="2175" b="0">
+                <a:solidFill>
+                  <a:srgbClr val="172F3F"/>
+                </a:solidFill>
+                <a:latin typeface="Helvetica Neue"/>
+                <a:ea typeface="Helvetica Neue"/>
+                <a:cs typeface="Helvetica Neue"/>
+              </a:rPr>
+              <a:t>Exact values and an explicit MPT support contract</a:t>
+            </a:r>
+          </a:p>
+        </p:txBody>
+      </p:sp>
+      <p:sp>
+        <p:nvSpPr>
+          <p:cNvPr id="11" name="">
+            <a:extLst xmlns:a="http://schemas.openxmlformats.org/drawingml/2006/main">
+              <a:ext uri="{FF2B5EF4-FFF2-40B4-BE49-F238E27FC236}">
+                <a16:creationId xmlns:a16="http://schemas.microsoft.com/office/drawing/2014/main" id="{B666BB8B-EB1A-4906-B2A7-7D43DA82F4D4}"/>
+              </a:ext>
+            </a:extLst>
+          </p:cNvPr>
+          <p:cNvSpPr>
+            <a:spLocks xmlns:a="http://schemas.openxmlformats.org/drawingml/2006/main" noGrp="1"/>
+          </p:cNvSpPr>
+          <p:nvPr/>
+        </p:nvSpPr>
+        <p:spPr>
+          <a:xfrm xmlns:a="http://schemas.openxmlformats.org/drawingml/2006/main">
+            <a:off x="685800" y="5810250"/>
+            <a:ext cx="10572750" cy="476250"/>
+          </a:xfrm>
+          <a:prstGeom xmlns:a="http://schemas.openxmlformats.org/drawingml/2006/main" prst="rect">
+            <a:avLst/>
+          </a:prstGeom>
+          <a:noFill xmlns:a="http://schemas.openxmlformats.org/drawingml/2006/main"/>
+          <a:ln xmlns:a="http://schemas.openxmlformats.org/drawingml/2006/main" w="0">
+            <a:noFill/>
+          </a:ln>
+        </p:spPr>
+        <p:txBody>
+          <a:bodyPr xmlns:a="http://schemas.openxmlformats.org/drawingml/2006/main">
+            <a:noAutofit/>
+          </a:bodyPr>
+          <a:lstStyle xmlns:a="http://schemas.openxmlformats.org/drawingml/2006/main"/>
+          <a:p xmlns:a="http://schemas.openxmlformats.org/drawingml/2006/main">
+            <a:pPr>
+              <a:defRPr sz="1800" b="0">
+                <a:solidFill>
+                  <a:srgbClr val="506471"/>
+                </a:solidFill>
+                <a:latin typeface="Helvetica Neue"/>
+                <a:ea typeface="Helvetica Neue"/>
+                <a:cs typeface="Helvetica Neue"/>
+              </a:defRPr>
+            </a:pPr>
+            <a:r>
+              <a:rPr sz="1800" b="0">
+                <a:solidFill>
+                  <a:srgbClr val="506471"/>
+                </a:solidFill>
+                <a:latin typeface="Helvetica Neue"/>
+                <a:ea typeface="Helvetica Neue"/>
+                <a:cs typeface="Helvetica Neue"/>
+              </a:rPr>
+              <a:t>The register distinguishes compiler, source, mock, synthetic and ledger evidence.</a:t>
             </a:r>
           </a:p>
         </p:txBody>
@@ -3447,7 +3632,7 @@
     </p:spTree>
     <p:extLst>
       <p:ext uri="{BB962C8B-B14F-4D97-AF65-F5344CB8AC3E}">
-        <p14:creationId xmlns:p14="http://schemas.microsoft.com/office/powerpoint/2010/main" val="2120012563"/>
+        <p14:creationId xmlns:p14="http://schemas.microsoft.com/office/powerpoint/2010/main" val="879640681"/>
       </p:ext>
     </p:extLst>
   </p:cSld>
@@ -3475,10 +3660,10 @@
       </p:grpSpPr>
       <p:sp>
         <p:nvSpPr>
-          <p:cNvPr id="6" name="">
-            <a:extLst xmlns:a="http://schemas.openxmlformats.org/drawingml/2006/main">
-              <a:ext uri="{FF2B5EF4-FFF2-40B4-BE49-F238E27FC236}">
-                <a16:creationId xmlns:a16="http://schemas.microsoft.com/office/drawing/2014/main" id="{A31D84BE-8BCD-42C0-8882-7E6C89CB5AD3}"/>
+          <p:cNvPr id="11" name="">
+            <a:extLst xmlns:a="http://schemas.openxmlformats.org/drawingml/2006/main">
+              <a:ext uri="{FF2B5EF4-FFF2-40B4-BE49-F238E27FC236}">
+                <a16:creationId xmlns:a16="http://schemas.microsoft.com/office/drawing/2014/main" id="{B99D6F3B-1CA8-496F-AFDE-97EEA97C1444}"/>
               </a:ext>
             </a:extLst>
           </p:cNvPr>
@@ -3525,7 +3710,7 @@
                 <a:ea typeface="Helvetica Neue"/>
                 <a:cs typeface="Helvetica Neue"/>
               </a:rPr>
-              <a:t>A sustained DevX partnership</a:t>
+              <a:t>Make improvement repeatable</a:t>
             </a:r>
           </a:p>
         </p:txBody>
@@ -3535,7 +3720,7 @@
           <p:cNvPr id="2" name="">
             <a:extLst xmlns:a="http://schemas.openxmlformats.org/drawingml/2006/main">
               <a:ext uri="{FF2B5EF4-FFF2-40B4-BE49-F238E27FC236}">
-                <a16:creationId xmlns:a16="http://schemas.microsoft.com/office/drawing/2014/main" id="{3530068A-D368-4750-9EE6-C27215FE8BE8}"/>
+                <a16:creationId xmlns:a16="http://schemas.microsoft.com/office/drawing/2014/main" id="{FAA5B848-03E5-4A2C-B5C8-081EF8D5021B}"/>
               </a:ext>
             </a:extLst>
           </p:cNvPr>
@@ -3592,36 +3777,36 @@
           <p:cNvPr id="3" name="">
             <a:extLst xmlns:a="http://schemas.openxmlformats.org/drawingml/2006/main">
               <a:ext uri="{FF2B5EF4-FFF2-40B4-BE49-F238E27FC236}">
-                <a16:creationId xmlns:a16="http://schemas.microsoft.com/office/drawing/2014/main" id="{C124748E-8E90-46F4-A977-A930310E6536}"/>
-              </a:ext>
-            </a:extLst>
-          </p:cNvPr>
-          <p:cNvSpPr>
-            <a:spLocks xmlns:a="http://schemas.openxmlformats.org/drawingml/2006/main" noGrp="1"/>
-          </p:cNvSpPr>
-          <p:nvPr/>
-        </p:nvSpPr>
-        <p:spPr>
-          <a:xfrm xmlns:a="http://schemas.openxmlformats.org/drawingml/2006/main">
-            <a:off x="685800" y="2228850"/>
-            <a:ext cx="10620375" cy="1143000"/>
-          </a:xfrm>
-          <a:prstGeom xmlns:a="http://schemas.openxmlformats.org/drawingml/2006/main" prst="rect">
-            <a:avLst/>
-          </a:prstGeom>
-          <a:noFill xmlns:a="http://schemas.openxmlformats.org/drawingml/2006/main"/>
-          <a:ln xmlns:a="http://schemas.openxmlformats.org/drawingml/2006/main" w="0">
-            <a:noFill/>
-          </a:ln>
-        </p:spPr>
-        <p:txBody>
-          <a:bodyPr xmlns:a="http://schemas.openxmlformats.org/drawingml/2006/main">
-            <a:noAutofit/>
-          </a:bodyPr>
-          <a:lstStyle xmlns:a="http://schemas.openxmlformats.org/drawingml/2006/main"/>
-          <a:p xmlns:a="http://schemas.openxmlformats.org/drawingml/2006/main">
-            <a:pPr>
-              <a:defRPr sz="2775" b="1">
+                <a16:creationId xmlns:a16="http://schemas.microsoft.com/office/drawing/2014/main" id="{910B5467-EB46-4FD9-A0E3-8D190F0DC7B0}"/>
+              </a:ext>
+            </a:extLst>
+          </p:cNvPr>
+          <p:cNvSpPr>
+            <a:spLocks xmlns:a="http://schemas.openxmlformats.org/drawingml/2006/main" noGrp="1"/>
+          </p:cNvSpPr>
+          <p:nvPr/>
+        </p:nvSpPr>
+        <p:spPr>
+          <a:xfrm xmlns:a="http://schemas.openxmlformats.org/drawingml/2006/main">
+            <a:off x="685800" y="2143125"/>
+            <a:ext cx="762000" cy="571500"/>
+          </a:xfrm>
+          <a:prstGeom xmlns:a="http://schemas.openxmlformats.org/drawingml/2006/main" prst="rect">
+            <a:avLst/>
+          </a:prstGeom>
+          <a:noFill xmlns:a="http://schemas.openxmlformats.org/drawingml/2006/main"/>
+          <a:ln xmlns:a="http://schemas.openxmlformats.org/drawingml/2006/main" w="0">
+            <a:noFill/>
+          </a:ln>
+        </p:spPr>
+        <p:txBody>
+          <a:bodyPr xmlns:a="http://schemas.openxmlformats.org/drawingml/2006/main">
+            <a:noAutofit/>
+          </a:bodyPr>
+          <a:lstStyle xmlns:a="http://schemas.openxmlformats.org/drawingml/2006/main"/>
+          <a:p xmlns:a="http://schemas.openxmlformats.org/drawingml/2006/main">
+            <a:pPr>
+              <a:defRPr sz="3000" b="1">
                 <a:solidFill>
                   <a:srgbClr val="1D7479"/>
                 </a:solidFill>
@@ -3631,7 +3816,7 @@
               </a:defRPr>
             </a:pPr>
             <a:r>
-              <a:rPr sz="2775" b="1">
+              <a:rPr sz="3000" b="1">
                 <a:solidFill>
                   <a:srgbClr val="1D7479"/>
                 </a:solidFill>
@@ -3639,12 +3824,103 @@
                 <a:ea typeface="Helvetica Neue"/>
                 <a:cs typeface="Helvetica Neue"/>
               </a:rPr>
-              <a:t>Begin with an agreed xrpl.js implementation scope</a:t>
-            </a:r>
-          </a:p>
-          <a:p xmlns:a="http://schemas.openxmlformats.org/drawingml/2006/main">
-            <a:pPr>
-              <a:defRPr sz="2775" b="1">
+              <a:t>1</a:t>
+            </a:r>
+          </a:p>
+        </p:txBody>
+      </p:sp>
+      <p:sp>
+        <p:nvSpPr>
+          <p:cNvPr id="4" name="">
+            <a:extLst xmlns:a="http://schemas.openxmlformats.org/drawingml/2006/main">
+              <a:ext uri="{FF2B5EF4-FFF2-40B4-BE49-F238E27FC236}">
+                <a16:creationId xmlns:a16="http://schemas.microsoft.com/office/drawing/2014/main" id="{D126F08D-53B8-49BF-98D0-2A4AA0259D47}"/>
+              </a:ext>
+            </a:extLst>
+          </p:cNvPr>
+          <p:cNvSpPr>
+            <a:spLocks xmlns:a="http://schemas.openxmlformats.org/drawingml/2006/main" noGrp="1"/>
+          </p:cNvSpPr>
+          <p:nvPr/>
+        </p:nvSpPr>
+        <p:spPr>
+          <a:xfrm xmlns:a="http://schemas.openxmlformats.org/drawingml/2006/main">
+            <a:off x="1619250" y="2143125"/>
+            <a:ext cx="9715500" cy="723900"/>
+          </a:xfrm>
+          <a:prstGeom xmlns:a="http://schemas.openxmlformats.org/drawingml/2006/main" prst="rect">
+            <a:avLst/>
+          </a:prstGeom>
+          <a:noFill xmlns:a="http://schemas.openxmlformats.org/drawingml/2006/main"/>
+          <a:ln xmlns:a="http://schemas.openxmlformats.org/drawingml/2006/main" w="0">
+            <a:noFill/>
+          </a:ln>
+        </p:spPr>
+        <p:txBody>
+          <a:bodyPr xmlns:a="http://schemas.openxmlformats.org/drawingml/2006/main">
+            <a:noAutofit/>
+          </a:bodyPr>
+          <a:lstStyle xmlns:a="http://schemas.openxmlformats.org/drawingml/2006/main"/>
+          <a:p xmlns:a="http://schemas.openxmlformats.org/drawingml/2006/main">
+            <a:pPr>
+              <a:defRPr sz="2400" b="0">
+                <a:solidFill>
+                  <a:srgbClr val="172F3F"/>
+                </a:solidFill>
+                <a:latin typeface="Helvetica Neue"/>
+                <a:ea typeface="Helvetica Neue"/>
+                <a:cs typeface="Helvetica Neue"/>
+              </a:defRPr>
+            </a:pPr>
+            <a:r>
+              <a:rPr sz="2400" b="0">
+                <a:solidFill>
+                  <a:srgbClr val="172F3F"/>
+                </a:solidFill>
+                <a:latin typeface="Helvetica Neue"/>
+                <a:ea typeface="Helvetica Neue"/>
+                <a:cs typeface="Helvetica Neue"/>
+              </a:rPr>
+              <a:t>Restore accurate guidance in the published declarations.</a:t>
+            </a:r>
+          </a:p>
+        </p:txBody>
+      </p:sp>
+      <p:sp>
+        <p:nvSpPr>
+          <p:cNvPr id="5" name="">
+            <a:extLst xmlns:a="http://schemas.openxmlformats.org/drawingml/2006/main">
+              <a:ext uri="{FF2B5EF4-FFF2-40B4-BE49-F238E27FC236}">
+                <a16:creationId xmlns:a16="http://schemas.microsoft.com/office/drawing/2014/main" id="{F922043D-1C2E-4F6D-8FDB-AB7E04AB4D95}"/>
+              </a:ext>
+            </a:extLst>
+          </p:cNvPr>
+          <p:cNvSpPr>
+            <a:spLocks xmlns:a="http://schemas.openxmlformats.org/drawingml/2006/main" noGrp="1"/>
+          </p:cNvSpPr>
+          <p:nvPr/>
+        </p:nvSpPr>
+        <p:spPr>
+          <a:xfrm xmlns:a="http://schemas.openxmlformats.org/drawingml/2006/main">
+            <a:off x="685800" y="3038475"/>
+            <a:ext cx="762000" cy="571500"/>
+          </a:xfrm>
+          <a:prstGeom xmlns:a="http://schemas.openxmlformats.org/drawingml/2006/main" prst="rect">
+            <a:avLst/>
+          </a:prstGeom>
+          <a:noFill xmlns:a="http://schemas.openxmlformats.org/drawingml/2006/main"/>
+          <a:ln xmlns:a="http://schemas.openxmlformats.org/drawingml/2006/main" w="0">
+            <a:noFill/>
+          </a:ln>
+        </p:spPr>
+        <p:txBody>
+          <a:bodyPr xmlns:a="http://schemas.openxmlformats.org/drawingml/2006/main">
+            <a:noAutofit/>
+          </a:bodyPr>
+          <a:lstStyle xmlns:a="http://schemas.openxmlformats.org/drawingml/2006/main"/>
+          <a:p xmlns:a="http://schemas.openxmlformats.org/drawingml/2006/main">
+            <a:pPr>
+              <a:defRPr sz="3000" b="1">
                 <a:solidFill>
                   <a:srgbClr val="1D7479"/>
                 </a:solidFill>
@@ -3654,7 +3930,7 @@
               </a:defRPr>
             </a:pPr>
             <a:r>
-              <a:rPr sz="2775" b="1">
+              <a:rPr sz="3000" b="1">
                 <a:solidFill>
                   <a:srgbClr val="1D7479"/>
                 </a:solidFill>
@@ -3662,167 +3938,292 @@
                 <a:ea typeface="Helvetica Neue"/>
                 <a:cs typeface="Helvetica Neue"/>
               </a:rPr>
-              <a:t>and clear release acceptance checks.</a:t>
-            </a:r>
-          </a:p>
-        </p:txBody>
-      </p:sp>
-      <p:sp>
-        <p:nvSpPr>
-          <p:cNvPr id="4" name="">
-            <a:extLst xmlns:a="http://schemas.openxmlformats.org/drawingml/2006/main">
-              <a:ext uri="{FF2B5EF4-FFF2-40B4-BE49-F238E27FC236}">
-                <a16:creationId xmlns:a16="http://schemas.microsoft.com/office/drawing/2014/main" id="{95ACB529-0B7D-4F50-96F3-E0D0B82C7EEA}"/>
-              </a:ext>
-            </a:extLst>
-          </p:cNvPr>
-          <p:cNvSpPr>
-            <a:spLocks xmlns:a="http://schemas.openxmlformats.org/drawingml/2006/main" noGrp="1"/>
-          </p:cNvSpPr>
-          <p:nvPr/>
-        </p:nvSpPr>
-        <p:spPr>
-          <a:xfrm xmlns:a="http://schemas.openxmlformats.org/drawingml/2006/main">
-            <a:off x="685800" y="3886200"/>
-            <a:ext cx="10668000" cy="1047750"/>
-          </a:xfrm>
-          <a:prstGeom xmlns:a="http://schemas.openxmlformats.org/drawingml/2006/main" prst="rect">
-            <a:avLst/>
-          </a:prstGeom>
-          <a:noFill xmlns:a="http://schemas.openxmlformats.org/drawingml/2006/main"/>
-          <a:ln xmlns:a="http://schemas.openxmlformats.org/drawingml/2006/main" w="0">
-            <a:noFill/>
-          </a:ln>
-        </p:spPr>
-        <p:txBody>
-          <a:bodyPr xmlns:a="http://schemas.openxmlformats.org/drawingml/2006/main">
-            <a:noAutofit/>
-          </a:bodyPr>
-          <a:lstStyle xmlns:a="http://schemas.openxmlformats.org/drawingml/2006/main"/>
-          <a:p xmlns:a="http://schemas.openxmlformats.org/drawingml/2006/main">
-            <a:pPr>
-              <a:defRPr sz="2325" b="0">
-                <a:solidFill>
-                  <a:srgbClr val="172F3F"/>
-                </a:solidFill>
-                <a:latin typeface="Helvetica Neue"/>
-                <a:ea typeface="Helvetica Neue"/>
-                <a:cs typeface="Helvetica Neue"/>
-              </a:defRPr>
-            </a:pPr>
-            <a:r>
-              <a:rPr sz="2325" b="0">
-                <a:solidFill>
-                  <a:srgbClr val="172F3F"/>
-                </a:solidFill>
-                <a:latin typeface="Helvetica Neue"/>
-                <a:ea typeface="Helvetica Neue"/>
-                <a:cs typeface="Helvetica Neue"/>
-              </a:rPr>
-              <a:t>Ongoing work</a:t>
-            </a:r>
-          </a:p>
-          <a:p xmlns:a="http://schemas.openxmlformats.org/drawingml/2006/main">
-            <a:pPr>
-              <a:defRPr sz="2325" b="0">
-                <a:solidFill>
-                  <a:srgbClr val="172F3F"/>
-                </a:solidFill>
-                <a:latin typeface="Helvetica Neue"/>
-                <a:ea typeface="Helvetica Neue"/>
-                <a:cs typeface="Helvetica Neue"/>
-              </a:defRPr>
-            </a:pPr>
-            <a:r>
-              <a:rPr sz="2325" b="0">
-                <a:solidFill>
-                  <a:srgbClr val="172F3F"/>
-                </a:solidFill>
-                <a:latin typeface="Helvetica Neue"/>
-                <a:ea typeface="Helvetica Neue"/>
-                <a:cs typeface="Helvetica Neue"/>
-              </a:rPr>
-              <a:t>SDK ergonomics, examples, documentation and regression prevention</a:t>
-            </a:r>
-          </a:p>
-        </p:txBody>
-      </p:sp>
-      <p:sp>
-        <p:nvSpPr>
-          <p:cNvPr id="5" name="">
-            <a:extLst xmlns:a="http://schemas.openxmlformats.org/drawingml/2006/main">
-              <a:ext uri="{FF2B5EF4-FFF2-40B4-BE49-F238E27FC236}">
-                <a16:creationId xmlns:a16="http://schemas.microsoft.com/office/drawing/2014/main" id="{449D94FE-7AC4-43F8-B8B0-90B3E5865D36}"/>
-              </a:ext>
-            </a:extLst>
-          </p:cNvPr>
-          <p:cNvSpPr>
-            <a:spLocks xmlns:a="http://schemas.openxmlformats.org/drawingml/2006/main" noGrp="1"/>
-          </p:cNvSpPr>
-          <p:nvPr/>
-        </p:nvSpPr>
-        <p:spPr>
-          <a:xfrm xmlns:a="http://schemas.openxmlformats.org/drawingml/2006/main">
-            <a:off x="685800" y="5286375"/>
-            <a:ext cx="10668000" cy="742950"/>
-          </a:xfrm>
-          <a:prstGeom xmlns:a="http://schemas.openxmlformats.org/drawingml/2006/main" prst="rect">
-            <a:avLst/>
-          </a:prstGeom>
-          <a:noFill xmlns:a="http://schemas.openxmlformats.org/drawingml/2006/main"/>
-          <a:ln xmlns:a="http://schemas.openxmlformats.org/drawingml/2006/main" w="0">
-            <a:noFill/>
-          </a:ln>
-        </p:spPr>
-        <p:txBody>
-          <a:bodyPr xmlns:a="http://schemas.openxmlformats.org/drawingml/2006/main">
-            <a:noAutofit/>
-          </a:bodyPr>
-          <a:lstStyle xmlns:a="http://schemas.openxmlformats.org/drawingml/2006/main"/>
-          <a:p xmlns:a="http://schemas.openxmlformats.org/drawingml/2006/main">
-            <a:pPr>
-              <a:defRPr sz="2175" b="0">
-                <a:solidFill>
-                  <a:srgbClr val="506471"/>
-                </a:solidFill>
-                <a:latin typeface="Helvetica Neue"/>
-                <a:ea typeface="Helvetica Neue"/>
-                <a:cs typeface="Helvetica Neue"/>
-              </a:defRPr>
-            </a:pPr>
-            <a:r>
-              <a:rPr sz="2175" b="0">
-                <a:solidFill>
-                  <a:srgbClr val="506471"/>
-                </a:solidFill>
-                <a:latin typeface="Helvetica Neue"/>
-                <a:ea typeface="Helvetica Neue"/>
-                <a:cs typeface="Helvetica Neue"/>
-              </a:rPr>
-              <a:t>Next audit</a:t>
-            </a:r>
-          </a:p>
-          <a:p xmlns:a="http://schemas.openxmlformats.org/drawingml/2006/main">
-            <a:pPr>
-              <a:defRPr sz="2175" b="0">
-                <a:solidFill>
-                  <a:srgbClr val="506471"/>
-                </a:solidFill>
-                <a:latin typeface="Helvetica Neue"/>
-                <a:ea typeface="Helvetica Neue"/>
-                <a:cs typeface="Helvetica Neue"/>
-              </a:defRPr>
-            </a:pPr>
-            <a:r>
-              <a:rPr sz="2175" b="0">
-                <a:solidFill>
-                  <a:srgbClr val="506471"/>
-                </a:solidFill>
-                <a:latin typeface="Helvetica Neue"/>
-                <a:ea typeface="Helvetica Neue"/>
-                <a:cs typeface="Helvetica Neue"/>
-              </a:rPr>
-              <a:t>Rust crate API and CLI developer experience</a:t>
+              <a:t>2</a:t>
+            </a:r>
+          </a:p>
+        </p:txBody>
+      </p:sp>
+      <p:sp>
+        <p:nvSpPr>
+          <p:cNvPr id="6" name="">
+            <a:extLst xmlns:a="http://schemas.openxmlformats.org/drawingml/2006/main">
+              <a:ext uri="{FF2B5EF4-FFF2-40B4-BE49-F238E27FC236}">
+                <a16:creationId xmlns:a16="http://schemas.microsoft.com/office/drawing/2014/main" id="{D4B1C7F5-49D0-40EF-8106-F33B2341152A}"/>
+              </a:ext>
+            </a:extLst>
+          </p:cNvPr>
+          <p:cNvSpPr>
+            <a:spLocks xmlns:a="http://schemas.openxmlformats.org/drawingml/2006/main" noGrp="1"/>
+          </p:cNvSpPr>
+          <p:nvPr/>
+        </p:nvSpPr>
+        <p:spPr>
+          <a:xfrm xmlns:a="http://schemas.openxmlformats.org/drawingml/2006/main">
+            <a:off x="1619250" y="3038475"/>
+            <a:ext cx="9715500" cy="723900"/>
+          </a:xfrm>
+          <a:prstGeom xmlns:a="http://schemas.openxmlformats.org/drawingml/2006/main" prst="rect">
+            <a:avLst/>
+          </a:prstGeom>
+          <a:noFill xmlns:a="http://schemas.openxmlformats.org/drawingml/2006/main"/>
+          <a:ln xmlns:a="http://schemas.openxmlformats.org/drawingml/2006/main" w="0">
+            <a:noFill/>
+          </a:ln>
+        </p:spPr>
+        <p:txBody>
+          <a:bodyPr xmlns:a="http://schemas.openxmlformats.org/drawingml/2006/main">
+            <a:noAutofit/>
+          </a:bodyPr>
+          <a:lstStyle xmlns:a="http://schemas.openxmlformats.org/drawingml/2006/main"/>
+          <a:p xmlns:a="http://schemas.openxmlformats.org/drawingml/2006/main">
+            <a:pPr>
+              <a:defRPr sz="2400" b="0">
+                <a:solidFill>
+                  <a:srgbClr val="172F3F"/>
+                </a:solidFill>
+                <a:latin typeface="Helvetica Neue"/>
+                <a:ea typeface="Helvetica Neue"/>
+                <a:cs typeface="Helvetica Neue"/>
+              </a:defRPr>
+            </a:pPr>
+            <a:r>
+              <a:rPr sz="2400" b="0">
+                <a:solidFill>
+                  <a:srgbClr val="172F3F"/>
+                </a:solidFill>
+                <a:latin typeface="Helvetica Neue"/>
+                <a:ea typeface="Helvetica Neue"/>
+                <a:cs typeface="Helvetica Neue"/>
+              </a:rPr>
+              <a:t>Review and release coherent input, query and lifecycle types.</a:t>
+            </a:r>
+          </a:p>
+        </p:txBody>
+      </p:sp>
+      <p:sp>
+        <p:nvSpPr>
+          <p:cNvPr id="7" name="">
+            <a:extLst xmlns:a="http://schemas.openxmlformats.org/drawingml/2006/main">
+              <a:ext uri="{FF2B5EF4-FFF2-40B4-BE49-F238E27FC236}">
+                <a16:creationId xmlns:a16="http://schemas.microsoft.com/office/drawing/2014/main" id="{F2333B2B-9AAB-4F05-BD4C-90B6F267673C}"/>
+              </a:ext>
+            </a:extLst>
+          </p:cNvPr>
+          <p:cNvSpPr>
+            <a:spLocks xmlns:a="http://schemas.openxmlformats.org/drawingml/2006/main" noGrp="1"/>
+          </p:cNvSpPr>
+          <p:nvPr/>
+        </p:nvSpPr>
+        <p:spPr>
+          <a:xfrm xmlns:a="http://schemas.openxmlformats.org/drawingml/2006/main">
+            <a:off x="685800" y="3933825"/>
+            <a:ext cx="762000" cy="571500"/>
+          </a:xfrm>
+          <a:prstGeom xmlns:a="http://schemas.openxmlformats.org/drawingml/2006/main" prst="rect">
+            <a:avLst/>
+          </a:prstGeom>
+          <a:noFill xmlns:a="http://schemas.openxmlformats.org/drawingml/2006/main"/>
+          <a:ln xmlns:a="http://schemas.openxmlformats.org/drawingml/2006/main" w="0">
+            <a:noFill/>
+          </a:ln>
+        </p:spPr>
+        <p:txBody>
+          <a:bodyPr xmlns:a="http://schemas.openxmlformats.org/drawingml/2006/main">
+            <a:noAutofit/>
+          </a:bodyPr>
+          <a:lstStyle xmlns:a="http://schemas.openxmlformats.org/drawingml/2006/main"/>
+          <a:p xmlns:a="http://schemas.openxmlformats.org/drawingml/2006/main">
+            <a:pPr>
+              <a:defRPr sz="3000" b="1">
+                <a:solidFill>
+                  <a:srgbClr val="1D7479"/>
+                </a:solidFill>
+                <a:latin typeface="Helvetica Neue"/>
+                <a:ea typeface="Helvetica Neue"/>
+                <a:cs typeface="Helvetica Neue"/>
+              </a:defRPr>
+            </a:pPr>
+            <a:r>
+              <a:rPr sz="3000" b="1">
+                <a:solidFill>
+                  <a:srgbClr val="1D7479"/>
+                </a:solidFill>
+                <a:latin typeface="Helvetica Neue"/>
+                <a:ea typeface="Helvetica Neue"/>
+                <a:cs typeface="Helvetica Neue"/>
+              </a:rPr>
+              <a:t>3</a:t>
+            </a:r>
+          </a:p>
+        </p:txBody>
+      </p:sp>
+      <p:sp>
+        <p:nvSpPr>
+          <p:cNvPr id="8" name="">
+            <a:extLst xmlns:a="http://schemas.openxmlformats.org/drawingml/2006/main">
+              <a:ext uri="{FF2B5EF4-FFF2-40B4-BE49-F238E27FC236}">
+                <a16:creationId xmlns:a16="http://schemas.microsoft.com/office/drawing/2014/main" id="{D62AA2B3-8844-476C-8820-309763C1325B}"/>
+              </a:ext>
+            </a:extLst>
+          </p:cNvPr>
+          <p:cNvSpPr>
+            <a:spLocks xmlns:a="http://schemas.openxmlformats.org/drawingml/2006/main" noGrp="1"/>
+          </p:cNvSpPr>
+          <p:nvPr/>
+        </p:nvSpPr>
+        <p:spPr>
+          <a:xfrm xmlns:a="http://schemas.openxmlformats.org/drawingml/2006/main">
+            <a:off x="1619250" y="3933825"/>
+            <a:ext cx="9715500" cy="723900"/>
+          </a:xfrm>
+          <a:prstGeom xmlns:a="http://schemas.openxmlformats.org/drawingml/2006/main" prst="rect">
+            <a:avLst/>
+          </a:prstGeom>
+          <a:noFill xmlns:a="http://schemas.openxmlformats.org/drawingml/2006/main"/>
+          <a:ln xmlns:a="http://schemas.openxmlformats.org/drawingml/2006/main" w="0">
+            <a:noFill/>
+          </a:ln>
+        </p:spPr>
+        <p:txBody>
+          <a:bodyPr xmlns:a="http://schemas.openxmlformats.org/drawingml/2006/main">
+            <a:noAutofit/>
+          </a:bodyPr>
+          <a:lstStyle xmlns:a="http://schemas.openxmlformats.org/drawingml/2006/main"/>
+          <a:p xmlns:a="http://schemas.openxmlformats.org/drawingml/2006/main">
+            <a:pPr>
+              <a:defRPr sz="2400" b="0">
+                <a:solidFill>
+                  <a:srgbClr val="172F3F"/>
+                </a:solidFill>
+                <a:latin typeface="Helvetica Neue"/>
+                <a:ea typeface="Helvetica Neue"/>
+                <a:cs typeface="Helvetica Neue"/>
+              </a:defRPr>
+            </a:pPr>
+            <a:r>
+              <a:rPr sz="2400" b="0">
+                <a:solidFill>
+                  <a:srgbClr val="172F3F"/>
+                </a:solidFill>
+                <a:latin typeface="Helvetica Neue"/>
+                <a:ea typeface="Helvetica Neue"/>
+                <a:cs typeface="Helvetica Neue"/>
+              </a:rPr>
+              <a:t>Maintain executable examples and matching tutorials.</a:t>
+            </a:r>
+          </a:p>
+        </p:txBody>
+      </p:sp>
+      <p:sp>
+        <p:nvSpPr>
+          <p:cNvPr id="9" name="">
+            <a:extLst xmlns:a="http://schemas.openxmlformats.org/drawingml/2006/main">
+              <a:ext uri="{FF2B5EF4-FFF2-40B4-BE49-F238E27FC236}">
+                <a16:creationId xmlns:a16="http://schemas.microsoft.com/office/drawing/2014/main" id="{6712DFEE-E676-4DA7-AB87-AB0DAB095B18}"/>
+              </a:ext>
+            </a:extLst>
+          </p:cNvPr>
+          <p:cNvSpPr>
+            <a:spLocks xmlns:a="http://schemas.openxmlformats.org/drawingml/2006/main" noGrp="1"/>
+          </p:cNvSpPr>
+          <p:nvPr/>
+        </p:nvSpPr>
+        <p:spPr>
+          <a:xfrm xmlns:a="http://schemas.openxmlformats.org/drawingml/2006/main">
+            <a:off x="685800" y="4829175"/>
+            <a:ext cx="762000" cy="571500"/>
+          </a:xfrm>
+          <a:prstGeom xmlns:a="http://schemas.openxmlformats.org/drawingml/2006/main" prst="rect">
+            <a:avLst/>
+          </a:prstGeom>
+          <a:noFill xmlns:a="http://schemas.openxmlformats.org/drawingml/2006/main"/>
+          <a:ln xmlns:a="http://schemas.openxmlformats.org/drawingml/2006/main" w="0">
+            <a:noFill/>
+          </a:ln>
+        </p:spPr>
+        <p:txBody>
+          <a:bodyPr xmlns:a="http://schemas.openxmlformats.org/drawingml/2006/main">
+            <a:noAutofit/>
+          </a:bodyPr>
+          <a:lstStyle xmlns:a="http://schemas.openxmlformats.org/drawingml/2006/main"/>
+          <a:p xmlns:a="http://schemas.openxmlformats.org/drawingml/2006/main">
+            <a:pPr>
+              <a:defRPr sz="3000" b="1">
+                <a:solidFill>
+                  <a:srgbClr val="1D7479"/>
+                </a:solidFill>
+                <a:latin typeface="Helvetica Neue"/>
+                <a:ea typeface="Helvetica Neue"/>
+                <a:cs typeface="Helvetica Neue"/>
+              </a:defRPr>
+            </a:pPr>
+            <a:r>
+              <a:rPr sz="3000" b="1">
+                <a:solidFill>
+                  <a:srgbClr val="1D7479"/>
+                </a:solidFill>
+                <a:latin typeface="Helvetica Neue"/>
+                <a:ea typeface="Helvetica Neue"/>
+                <a:cs typeface="Helvetica Neue"/>
+              </a:rPr>
+              <a:t>4</a:t>
+            </a:r>
+          </a:p>
+        </p:txBody>
+      </p:sp>
+      <p:sp>
+        <p:nvSpPr>
+          <p:cNvPr id="10" name="">
+            <a:extLst xmlns:a="http://schemas.openxmlformats.org/drawingml/2006/main">
+              <a:ext uri="{FF2B5EF4-FFF2-40B4-BE49-F238E27FC236}">
+                <a16:creationId xmlns:a16="http://schemas.microsoft.com/office/drawing/2014/main" id="{C193590A-497E-402E-826E-AF8EADDBBD63}"/>
+              </a:ext>
+            </a:extLst>
+          </p:cNvPr>
+          <p:cNvSpPr>
+            <a:spLocks xmlns:a="http://schemas.openxmlformats.org/drawingml/2006/main" noGrp="1"/>
+          </p:cNvSpPr>
+          <p:nvPr/>
+        </p:nvSpPr>
+        <p:spPr>
+          <a:xfrm xmlns:a="http://schemas.openxmlformats.org/drawingml/2006/main">
+            <a:off x="1619250" y="4829175"/>
+            <a:ext cx="9715500" cy="723900"/>
+          </a:xfrm>
+          <a:prstGeom xmlns:a="http://schemas.openxmlformats.org/drawingml/2006/main" prst="rect">
+            <a:avLst/>
+          </a:prstGeom>
+          <a:noFill xmlns:a="http://schemas.openxmlformats.org/drawingml/2006/main"/>
+          <a:ln xmlns:a="http://schemas.openxmlformats.org/drawingml/2006/main" w="0">
+            <a:noFill/>
+          </a:ln>
+        </p:spPr>
+        <p:txBody>
+          <a:bodyPr xmlns:a="http://schemas.openxmlformats.org/drawingml/2006/main">
+            <a:noAutofit/>
+          </a:bodyPr>
+          <a:lstStyle xmlns:a="http://schemas.openxmlformats.org/drawingml/2006/main"/>
+          <a:p xmlns:a="http://schemas.openxmlformats.org/drawingml/2006/main">
+            <a:pPr>
+              <a:defRPr sz="2400" b="0">
+                <a:solidFill>
+                  <a:srgbClr val="172F3F"/>
+                </a:solidFill>
+                <a:latin typeface="Helvetica Neue"/>
+                <a:ea typeface="Helvetica Neue"/>
+                <a:cs typeface="Helvetica Neue"/>
+              </a:defRPr>
+            </a:pPr>
+            <a:r>
+              <a:rPr sz="2400" b="0">
+                <a:solidFill>
+                  <a:srgbClr val="172F3F"/>
+                </a:solidFill>
+                <a:latin typeface="Helvetica Neue"/>
+                <a:ea typeface="Helvetica Neue"/>
+                <a:cs typeface="Helvetica Neue"/>
+              </a:rPr>
+              <a:t>Check package consumers and teaching journeys on each release.</a:t>
             </a:r>
           </a:p>
         </p:txBody>
@@ -3830,7 +4231,390 @@
     </p:spTree>
     <p:extLst>
       <p:ext uri="{BB962C8B-B14F-4D97-AF65-F5344CB8AC3E}">
-        <p14:creationId xmlns:p14="http://schemas.microsoft.com/office/powerpoint/2010/main" val="292383290"/>
+        <p14:creationId xmlns:p14="http://schemas.microsoft.com/office/powerpoint/2010/main" val="1518238041"/>
+      </p:ext>
+    </p:extLst>
+  </p:cSld>
+</p:sld>
+</file>
+
+<file path=ppt/slides/slide13.xml><?xml version="1.0" encoding="utf-8"?>
+<p:sld xmlns:p="http://schemas.openxmlformats.org/presentationml/2006/main">
+  <p:cSld>
+    <p:bg>
+      <p:bgPr>
+        <a:solidFill xmlns:a="http://schemas.openxmlformats.org/drawingml/2006/main">
+          <a:srgbClr val="F8F8F4"/>
+        </a:solidFill>
+      </p:bgPr>
+    </p:bg>
+    <p:spTree>
+      <p:nvGrpSpPr>
+        <p:cNvPr id="1" name=""/>
+        <p:cNvGrpSpPr/>
+        <p:nvPr/>
+      </p:nvGrpSpPr>
+      <p:grpSpPr>
+        <a:xfrm xmlns:a="http://schemas.openxmlformats.org/drawingml/2006/main"/>
+      </p:grpSpPr>
+      <p:sp>
+        <p:nvSpPr>
+          <p:cNvPr id="6" name="">
+            <a:extLst xmlns:a="http://schemas.openxmlformats.org/drawingml/2006/main">
+              <a:ext uri="{FF2B5EF4-FFF2-40B4-BE49-F238E27FC236}">
+                <a16:creationId xmlns:a16="http://schemas.microsoft.com/office/drawing/2014/main" id="{1FD91A03-39A7-497A-A742-E164DC1656E8}"/>
+              </a:ext>
+            </a:extLst>
+          </p:cNvPr>
+          <p:cNvSpPr>
+            <a:spLocks xmlns:a="http://schemas.openxmlformats.org/drawingml/2006/main" noGrp="1"/>
+          </p:cNvSpPr>
+          <p:nvPr/>
+        </p:nvSpPr>
+        <p:spPr>
+          <a:xfrm xmlns:a="http://schemas.openxmlformats.org/drawingml/2006/main">
+            <a:off x="685800" y="457200"/>
+            <a:ext cx="10820400" cy="1066800"/>
+          </a:xfrm>
+          <a:prstGeom xmlns:a="http://schemas.openxmlformats.org/drawingml/2006/main" prst="rect">
+            <a:avLst/>
+          </a:prstGeom>
+          <a:noFill xmlns:a="http://schemas.openxmlformats.org/drawingml/2006/main"/>
+          <a:ln xmlns:a="http://schemas.openxmlformats.org/drawingml/2006/main" w="0">
+            <a:noFill/>
+          </a:ln>
+        </p:spPr>
+        <p:txBody>
+          <a:bodyPr xmlns:a="http://schemas.openxmlformats.org/drawingml/2006/main">
+            <a:noAutofit/>
+          </a:bodyPr>
+          <a:lstStyle xmlns:a="http://schemas.openxmlformats.org/drawingml/2006/main"/>
+          <a:p xmlns:a="http://schemas.openxmlformats.org/drawingml/2006/main">
+            <a:pPr>
+              <a:defRPr sz="3450" b="1">
+                <a:solidFill>
+                  <a:srgbClr val="172F3F"/>
+                </a:solidFill>
+                <a:latin typeface="Helvetica Neue"/>
+                <a:ea typeface="Helvetica Neue"/>
+                <a:cs typeface="Helvetica Neue"/>
+              </a:defRPr>
+            </a:pPr>
+            <a:r>
+              <a:rPr sz="3450" b="1">
+                <a:solidFill>
+                  <a:srgbClr val="172F3F"/>
+                </a:solidFill>
+                <a:latin typeface="Helvetica Neue"/>
+                <a:ea typeface="Helvetica Neue"/>
+                <a:cs typeface="Helvetica Neue"/>
+              </a:rPr>
+              <a:t>A sustained DevX partnership</a:t>
+            </a:r>
+          </a:p>
+        </p:txBody>
+      </p:sp>
+      <p:sp>
+        <p:nvSpPr>
+          <p:cNvPr id="2" name="">
+            <a:extLst xmlns:a="http://schemas.openxmlformats.org/drawingml/2006/main">
+              <a:ext uri="{FF2B5EF4-FFF2-40B4-BE49-F238E27FC236}">
+                <a16:creationId xmlns:a16="http://schemas.microsoft.com/office/drawing/2014/main" id="{C8CF489E-A189-4778-BA3E-C652635D0FD1}"/>
+              </a:ext>
+            </a:extLst>
+          </p:cNvPr>
+          <p:cNvSpPr>
+            <a:spLocks xmlns:a="http://schemas.openxmlformats.org/drawingml/2006/main" noGrp="1"/>
+          </p:cNvSpPr>
+          <p:nvPr/>
+        </p:nvSpPr>
+        <p:spPr>
+          <a:xfrm xmlns:a="http://schemas.openxmlformats.org/drawingml/2006/main">
+            <a:off x="685800" y="6286500"/>
+            <a:ext cx="10820400" cy="266700"/>
+          </a:xfrm>
+          <a:prstGeom xmlns:a="http://schemas.openxmlformats.org/drawingml/2006/main" prst="rect">
+            <a:avLst/>
+          </a:prstGeom>
+          <a:noFill xmlns:a="http://schemas.openxmlformats.org/drawingml/2006/main"/>
+          <a:ln xmlns:a="http://schemas.openxmlformats.org/drawingml/2006/main" w="0">
+            <a:noFill/>
+          </a:ln>
+        </p:spPr>
+        <p:txBody>
+          <a:bodyPr xmlns:a="http://schemas.openxmlformats.org/drawingml/2006/main">
+            <a:noAutofit/>
+          </a:bodyPr>
+          <a:lstStyle xmlns:a="http://schemas.openxmlformats.org/drawingml/2006/main"/>
+          <a:p xmlns:a="http://schemas.openxmlformats.org/drawingml/2006/main">
+            <a:pPr>
+              <a:defRPr sz="1350" b="0">
+                <a:solidFill>
+                  <a:srgbClr val="506471"/>
+                </a:solidFill>
+                <a:latin typeface="Helvetica Neue"/>
+                <a:ea typeface="Helvetica Neue"/>
+                <a:cs typeface="Helvetica Neue"/>
+              </a:defRPr>
+            </a:pPr>
+            <a:r>
+              <a:rPr sz="1350" b="0">
+                <a:solidFill>
+                  <a:srgbClr val="506471"/>
+                </a:solidFill>
+                <a:latin typeface="Helvetica Neue"/>
+                <a:ea typeface="Helvetica Neue"/>
+                <a:cs typeface="Helvetica Neue"/>
+              </a:rPr>
+              <a:t>aha   /   Ripple DevRel   /   13</a:t>
+            </a:r>
+          </a:p>
+        </p:txBody>
+      </p:sp>
+      <p:sp>
+        <p:nvSpPr>
+          <p:cNvPr id="3" name="">
+            <a:extLst xmlns:a="http://schemas.openxmlformats.org/drawingml/2006/main">
+              <a:ext uri="{FF2B5EF4-FFF2-40B4-BE49-F238E27FC236}">
+                <a16:creationId xmlns:a16="http://schemas.microsoft.com/office/drawing/2014/main" id="{0FF7A48E-058B-43C5-96E5-0A1452CBAD11}"/>
+              </a:ext>
+            </a:extLst>
+          </p:cNvPr>
+          <p:cNvSpPr>
+            <a:spLocks xmlns:a="http://schemas.openxmlformats.org/drawingml/2006/main" noGrp="1"/>
+          </p:cNvSpPr>
+          <p:nvPr/>
+        </p:nvSpPr>
+        <p:spPr>
+          <a:xfrm xmlns:a="http://schemas.openxmlformats.org/drawingml/2006/main">
+            <a:off x="685800" y="2228850"/>
+            <a:ext cx="10620375" cy="1143000"/>
+          </a:xfrm>
+          <a:prstGeom xmlns:a="http://schemas.openxmlformats.org/drawingml/2006/main" prst="rect">
+            <a:avLst/>
+          </a:prstGeom>
+          <a:noFill xmlns:a="http://schemas.openxmlformats.org/drawingml/2006/main"/>
+          <a:ln xmlns:a="http://schemas.openxmlformats.org/drawingml/2006/main" w="0">
+            <a:noFill/>
+          </a:ln>
+        </p:spPr>
+        <p:txBody>
+          <a:bodyPr xmlns:a="http://schemas.openxmlformats.org/drawingml/2006/main">
+            <a:noAutofit/>
+          </a:bodyPr>
+          <a:lstStyle xmlns:a="http://schemas.openxmlformats.org/drawingml/2006/main"/>
+          <a:p xmlns:a="http://schemas.openxmlformats.org/drawingml/2006/main">
+            <a:pPr>
+              <a:defRPr sz="2775" b="1">
+                <a:solidFill>
+                  <a:srgbClr val="1D7479"/>
+                </a:solidFill>
+                <a:latin typeface="Helvetica Neue"/>
+                <a:ea typeface="Helvetica Neue"/>
+                <a:cs typeface="Helvetica Neue"/>
+              </a:defRPr>
+            </a:pPr>
+            <a:r>
+              <a:rPr sz="2775" b="1">
+                <a:solidFill>
+                  <a:srgbClr val="1D7479"/>
+                </a:solidFill>
+                <a:latin typeface="Helvetica Neue"/>
+                <a:ea typeface="Helvetica Neue"/>
+                <a:cs typeface="Helvetica Neue"/>
+              </a:rPr>
+              <a:t>Begin with an agreed xrpl.js implementation scope</a:t>
+            </a:r>
+          </a:p>
+          <a:p xmlns:a="http://schemas.openxmlformats.org/drawingml/2006/main">
+            <a:pPr>
+              <a:defRPr sz="2775" b="1">
+                <a:solidFill>
+                  <a:srgbClr val="1D7479"/>
+                </a:solidFill>
+                <a:latin typeface="Helvetica Neue"/>
+                <a:ea typeface="Helvetica Neue"/>
+                <a:cs typeface="Helvetica Neue"/>
+              </a:defRPr>
+            </a:pPr>
+            <a:r>
+              <a:rPr sz="2775" b="1">
+                <a:solidFill>
+                  <a:srgbClr val="1D7479"/>
+                </a:solidFill>
+                <a:latin typeface="Helvetica Neue"/>
+                <a:ea typeface="Helvetica Neue"/>
+                <a:cs typeface="Helvetica Neue"/>
+              </a:rPr>
+              <a:t>and clear release acceptance checks.</a:t>
+            </a:r>
+          </a:p>
+        </p:txBody>
+      </p:sp>
+      <p:sp>
+        <p:nvSpPr>
+          <p:cNvPr id="4" name="">
+            <a:extLst xmlns:a="http://schemas.openxmlformats.org/drawingml/2006/main">
+              <a:ext uri="{FF2B5EF4-FFF2-40B4-BE49-F238E27FC236}">
+                <a16:creationId xmlns:a16="http://schemas.microsoft.com/office/drawing/2014/main" id="{5231551E-26E8-426E-889A-7A582FEE22BD}"/>
+              </a:ext>
+            </a:extLst>
+          </p:cNvPr>
+          <p:cNvSpPr>
+            <a:spLocks xmlns:a="http://schemas.openxmlformats.org/drawingml/2006/main" noGrp="1"/>
+          </p:cNvSpPr>
+          <p:nvPr/>
+        </p:nvSpPr>
+        <p:spPr>
+          <a:xfrm xmlns:a="http://schemas.openxmlformats.org/drawingml/2006/main">
+            <a:off x="685800" y="3886200"/>
+            <a:ext cx="10668000" cy="1047750"/>
+          </a:xfrm>
+          <a:prstGeom xmlns:a="http://schemas.openxmlformats.org/drawingml/2006/main" prst="rect">
+            <a:avLst/>
+          </a:prstGeom>
+          <a:noFill xmlns:a="http://schemas.openxmlformats.org/drawingml/2006/main"/>
+          <a:ln xmlns:a="http://schemas.openxmlformats.org/drawingml/2006/main" w="0">
+            <a:noFill/>
+          </a:ln>
+        </p:spPr>
+        <p:txBody>
+          <a:bodyPr xmlns:a="http://schemas.openxmlformats.org/drawingml/2006/main">
+            <a:noAutofit/>
+          </a:bodyPr>
+          <a:lstStyle xmlns:a="http://schemas.openxmlformats.org/drawingml/2006/main"/>
+          <a:p xmlns:a="http://schemas.openxmlformats.org/drawingml/2006/main">
+            <a:pPr>
+              <a:defRPr sz="2325" b="0">
+                <a:solidFill>
+                  <a:srgbClr val="172F3F"/>
+                </a:solidFill>
+                <a:latin typeface="Helvetica Neue"/>
+                <a:ea typeface="Helvetica Neue"/>
+                <a:cs typeface="Helvetica Neue"/>
+              </a:defRPr>
+            </a:pPr>
+            <a:r>
+              <a:rPr sz="2325" b="0">
+                <a:solidFill>
+                  <a:srgbClr val="172F3F"/>
+                </a:solidFill>
+                <a:latin typeface="Helvetica Neue"/>
+                <a:ea typeface="Helvetica Neue"/>
+                <a:cs typeface="Helvetica Neue"/>
+              </a:rPr>
+              <a:t>Ongoing work</a:t>
+            </a:r>
+          </a:p>
+          <a:p xmlns:a="http://schemas.openxmlformats.org/drawingml/2006/main">
+            <a:pPr>
+              <a:defRPr sz="2325" b="0">
+                <a:solidFill>
+                  <a:srgbClr val="172F3F"/>
+                </a:solidFill>
+                <a:latin typeface="Helvetica Neue"/>
+                <a:ea typeface="Helvetica Neue"/>
+                <a:cs typeface="Helvetica Neue"/>
+              </a:defRPr>
+            </a:pPr>
+            <a:r>
+              <a:rPr sz="2325" b="0">
+                <a:solidFill>
+                  <a:srgbClr val="172F3F"/>
+                </a:solidFill>
+                <a:latin typeface="Helvetica Neue"/>
+                <a:ea typeface="Helvetica Neue"/>
+                <a:cs typeface="Helvetica Neue"/>
+              </a:rPr>
+              <a:t>SDK ergonomics, examples, documentation and regression prevention</a:t>
+            </a:r>
+          </a:p>
+        </p:txBody>
+      </p:sp>
+      <p:sp>
+        <p:nvSpPr>
+          <p:cNvPr id="5" name="">
+            <a:extLst xmlns:a="http://schemas.openxmlformats.org/drawingml/2006/main">
+              <a:ext uri="{FF2B5EF4-FFF2-40B4-BE49-F238E27FC236}">
+                <a16:creationId xmlns:a16="http://schemas.microsoft.com/office/drawing/2014/main" id="{185E428A-620A-470A-842E-AFB6184CEAA0}"/>
+              </a:ext>
+            </a:extLst>
+          </p:cNvPr>
+          <p:cNvSpPr>
+            <a:spLocks xmlns:a="http://schemas.openxmlformats.org/drawingml/2006/main" noGrp="1"/>
+          </p:cNvSpPr>
+          <p:nvPr/>
+        </p:nvSpPr>
+        <p:spPr>
+          <a:xfrm xmlns:a="http://schemas.openxmlformats.org/drawingml/2006/main">
+            <a:off x="685800" y="5286375"/>
+            <a:ext cx="10668000" cy="742950"/>
+          </a:xfrm>
+          <a:prstGeom xmlns:a="http://schemas.openxmlformats.org/drawingml/2006/main" prst="rect">
+            <a:avLst/>
+          </a:prstGeom>
+          <a:noFill xmlns:a="http://schemas.openxmlformats.org/drawingml/2006/main"/>
+          <a:ln xmlns:a="http://schemas.openxmlformats.org/drawingml/2006/main" w="0">
+            <a:noFill/>
+          </a:ln>
+        </p:spPr>
+        <p:txBody>
+          <a:bodyPr xmlns:a="http://schemas.openxmlformats.org/drawingml/2006/main">
+            <a:noAutofit/>
+          </a:bodyPr>
+          <a:lstStyle xmlns:a="http://schemas.openxmlformats.org/drawingml/2006/main"/>
+          <a:p xmlns:a="http://schemas.openxmlformats.org/drawingml/2006/main">
+            <a:pPr>
+              <a:defRPr sz="2175" b="0">
+                <a:solidFill>
+                  <a:srgbClr val="506471"/>
+                </a:solidFill>
+                <a:latin typeface="Helvetica Neue"/>
+                <a:ea typeface="Helvetica Neue"/>
+                <a:cs typeface="Helvetica Neue"/>
+              </a:defRPr>
+            </a:pPr>
+            <a:r>
+              <a:rPr sz="2175" b="0">
+                <a:solidFill>
+                  <a:srgbClr val="506471"/>
+                </a:solidFill>
+                <a:latin typeface="Helvetica Neue"/>
+                <a:ea typeface="Helvetica Neue"/>
+                <a:cs typeface="Helvetica Neue"/>
+              </a:rPr>
+              <a:t>Next audit</a:t>
+            </a:r>
+          </a:p>
+          <a:p xmlns:a="http://schemas.openxmlformats.org/drawingml/2006/main">
+            <a:pPr>
+              <a:defRPr sz="2175" b="0">
+                <a:solidFill>
+                  <a:srgbClr val="506471"/>
+                </a:solidFill>
+                <a:latin typeface="Helvetica Neue"/>
+                <a:ea typeface="Helvetica Neue"/>
+                <a:cs typeface="Helvetica Neue"/>
+              </a:defRPr>
+            </a:pPr>
+            <a:r>
+              <a:rPr sz="2175" b="0">
+                <a:solidFill>
+                  <a:srgbClr val="506471"/>
+                </a:solidFill>
+                <a:latin typeface="Helvetica Neue"/>
+                <a:ea typeface="Helvetica Neue"/>
+                <a:cs typeface="Helvetica Neue"/>
+              </a:rPr>
+              <a:t>Rust crate API and CLI developer experience</a:t>
+            </a:r>
+          </a:p>
+        </p:txBody>
+      </p:sp>
+    </p:spTree>
+    <p:extLst>
+      <p:ext uri="{BB962C8B-B14F-4D97-AF65-F5344CB8AC3E}">
+        <p14:creationId xmlns:p14="http://schemas.microsoft.com/office/powerpoint/2010/main" val="1137948762"/>
       </p:ext>
     </p:extLst>
   </p:cSld>
@@ -3861,7 +4645,7 @@
           <p:cNvPr id="11" name="">
             <a:extLst xmlns:a="http://schemas.openxmlformats.org/drawingml/2006/main">
               <a:ext uri="{FF2B5EF4-FFF2-40B4-BE49-F238E27FC236}">
-                <a16:creationId xmlns:a16="http://schemas.microsoft.com/office/drawing/2014/main" id="{7FE74C74-BBA8-43C1-A4E4-08FBBCE20A7E}"/>
+                <a16:creationId xmlns:a16="http://schemas.microsoft.com/office/drawing/2014/main" id="{7ED27F01-604B-4D48-938E-6D753B58CB06}"/>
               </a:ext>
             </a:extLst>
           </p:cNvPr>
@@ -3918,7 +4702,7 @@
           <p:cNvPr id="2" name="">
             <a:extLst xmlns:a="http://schemas.openxmlformats.org/drawingml/2006/main">
               <a:ext uri="{FF2B5EF4-FFF2-40B4-BE49-F238E27FC236}">
-                <a16:creationId xmlns:a16="http://schemas.microsoft.com/office/drawing/2014/main" id="{E1B71178-BF23-487D-BB8F-C81273CC5D75}"/>
+                <a16:creationId xmlns:a16="http://schemas.microsoft.com/office/drawing/2014/main" id="{59C453BE-30A6-4816-A12D-B7AEABD523E8}"/>
               </a:ext>
             </a:extLst>
           </p:cNvPr>
@@ -3975,7 +4759,7 @@
           <p:cNvPr id="3" name="">
             <a:extLst xmlns:a="http://schemas.openxmlformats.org/drawingml/2006/main">
               <a:ext uri="{FF2B5EF4-FFF2-40B4-BE49-F238E27FC236}">
-                <a16:creationId xmlns:a16="http://schemas.microsoft.com/office/drawing/2014/main" id="{44860BDA-259C-4EB9-911D-CC455EC3FB99}"/>
+                <a16:creationId xmlns:a16="http://schemas.microsoft.com/office/drawing/2014/main" id="{3E894DF9-964A-48B3-A778-AB541240A9E1}"/>
               </a:ext>
             </a:extLst>
           </p:cNvPr>
@@ -4032,7 +4816,7 @@
           <p:cNvPr id="4" name="">
             <a:extLst xmlns:a="http://schemas.openxmlformats.org/drawingml/2006/main">
               <a:ext uri="{FF2B5EF4-FFF2-40B4-BE49-F238E27FC236}">
-                <a16:creationId xmlns:a16="http://schemas.microsoft.com/office/drawing/2014/main" id="{38A27848-EA0B-4F9B-9E1B-3295BA50F872}"/>
+                <a16:creationId xmlns:a16="http://schemas.microsoft.com/office/drawing/2014/main" id="{FDCEF594-BD87-49CC-8E9E-EC5653FDFF5C}"/>
               </a:ext>
             </a:extLst>
           </p:cNvPr>
@@ -4089,7 +4873,7 @@
           <p:cNvPr id="5" name="">
             <a:extLst xmlns:a="http://schemas.openxmlformats.org/drawingml/2006/main">
               <a:ext uri="{FF2B5EF4-FFF2-40B4-BE49-F238E27FC236}">
-                <a16:creationId xmlns:a16="http://schemas.microsoft.com/office/drawing/2014/main" id="{94CA72B3-6D1D-4940-93B2-7D8AE242FBAF}"/>
+                <a16:creationId xmlns:a16="http://schemas.microsoft.com/office/drawing/2014/main" id="{C3CB2F5B-EA4E-450B-93F4-CB25EEDB3118}"/>
               </a:ext>
             </a:extLst>
           </p:cNvPr>
@@ -4169,7 +4953,7 @@
           <p:cNvPr id="6" name="">
             <a:extLst xmlns:a="http://schemas.openxmlformats.org/drawingml/2006/main">
               <a:ext uri="{FF2B5EF4-FFF2-40B4-BE49-F238E27FC236}">
-                <a16:creationId xmlns:a16="http://schemas.microsoft.com/office/drawing/2014/main" id="{1C74511A-5165-4B0B-99D4-32E12B90B91A}"/>
+                <a16:creationId xmlns:a16="http://schemas.microsoft.com/office/drawing/2014/main" id="{EEA596D5-111A-4891-BF57-B8723BD8F81A}"/>
               </a:ext>
             </a:extLst>
           </p:cNvPr>
@@ -4226,7 +5010,7 @@
           <p:cNvPr id="7" name="">
             <a:extLst xmlns:a="http://schemas.openxmlformats.org/drawingml/2006/main">
               <a:ext uri="{FF2B5EF4-FFF2-40B4-BE49-F238E27FC236}">
-                <a16:creationId xmlns:a16="http://schemas.microsoft.com/office/drawing/2014/main" id="{54316E95-5A13-4531-B292-FEAC4A2CFF2F}"/>
+                <a16:creationId xmlns:a16="http://schemas.microsoft.com/office/drawing/2014/main" id="{E0938893-E763-4B72-B252-25DF7840EA33}"/>
               </a:ext>
             </a:extLst>
           </p:cNvPr>
@@ -4306,7 +5090,7 @@
           <p:cNvPr id="8" name="">
             <a:extLst xmlns:a="http://schemas.openxmlformats.org/drawingml/2006/main">
               <a:ext uri="{FF2B5EF4-FFF2-40B4-BE49-F238E27FC236}">
-                <a16:creationId xmlns:a16="http://schemas.microsoft.com/office/drawing/2014/main" id="{01899AA3-A5A3-4C35-8EE4-47DE00C0EDA1}"/>
+                <a16:creationId xmlns:a16="http://schemas.microsoft.com/office/drawing/2014/main" id="{6F20A4CF-5D55-4091-88E9-4025DEFE8A1E}"/>
               </a:ext>
             </a:extLst>
           </p:cNvPr>
@@ -4363,7 +5147,7 @@
           <p:cNvPr id="9" name="">
             <a:extLst xmlns:a="http://schemas.openxmlformats.org/drawingml/2006/main">
               <a:ext uri="{FF2B5EF4-FFF2-40B4-BE49-F238E27FC236}">
-                <a16:creationId xmlns:a16="http://schemas.microsoft.com/office/drawing/2014/main" id="{19208BFF-572C-49B3-89A9-112C43B77E7A}"/>
+                <a16:creationId xmlns:a16="http://schemas.microsoft.com/office/drawing/2014/main" id="{43FECCF2-21BD-43C0-A5DA-49E8A87A21B2}"/>
               </a:ext>
             </a:extLst>
           </p:cNvPr>
@@ -4443,7 +5227,7 @@
           <p:cNvPr id="10" name="">
             <a:extLst xmlns:a="http://schemas.openxmlformats.org/drawingml/2006/main">
               <a:ext uri="{FF2B5EF4-FFF2-40B4-BE49-F238E27FC236}">
-                <a16:creationId xmlns:a16="http://schemas.microsoft.com/office/drawing/2014/main" id="{1DE9DCCD-33D4-4B52-BD2A-7E9F4ABD8207}"/>
+                <a16:creationId xmlns:a16="http://schemas.microsoft.com/office/drawing/2014/main" id="{10E9587E-B398-433B-81F4-D3298FFCA152}"/>
               </a:ext>
             </a:extLst>
           </p:cNvPr>
@@ -4498,7 +5282,7 @@
     </p:spTree>
     <p:extLst>
       <p:ext uri="{BB962C8B-B14F-4D97-AF65-F5344CB8AC3E}">
-        <p14:creationId xmlns:p14="http://schemas.microsoft.com/office/powerpoint/2010/main" val="1183561894"/>
+        <p14:creationId xmlns:p14="http://schemas.microsoft.com/office/powerpoint/2010/main" val="1961010258"/>
       </p:ext>
     </p:extLst>
   </p:cSld>
@@ -4529,7 +5313,7 @@
           <p:cNvPr id="11" name="">
             <a:extLst xmlns:a="http://schemas.openxmlformats.org/drawingml/2006/main">
               <a:ext uri="{FF2B5EF4-FFF2-40B4-BE49-F238E27FC236}">
-                <a16:creationId xmlns:a16="http://schemas.microsoft.com/office/drawing/2014/main" id="{DE4CA4CE-FF9C-42A5-92A2-9DBCC50D4633}"/>
+                <a16:creationId xmlns:a16="http://schemas.microsoft.com/office/drawing/2014/main" id="{A7840DB9-4AC4-49F6-9050-2EDD36CD59C6}"/>
               </a:ext>
             </a:extLst>
           </p:cNvPr>
@@ -4586,7 +5370,7 @@
           <p:cNvPr id="2" name="">
             <a:extLst xmlns:a="http://schemas.openxmlformats.org/drawingml/2006/main">
               <a:ext uri="{FF2B5EF4-FFF2-40B4-BE49-F238E27FC236}">
-                <a16:creationId xmlns:a16="http://schemas.microsoft.com/office/drawing/2014/main" id="{95F191A0-5301-4B9E-966A-EB9E55317B8B}"/>
+                <a16:creationId xmlns:a16="http://schemas.microsoft.com/office/drawing/2014/main" id="{3702F749-AF88-458D-9927-B054DF33EA25}"/>
               </a:ext>
             </a:extLst>
           </p:cNvPr>
@@ -4643,7 +5427,7 @@
           <p:cNvPr id="3" name="">
             <a:extLst xmlns:a="http://schemas.openxmlformats.org/drawingml/2006/main">
               <a:ext uri="{FF2B5EF4-FFF2-40B4-BE49-F238E27FC236}">
-                <a16:creationId xmlns:a16="http://schemas.microsoft.com/office/drawing/2014/main" id="{628AF501-7F17-4B5D-8FCE-3012B7E058C3}"/>
+                <a16:creationId xmlns:a16="http://schemas.microsoft.com/office/drawing/2014/main" id="{B9F64E1B-4982-4038-9F25-A34C78B61846}"/>
               </a:ext>
             </a:extLst>
           </p:cNvPr>
@@ -4700,7 +5484,7 @@
           <p:cNvPr id="4" name="">
             <a:extLst xmlns:a="http://schemas.openxmlformats.org/drawingml/2006/main">
               <a:ext uri="{FF2B5EF4-FFF2-40B4-BE49-F238E27FC236}">
-                <a16:creationId xmlns:a16="http://schemas.microsoft.com/office/drawing/2014/main" id="{B1643E5C-2626-4E6E-963F-D6BE25D36969}"/>
+                <a16:creationId xmlns:a16="http://schemas.microsoft.com/office/drawing/2014/main" id="{D7DC7F53-DA37-4CC3-B7E6-10520A8E1F6A}"/>
               </a:ext>
             </a:extLst>
           </p:cNvPr>
@@ -4757,7 +5541,7 @@
           <p:cNvPr id="5" name="">
             <a:extLst xmlns:a="http://schemas.openxmlformats.org/drawingml/2006/main">
               <a:ext uri="{FF2B5EF4-FFF2-40B4-BE49-F238E27FC236}">
-                <a16:creationId xmlns:a16="http://schemas.microsoft.com/office/drawing/2014/main" id="{2217D622-4565-41E1-92E1-6BA09BC2A881}"/>
+                <a16:creationId xmlns:a16="http://schemas.microsoft.com/office/drawing/2014/main" id="{803F6A1C-762E-4FC3-9188-34A359E39DB3}"/>
               </a:ext>
             </a:extLst>
           </p:cNvPr>
@@ -4814,7 +5598,7 @@
           <p:cNvPr id="6" name="">
             <a:extLst xmlns:a="http://schemas.openxmlformats.org/drawingml/2006/main">
               <a:ext uri="{FF2B5EF4-FFF2-40B4-BE49-F238E27FC236}">
-                <a16:creationId xmlns:a16="http://schemas.microsoft.com/office/drawing/2014/main" id="{D18483C9-28CF-4428-BCC1-E63E89035FE7}"/>
+                <a16:creationId xmlns:a16="http://schemas.microsoft.com/office/drawing/2014/main" id="{114CB85C-43F6-41A8-89BE-7A5635769FC3}"/>
               </a:ext>
             </a:extLst>
           </p:cNvPr>
@@ -4871,7 +5655,7 @@
           <p:cNvPr id="7" name="">
             <a:extLst xmlns:a="http://schemas.openxmlformats.org/drawingml/2006/main">
               <a:ext uri="{FF2B5EF4-FFF2-40B4-BE49-F238E27FC236}">
-                <a16:creationId xmlns:a16="http://schemas.microsoft.com/office/drawing/2014/main" id="{1270A4FD-5B99-4A8F-9F40-F8BCD0528A75}"/>
+                <a16:creationId xmlns:a16="http://schemas.microsoft.com/office/drawing/2014/main" id="{F8C02266-2AB7-4BAA-920E-74FD35795340}"/>
               </a:ext>
             </a:extLst>
           </p:cNvPr>
@@ -4928,7 +5712,7 @@
           <p:cNvPr id="8" name="">
             <a:extLst xmlns:a="http://schemas.openxmlformats.org/drawingml/2006/main">
               <a:ext uri="{FF2B5EF4-FFF2-40B4-BE49-F238E27FC236}">
-                <a16:creationId xmlns:a16="http://schemas.microsoft.com/office/drawing/2014/main" id="{8E55A1CE-AA8C-434F-9969-3D646047950A}"/>
+                <a16:creationId xmlns:a16="http://schemas.microsoft.com/office/drawing/2014/main" id="{11CF92D3-65AC-462A-BA46-D3E9AEFD6EF1}"/>
               </a:ext>
             </a:extLst>
           </p:cNvPr>
@@ -4985,7 +5769,7 @@
           <p:cNvPr id="9" name="">
             <a:extLst xmlns:a="http://schemas.openxmlformats.org/drawingml/2006/main">
               <a:ext uri="{FF2B5EF4-FFF2-40B4-BE49-F238E27FC236}">
-                <a16:creationId xmlns:a16="http://schemas.microsoft.com/office/drawing/2014/main" id="{2B82C485-DBD7-4AFE-BEEA-B9E476464422}"/>
+                <a16:creationId xmlns:a16="http://schemas.microsoft.com/office/drawing/2014/main" id="{D7BB1242-35EE-4EB5-8957-B0727C134FC5}"/>
               </a:ext>
             </a:extLst>
           </p:cNvPr>
@@ -5042,7 +5826,7 @@
           <p:cNvPr id="10" name="">
             <a:extLst xmlns:a="http://schemas.openxmlformats.org/drawingml/2006/main">
               <a:ext uri="{FF2B5EF4-FFF2-40B4-BE49-F238E27FC236}">
-                <a16:creationId xmlns:a16="http://schemas.microsoft.com/office/drawing/2014/main" id="{109FD16D-6310-47DA-8D75-5E788B8BF2EE}"/>
+                <a16:creationId xmlns:a16="http://schemas.microsoft.com/office/drawing/2014/main" id="{C66893E6-D6F2-4801-B618-4B298FA93515}"/>
               </a:ext>
             </a:extLst>
           </p:cNvPr>
@@ -5097,7 +5881,7 @@
     </p:spTree>
     <p:extLst>
       <p:ext uri="{BB962C8B-B14F-4D97-AF65-F5344CB8AC3E}">
-        <p14:creationId xmlns:p14="http://schemas.microsoft.com/office/powerpoint/2010/main" val="770352893"/>
+        <p14:creationId xmlns:p14="http://schemas.microsoft.com/office/powerpoint/2010/main" val="1276441152"/>
       </p:ext>
     </p:extLst>
   </p:cSld>
@@ -5128,7 +5912,7 @@
           <p:cNvPr id="11" name="">
             <a:extLst xmlns:a="http://schemas.openxmlformats.org/drawingml/2006/main">
               <a:ext uri="{FF2B5EF4-FFF2-40B4-BE49-F238E27FC236}">
-                <a16:creationId xmlns:a16="http://schemas.microsoft.com/office/drawing/2014/main" id="{89C2A355-E9C9-4515-9AC2-86A9006E66B0}"/>
+                <a16:creationId xmlns:a16="http://schemas.microsoft.com/office/drawing/2014/main" id="{D05FA34A-1908-48DA-99D1-6D79A257D8C0}"/>
               </a:ext>
             </a:extLst>
           </p:cNvPr>
@@ -5185,7 +5969,7 @@
           <p:cNvPr id="2" name="">
             <a:extLst xmlns:a="http://schemas.openxmlformats.org/drawingml/2006/main">
               <a:ext uri="{FF2B5EF4-FFF2-40B4-BE49-F238E27FC236}">
-                <a16:creationId xmlns:a16="http://schemas.microsoft.com/office/drawing/2014/main" id="{DADEDC3D-E548-4226-858F-7E49B0EE96B3}"/>
+                <a16:creationId xmlns:a16="http://schemas.microsoft.com/office/drawing/2014/main" id="{C32F9F61-1738-4FD2-9E46-F8BF2094954D}"/>
               </a:ext>
             </a:extLst>
           </p:cNvPr>
@@ -5242,7 +6026,7 @@
           <p:cNvPr id="3" name="">
             <a:extLst xmlns:a="http://schemas.openxmlformats.org/drawingml/2006/main">
               <a:ext uri="{FF2B5EF4-FFF2-40B4-BE49-F238E27FC236}">
-                <a16:creationId xmlns:a16="http://schemas.microsoft.com/office/drawing/2014/main" id="{43FB1909-6087-431E-879F-50F136215AF6}"/>
+                <a16:creationId xmlns:a16="http://schemas.microsoft.com/office/drawing/2014/main" id="{8F8B1F41-4520-45BB-A7B5-C609AD767CE9}"/>
               </a:ext>
             </a:extLst>
           </p:cNvPr>
@@ -5299,7 +6083,7 @@
           <p:cNvPr id="4" name="">
             <a:extLst xmlns:a="http://schemas.openxmlformats.org/drawingml/2006/main">
               <a:ext uri="{FF2B5EF4-FFF2-40B4-BE49-F238E27FC236}">
-                <a16:creationId xmlns:a16="http://schemas.microsoft.com/office/drawing/2014/main" id="{356C24F0-60CB-418D-BE0E-DCCC93F9DB19}"/>
+                <a16:creationId xmlns:a16="http://schemas.microsoft.com/office/drawing/2014/main" id="{C0FA7E32-1135-41BD-AE0E-595FD5B04E1E}"/>
               </a:ext>
             </a:extLst>
           </p:cNvPr>
@@ -5356,7 +6140,7 @@
           <p:cNvPr id="5" name="">
             <a:extLst xmlns:a="http://schemas.openxmlformats.org/drawingml/2006/main">
               <a:ext uri="{FF2B5EF4-FFF2-40B4-BE49-F238E27FC236}">
-                <a16:creationId xmlns:a16="http://schemas.microsoft.com/office/drawing/2014/main" id="{82D8E55C-1C1F-45DA-9978-993DA829AECE}"/>
+                <a16:creationId xmlns:a16="http://schemas.microsoft.com/office/drawing/2014/main" id="{D2156BCC-09A8-4FBB-B956-BE3BFCDC5041}"/>
               </a:ext>
             </a:extLst>
           </p:cNvPr>
@@ -5413,7 +6197,7 @@
           <p:cNvPr id="6" name="">
             <a:extLst xmlns:a="http://schemas.openxmlformats.org/drawingml/2006/main">
               <a:ext uri="{FF2B5EF4-FFF2-40B4-BE49-F238E27FC236}">
-                <a16:creationId xmlns:a16="http://schemas.microsoft.com/office/drawing/2014/main" id="{F7EDDDF7-430B-4EE8-9D30-8138C67370DF}"/>
+                <a16:creationId xmlns:a16="http://schemas.microsoft.com/office/drawing/2014/main" id="{F8C9CEC0-1317-4C19-9DAB-6190ED58B534}"/>
               </a:ext>
             </a:extLst>
           </p:cNvPr>
@@ -5493,7 +6277,7 @@
           <p:cNvPr id="7" name="">
             <a:extLst xmlns:a="http://schemas.openxmlformats.org/drawingml/2006/main">
               <a:ext uri="{FF2B5EF4-FFF2-40B4-BE49-F238E27FC236}">
-                <a16:creationId xmlns:a16="http://schemas.microsoft.com/office/drawing/2014/main" id="{92CCE43D-0CA8-48A0-AA8C-3C97FE271B7F}"/>
+                <a16:creationId xmlns:a16="http://schemas.microsoft.com/office/drawing/2014/main" id="{4FD8BB97-4B00-4C16-A24A-7116E9008275}"/>
               </a:ext>
             </a:extLst>
           </p:cNvPr>
@@ -5550,7 +6334,7 @@
           <p:cNvPr id="8" name="">
             <a:extLst xmlns:a="http://schemas.openxmlformats.org/drawingml/2006/main">
               <a:ext uri="{FF2B5EF4-FFF2-40B4-BE49-F238E27FC236}">
-                <a16:creationId xmlns:a16="http://schemas.microsoft.com/office/drawing/2014/main" id="{394886A2-C4E8-42A5-A6D5-DC7E88937944}"/>
+                <a16:creationId xmlns:a16="http://schemas.microsoft.com/office/drawing/2014/main" id="{F5A90E91-0520-4901-8C97-388647477084}"/>
               </a:ext>
             </a:extLst>
           </p:cNvPr>
@@ -5607,7 +6391,7 @@
           <p:cNvPr id="9" name="">
             <a:extLst xmlns:a="http://schemas.openxmlformats.org/drawingml/2006/main">
               <a:ext uri="{FF2B5EF4-FFF2-40B4-BE49-F238E27FC236}">
-                <a16:creationId xmlns:a16="http://schemas.microsoft.com/office/drawing/2014/main" id="{D2C5D5C5-C209-4522-A5E1-57560941EE71}"/>
+                <a16:creationId xmlns:a16="http://schemas.microsoft.com/office/drawing/2014/main" id="{30536843-99BF-4ADD-9C49-6367B11ED590}"/>
               </a:ext>
             </a:extLst>
           </p:cNvPr>
@@ -5687,7 +6471,7 @@
           <p:cNvPr id="10" name="">
             <a:extLst xmlns:a="http://schemas.openxmlformats.org/drawingml/2006/main">
               <a:ext uri="{FF2B5EF4-FFF2-40B4-BE49-F238E27FC236}">
-                <a16:creationId xmlns:a16="http://schemas.microsoft.com/office/drawing/2014/main" id="{645E2763-CA66-4083-9A97-28C8AEBF0488}"/>
+                <a16:creationId xmlns:a16="http://schemas.microsoft.com/office/drawing/2014/main" id="{B6BFBD2D-4BC9-4962-BFBF-E46ECDC689AD}"/>
               </a:ext>
             </a:extLst>
           </p:cNvPr>
@@ -5742,7 +6526,7 @@
     </p:spTree>
     <p:extLst>
       <p:ext uri="{BB962C8B-B14F-4D97-AF65-F5344CB8AC3E}">
-        <p14:creationId xmlns:p14="http://schemas.microsoft.com/office/powerpoint/2010/main" val="449671395"/>
+        <p14:creationId xmlns:p14="http://schemas.microsoft.com/office/powerpoint/2010/main" val="675099425"/>
       </p:ext>
     </p:extLst>
   </p:cSld>
@@ -5773,7 +6557,7 @@
           <p:cNvPr id="10" name="">
             <a:extLst xmlns:a="http://schemas.openxmlformats.org/drawingml/2006/main">
               <a:ext uri="{FF2B5EF4-FFF2-40B4-BE49-F238E27FC236}">
-                <a16:creationId xmlns:a16="http://schemas.microsoft.com/office/drawing/2014/main" id="{944DC655-6C06-48BF-985B-45799D87C2DA}"/>
+                <a16:creationId xmlns:a16="http://schemas.microsoft.com/office/drawing/2014/main" id="{7536F2C6-938F-4AD2-8E93-1175ACC07ADE}"/>
               </a:ext>
             </a:extLst>
           </p:cNvPr>
@@ -5830,7 +6614,7 @@
           <p:cNvPr id="2" name="">
             <a:extLst xmlns:a="http://schemas.openxmlformats.org/drawingml/2006/main">
               <a:ext uri="{FF2B5EF4-FFF2-40B4-BE49-F238E27FC236}">
-                <a16:creationId xmlns:a16="http://schemas.microsoft.com/office/drawing/2014/main" id="{2EF77416-3BFE-4905-A6E4-6E6DBEE17BC3}"/>
+                <a16:creationId xmlns:a16="http://schemas.microsoft.com/office/drawing/2014/main" id="{0B3FFAF4-8FF4-4576-88A2-65DB43385D46}"/>
               </a:ext>
             </a:extLst>
           </p:cNvPr>
@@ -5887,7 +6671,7 @@
           <p:cNvPr id="3" name="">
             <a:extLst xmlns:a="http://schemas.openxmlformats.org/drawingml/2006/main">
               <a:ext uri="{FF2B5EF4-FFF2-40B4-BE49-F238E27FC236}">
-                <a16:creationId xmlns:a16="http://schemas.microsoft.com/office/drawing/2014/main" id="{A341CD29-669C-48CD-94F3-016F4C7C3F58}"/>
+                <a16:creationId xmlns:a16="http://schemas.microsoft.com/office/drawing/2014/main" id="{EF76BEAD-FDA5-4155-B783-1294BFC6BE18}"/>
               </a:ext>
             </a:extLst>
           </p:cNvPr>
@@ -5944,7 +6728,7 @@
           <p:cNvPr id="4" name="">
             <a:extLst xmlns:a="http://schemas.openxmlformats.org/drawingml/2006/main">
               <a:ext uri="{FF2B5EF4-FFF2-40B4-BE49-F238E27FC236}">
-                <a16:creationId xmlns:a16="http://schemas.microsoft.com/office/drawing/2014/main" id="{DD531819-26EF-4ADD-8BAB-595C8C921D14}"/>
+                <a16:creationId xmlns:a16="http://schemas.microsoft.com/office/drawing/2014/main" id="{19422F2E-40C2-4D50-B8F6-357B4843BC08}"/>
               </a:ext>
             </a:extLst>
           </p:cNvPr>
@@ -6001,7 +6785,7 @@
           <p:cNvPr id="5" name="">
             <a:extLst xmlns:a="http://schemas.openxmlformats.org/drawingml/2006/main">
               <a:ext uri="{FF2B5EF4-FFF2-40B4-BE49-F238E27FC236}">
-                <a16:creationId xmlns:a16="http://schemas.microsoft.com/office/drawing/2014/main" id="{74920B02-D2E4-476C-B475-14AA977E59D0}"/>
+                <a16:creationId xmlns:a16="http://schemas.microsoft.com/office/drawing/2014/main" id="{1ED6F60A-081F-48FC-B1C2-CB2F5DCBB679}"/>
               </a:ext>
             </a:extLst>
           </p:cNvPr>
@@ -6058,7 +6842,7 @@
           <p:cNvPr id="6" name="">
             <a:extLst xmlns:a="http://schemas.openxmlformats.org/drawingml/2006/main">
               <a:ext uri="{FF2B5EF4-FFF2-40B4-BE49-F238E27FC236}">
-                <a16:creationId xmlns:a16="http://schemas.microsoft.com/office/drawing/2014/main" id="{808B1DDE-A80D-4FB9-BF81-C2136B4D3735}"/>
+                <a16:creationId xmlns:a16="http://schemas.microsoft.com/office/drawing/2014/main" id="{34C5BFBD-4ABC-4A3B-8FB0-CCAACCA62F6A}"/>
               </a:ext>
             </a:extLst>
           </p:cNvPr>
@@ -6253,7 +7037,7 @@
           <p:cNvPr id="7" name="">
             <a:extLst xmlns:a="http://schemas.openxmlformats.org/drawingml/2006/main">
               <a:ext uri="{FF2B5EF4-FFF2-40B4-BE49-F238E27FC236}">
-                <a16:creationId xmlns:a16="http://schemas.microsoft.com/office/drawing/2014/main" id="{70162748-2697-44B7-83D1-C10F50E353F5}"/>
+                <a16:creationId xmlns:a16="http://schemas.microsoft.com/office/drawing/2014/main" id="{77F934D6-B136-424B-82F9-5475E9935782}"/>
               </a:ext>
             </a:extLst>
           </p:cNvPr>
@@ -6300,7 +7084,7 @@
                 <a:ea typeface="Menlo"/>
                 <a:cs typeface="Menlo"/>
               </a:rPr>
-              <a:t>await client.submitAndWait({</a:t>
+              <a:t>await client.tx.payment({</a:t>
             </a:r>
           </a:p>
           <a:p xmlns:a="http://schemas.openxmlformats.org/drawingml/2006/main">
@@ -6323,7 +7107,7 @@
                 <a:ea typeface="Menlo"/>
                 <a:cs typeface="Menlo"/>
               </a:rPr>
-              <a:t>  TransactionType: 'Payment',</a:t>
+              <a:t>  Destination: to.address,</a:t>
             </a:r>
           </a:p>
           <a:p xmlns:a="http://schemas.openxmlformats.org/drawingml/2006/main">
@@ -6346,7 +7130,7 @@
                 <a:ea typeface="Menlo"/>
                 <a:cs typeface="Menlo"/>
               </a:rPr>
-              <a:t>  Account: sender.address,</a:t>
+              <a:t>  Amount: '1000000',</a:t>
             </a:r>
           </a:p>
           <a:p xmlns:a="http://schemas.openxmlformats.org/drawingml/2006/main">
@@ -6369,7 +7153,7 @@
                 <a:ea typeface="Menlo"/>
                 <a:cs typeface="Menlo"/>
               </a:rPr>
-              <a:t>  Destination: to.address,</a:t>
+              <a:t>  DestinationTagg: 12</a:t>
             </a:r>
           </a:p>
           <a:p xmlns:a="http://schemas.openxmlformats.org/drawingml/2006/main">
@@ -6392,53 +7176,7 @@
                 <a:ea typeface="Menlo"/>
                 <a:cs typeface="Menlo"/>
               </a:rPr>
-              <a:t>  Amount: '1000000',</a:t>
-            </a:r>
-          </a:p>
-          <a:p xmlns:a="http://schemas.openxmlformats.org/drawingml/2006/main">
-            <a:pPr>
-              <a:defRPr sz="1725" b="0">
-                <a:solidFill>
-                  <a:srgbClr val="172F3F"/>
-                </a:solidFill>
-                <a:latin typeface="Menlo"/>
-                <a:ea typeface="Menlo"/>
-                <a:cs typeface="Menlo"/>
-              </a:defRPr>
-            </a:pPr>
-            <a:r>
-              <a:rPr sz="1725" b="0">
-                <a:solidFill>
-                  <a:srgbClr val="172F3F"/>
-                </a:solidFill>
-                <a:latin typeface="Menlo"/>
-                <a:ea typeface="Menlo"/>
-                <a:cs typeface="Menlo"/>
-              </a:rPr>
-              <a:t>  DestinationTagg: 12</a:t>
-            </a:r>
-          </a:p>
-          <a:p xmlns:a="http://schemas.openxmlformats.org/drawingml/2006/main">
-            <a:pPr>
-              <a:defRPr sz="1725" b="0">
-                <a:solidFill>
-                  <a:srgbClr val="172F3F"/>
-                </a:solidFill>
-                <a:latin typeface="Menlo"/>
-                <a:ea typeface="Menlo"/>
-                <a:cs typeface="Menlo"/>
-              </a:defRPr>
-            </a:pPr>
-            <a:r>
-              <a:rPr sz="1725" b="0">
-                <a:solidFill>
-                  <a:srgbClr val="172F3F"/>
-                </a:solidFill>
-                <a:latin typeface="Menlo"/>
-                <a:ea typeface="Menlo"/>
-                <a:cs typeface="Menlo"/>
-              </a:rPr>
-              <a:t>}, { wallet: sender })</a:t>
+              <a:t>}).signAndSubmit()</a:t>
             </a:r>
           </a:p>
         </p:txBody>
@@ -6448,7 +7186,7 @@
           <p:cNvPr id="8" name="">
             <a:extLst xmlns:a="http://schemas.openxmlformats.org/drawingml/2006/main">
               <a:ext uri="{FF2B5EF4-FFF2-40B4-BE49-F238E27FC236}">
-                <a16:creationId xmlns:a16="http://schemas.microsoft.com/office/drawing/2014/main" id="{9C946C5F-4609-4220-88AB-4B35C5D1351E}"/>
+                <a16:creationId xmlns:a16="http://schemas.microsoft.com/office/drawing/2014/main" id="{584C3A77-DB3A-4E67-9604-6930EC8B734A}"/>
               </a:ext>
             </a:extLst>
           </p:cNvPr>
@@ -6528,7 +7266,7 @@
           <p:cNvPr id="9" name="">
             <a:extLst xmlns:a="http://schemas.openxmlformats.org/drawingml/2006/main">
               <a:ext uri="{FF2B5EF4-FFF2-40B4-BE49-F238E27FC236}">
-                <a16:creationId xmlns:a16="http://schemas.microsoft.com/office/drawing/2014/main" id="{28498971-ADE3-430B-BF06-4B0F5EB58FB6}"/>
+                <a16:creationId xmlns:a16="http://schemas.microsoft.com/office/drawing/2014/main" id="{B41AC1F4-B49F-40A8-BA13-D65C8E36E1D6}"/>
               </a:ext>
             </a:extLst>
           </p:cNvPr>
@@ -6606,7 +7344,7 @@
     </p:spTree>
     <p:extLst>
       <p:ext uri="{BB962C8B-B14F-4D97-AF65-F5344CB8AC3E}">
-        <p14:creationId xmlns:p14="http://schemas.microsoft.com/office/powerpoint/2010/main" val="27003501"/>
+        <p14:creationId xmlns:p14="http://schemas.microsoft.com/office/powerpoint/2010/main" val="423820282"/>
       </p:ext>
     </p:extLst>
   </p:cSld>
@@ -6637,7 +7375,7 @@
           <p:cNvPr id="10" name="">
             <a:extLst xmlns:a="http://schemas.openxmlformats.org/drawingml/2006/main">
               <a:ext uri="{FF2B5EF4-FFF2-40B4-BE49-F238E27FC236}">
-                <a16:creationId xmlns:a16="http://schemas.microsoft.com/office/drawing/2014/main" id="{27343491-1F9F-4154-B651-354F1B886D8C}"/>
+                <a16:creationId xmlns:a16="http://schemas.microsoft.com/office/drawing/2014/main" id="{A2999212-AA5C-45C7-A0C1-84C2864A2760}"/>
               </a:ext>
             </a:extLst>
           </p:cNvPr>
@@ -6694,7 +7432,7 @@
           <p:cNvPr id="2" name="">
             <a:extLst xmlns:a="http://schemas.openxmlformats.org/drawingml/2006/main">
               <a:ext uri="{FF2B5EF4-FFF2-40B4-BE49-F238E27FC236}">
-                <a16:creationId xmlns:a16="http://schemas.microsoft.com/office/drawing/2014/main" id="{E7C0D3B9-9DEF-4C7E-8B76-32C7128F854E}"/>
+                <a16:creationId xmlns:a16="http://schemas.microsoft.com/office/drawing/2014/main" id="{812BCB08-4002-4C53-9EAA-2549A1375A67}"/>
               </a:ext>
             </a:extLst>
           </p:cNvPr>
@@ -6751,7 +7489,7 @@
           <p:cNvPr id="3" name="">
             <a:extLst xmlns:a="http://schemas.openxmlformats.org/drawingml/2006/main">
               <a:ext uri="{FF2B5EF4-FFF2-40B4-BE49-F238E27FC236}">
-                <a16:creationId xmlns:a16="http://schemas.microsoft.com/office/drawing/2014/main" id="{605E21C7-73C1-43C5-A844-93E3BA7661AB}"/>
+                <a16:creationId xmlns:a16="http://schemas.microsoft.com/office/drawing/2014/main" id="{E42531FB-B059-4FF1-9AE0-A407B83AD03A}"/>
               </a:ext>
             </a:extLst>
           </p:cNvPr>
@@ -6808,7 +7546,7 @@
           <p:cNvPr id="4" name="">
             <a:extLst xmlns:a="http://schemas.openxmlformats.org/drawingml/2006/main">
               <a:ext uri="{FF2B5EF4-FFF2-40B4-BE49-F238E27FC236}">
-                <a16:creationId xmlns:a16="http://schemas.microsoft.com/office/drawing/2014/main" id="{4E0818FD-EB4F-4A9E-A0D4-C88A7A31EAE2}"/>
+                <a16:creationId xmlns:a16="http://schemas.microsoft.com/office/drawing/2014/main" id="{657FF973-0873-49BA-97AD-CA7ECCF882D7}"/>
               </a:ext>
             </a:extLst>
           </p:cNvPr>
@@ -6865,7 +7603,7 @@
           <p:cNvPr id="5" name="">
             <a:extLst xmlns:a="http://schemas.openxmlformats.org/drawingml/2006/main">
               <a:ext uri="{FF2B5EF4-FFF2-40B4-BE49-F238E27FC236}">
-                <a16:creationId xmlns:a16="http://schemas.microsoft.com/office/drawing/2014/main" id="{F4D63050-B3FA-4902-B65E-52612E532244}"/>
+                <a16:creationId xmlns:a16="http://schemas.microsoft.com/office/drawing/2014/main" id="{30558D44-BF75-4CCF-A1FC-DDB17242AC83}"/>
               </a:ext>
             </a:extLst>
           </p:cNvPr>
@@ -6922,7 +7660,7 @@
           <p:cNvPr id="6" name="">
             <a:extLst xmlns:a="http://schemas.openxmlformats.org/drawingml/2006/main">
               <a:ext uri="{FF2B5EF4-FFF2-40B4-BE49-F238E27FC236}">
-                <a16:creationId xmlns:a16="http://schemas.microsoft.com/office/drawing/2014/main" id="{C3C52E27-4944-4970-9104-233FDF76D101}"/>
+                <a16:creationId xmlns:a16="http://schemas.microsoft.com/office/drawing/2014/main" id="{BB0727DA-B9B2-4C62-830A-DBE346D454E9}"/>
               </a:ext>
             </a:extLst>
           </p:cNvPr>
@@ -7094,7 +7832,7 @@
           <p:cNvPr id="7" name="">
             <a:extLst xmlns:a="http://schemas.openxmlformats.org/drawingml/2006/main">
               <a:ext uri="{FF2B5EF4-FFF2-40B4-BE49-F238E27FC236}">
-                <a16:creationId xmlns:a16="http://schemas.microsoft.com/office/drawing/2014/main" id="{2C43DF2D-1C3C-4805-986A-0DB629B83E61}"/>
+                <a16:creationId xmlns:a16="http://schemas.microsoft.com/office/drawing/2014/main" id="{0137A7C0-79DB-4967-8926-2E594013F446}"/>
               </a:ext>
             </a:extLst>
           </p:cNvPr>
@@ -7266,7 +8004,7 @@
           <p:cNvPr id="8" name="">
             <a:extLst xmlns:a="http://schemas.openxmlformats.org/drawingml/2006/main">
               <a:ext uri="{FF2B5EF4-FFF2-40B4-BE49-F238E27FC236}">
-                <a16:creationId xmlns:a16="http://schemas.microsoft.com/office/drawing/2014/main" id="{5C1EA8D6-5923-4B91-B27B-68A62EFB7D37}"/>
+                <a16:creationId xmlns:a16="http://schemas.microsoft.com/office/drawing/2014/main" id="{63E2A0AC-3276-43AA-8DA0-E22FF2200BA7}"/>
               </a:ext>
             </a:extLst>
           </p:cNvPr>
@@ -7346,7 +8084,7 @@
           <p:cNvPr id="9" name="">
             <a:extLst xmlns:a="http://schemas.openxmlformats.org/drawingml/2006/main">
               <a:ext uri="{FF2B5EF4-FFF2-40B4-BE49-F238E27FC236}">
-                <a16:creationId xmlns:a16="http://schemas.microsoft.com/office/drawing/2014/main" id="{436937EA-AAA8-4A0D-9D77-87B6F88BFA9A}"/>
+                <a16:creationId xmlns:a16="http://schemas.microsoft.com/office/drawing/2014/main" id="{27130EA8-94EA-4421-8A32-5ACC64788F7F}"/>
               </a:ext>
             </a:extLst>
           </p:cNvPr>
@@ -7424,7 +8162,7 @@
     </p:spTree>
     <p:extLst>
       <p:ext uri="{BB962C8B-B14F-4D97-AF65-F5344CB8AC3E}">
-        <p14:creationId xmlns:p14="http://schemas.microsoft.com/office/powerpoint/2010/main" val="48079667"/>
+        <p14:creationId xmlns:p14="http://schemas.microsoft.com/office/powerpoint/2010/main" val="257959548"/>
       </p:ext>
     </p:extLst>
   </p:cSld>
@@ -7455,7 +8193,7 @@
           <p:cNvPr id="10" name="">
             <a:extLst xmlns:a="http://schemas.openxmlformats.org/drawingml/2006/main">
               <a:ext uri="{FF2B5EF4-FFF2-40B4-BE49-F238E27FC236}">
-                <a16:creationId xmlns:a16="http://schemas.microsoft.com/office/drawing/2014/main" id="{08BA2A90-A43D-4836-A066-C77437FCF5BA}"/>
+                <a16:creationId xmlns:a16="http://schemas.microsoft.com/office/drawing/2014/main" id="{2670039A-85F3-4A77-B77E-32C2CD842BC5}"/>
               </a:ext>
             </a:extLst>
           </p:cNvPr>
@@ -7512,7 +8250,7 @@
           <p:cNvPr id="2" name="">
             <a:extLst xmlns:a="http://schemas.openxmlformats.org/drawingml/2006/main">
               <a:ext uri="{FF2B5EF4-FFF2-40B4-BE49-F238E27FC236}">
-                <a16:creationId xmlns:a16="http://schemas.microsoft.com/office/drawing/2014/main" id="{25A3D771-20A0-4C37-A710-D1CA111E67AF}"/>
+                <a16:creationId xmlns:a16="http://schemas.microsoft.com/office/drawing/2014/main" id="{DDDE390D-4C89-4738-8528-A7DA434BFD2C}"/>
               </a:ext>
             </a:extLst>
           </p:cNvPr>
@@ -7569,7 +8307,7 @@
           <p:cNvPr id="3" name="">
             <a:extLst xmlns:a="http://schemas.openxmlformats.org/drawingml/2006/main">
               <a:ext uri="{FF2B5EF4-FFF2-40B4-BE49-F238E27FC236}">
-                <a16:creationId xmlns:a16="http://schemas.microsoft.com/office/drawing/2014/main" id="{1C363CEF-D626-4132-891D-FA65B289B953}"/>
+                <a16:creationId xmlns:a16="http://schemas.microsoft.com/office/drawing/2014/main" id="{D0777FC8-B7C1-4E69-8BA7-D597188918F2}"/>
               </a:ext>
             </a:extLst>
           </p:cNvPr>
@@ -7626,7 +8364,7 @@
           <p:cNvPr id="4" name="">
             <a:extLst xmlns:a="http://schemas.openxmlformats.org/drawingml/2006/main">
               <a:ext uri="{FF2B5EF4-FFF2-40B4-BE49-F238E27FC236}">
-                <a16:creationId xmlns:a16="http://schemas.microsoft.com/office/drawing/2014/main" id="{1919EC6B-26DD-4437-A453-8E456B8456FE}"/>
+                <a16:creationId xmlns:a16="http://schemas.microsoft.com/office/drawing/2014/main" id="{807D3114-9DA0-41BB-B558-A0C05B95E5D5}"/>
               </a:ext>
             </a:extLst>
           </p:cNvPr>
@@ -7683,7 +8421,7 @@
           <p:cNvPr id="5" name="">
             <a:extLst xmlns:a="http://schemas.openxmlformats.org/drawingml/2006/main">
               <a:ext uri="{FF2B5EF4-FFF2-40B4-BE49-F238E27FC236}">
-                <a16:creationId xmlns:a16="http://schemas.microsoft.com/office/drawing/2014/main" id="{D2C6FFC9-A4E4-4CEC-A012-E2C574983BAE}"/>
+                <a16:creationId xmlns:a16="http://schemas.microsoft.com/office/drawing/2014/main" id="{52964F31-79D9-4340-B0F2-CC37021A13F0}"/>
               </a:ext>
             </a:extLst>
           </p:cNvPr>
@@ -7740,7 +8478,7 @@
           <p:cNvPr id="6" name="">
             <a:extLst xmlns:a="http://schemas.openxmlformats.org/drawingml/2006/main">
               <a:ext uri="{FF2B5EF4-FFF2-40B4-BE49-F238E27FC236}">
-                <a16:creationId xmlns:a16="http://schemas.microsoft.com/office/drawing/2014/main" id="{8A5C4F3D-60BF-4A18-BF63-587CF17DD936}"/>
+                <a16:creationId xmlns:a16="http://schemas.microsoft.com/office/drawing/2014/main" id="{41788018-3C38-48D4-A52F-6BA9E84C16E4}"/>
               </a:ext>
             </a:extLst>
           </p:cNvPr>
@@ -7889,7 +8627,7 @@
           <p:cNvPr id="7" name="">
             <a:extLst xmlns:a="http://schemas.openxmlformats.org/drawingml/2006/main">
               <a:ext uri="{FF2B5EF4-FFF2-40B4-BE49-F238E27FC236}">
-                <a16:creationId xmlns:a16="http://schemas.microsoft.com/office/drawing/2014/main" id="{A8E721CF-9CB6-4FA2-BFF5-64218B2EAC1E}"/>
+                <a16:creationId xmlns:a16="http://schemas.microsoft.com/office/drawing/2014/main" id="{378512A2-0347-4DC5-83E3-57D09984A584}"/>
               </a:ext>
             </a:extLst>
           </p:cNvPr>
@@ -8038,7 +8776,7 @@
           <p:cNvPr id="8" name="">
             <a:extLst xmlns:a="http://schemas.openxmlformats.org/drawingml/2006/main">
               <a:ext uri="{FF2B5EF4-FFF2-40B4-BE49-F238E27FC236}">
-                <a16:creationId xmlns:a16="http://schemas.microsoft.com/office/drawing/2014/main" id="{837D4E27-3003-4974-B5B4-6263ECD6C905}"/>
+                <a16:creationId xmlns:a16="http://schemas.microsoft.com/office/drawing/2014/main" id="{1609A5ED-E9BC-4749-ABC7-929763C8DCDD}"/>
               </a:ext>
             </a:extLst>
           </p:cNvPr>
@@ -8118,7 +8856,7 @@
           <p:cNvPr id="9" name="">
             <a:extLst xmlns:a="http://schemas.openxmlformats.org/drawingml/2006/main">
               <a:ext uri="{FF2B5EF4-FFF2-40B4-BE49-F238E27FC236}">
-                <a16:creationId xmlns:a16="http://schemas.microsoft.com/office/drawing/2014/main" id="{D1521D29-4663-49FD-87F1-33E245085591}"/>
+                <a16:creationId xmlns:a16="http://schemas.microsoft.com/office/drawing/2014/main" id="{0F8ED0CB-669B-4D83-9345-7A7BF15E77ED}"/>
               </a:ext>
             </a:extLst>
           </p:cNvPr>
@@ -8196,7 +8934,7 @@
     </p:spTree>
     <p:extLst>
       <p:ext uri="{BB962C8B-B14F-4D97-AF65-F5344CB8AC3E}">
-        <p14:creationId xmlns:p14="http://schemas.microsoft.com/office/powerpoint/2010/main" val="1990152426"/>
+        <p14:creationId xmlns:p14="http://schemas.microsoft.com/office/powerpoint/2010/main" val="2104240597"/>
       </p:ext>
     </p:extLst>
   </p:cSld>
@@ -8227,7 +8965,7 @@
           <p:cNvPr id="10" name="">
             <a:extLst xmlns:a="http://schemas.openxmlformats.org/drawingml/2006/main">
               <a:ext uri="{FF2B5EF4-FFF2-40B4-BE49-F238E27FC236}">
-                <a16:creationId xmlns:a16="http://schemas.microsoft.com/office/drawing/2014/main" id="{897CD95F-D2DE-4048-8F82-0E56A756A52F}"/>
+                <a16:creationId xmlns:a16="http://schemas.microsoft.com/office/drawing/2014/main" id="{18D225DF-706C-40B6-BB14-0F92DC8FC85C}"/>
               </a:ext>
             </a:extLst>
           </p:cNvPr>
@@ -8274,7 +9012,7 @@
                 <a:ea typeface="Helvetica Neue"/>
                 <a:cs typeface="Helvetica Neue"/>
               </a:rPr>
-              <a:t>Keep the checks that matter</a:t>
+              <a:t>The SDK checks transaction success</a:t>
             </a:r>
           </a:p>
         </p:txBody>
@@ -8284,7 +9022,7 @@
           <p:cNvPr id="2" name="">
             <a:extLst xmlns:a="http://schemas.openxmlformats.org/drawingml/2006/main">
               <a:ext uri="{FF2B5EF4-FFF2-40B4-BE49-F238E27FC236}">
-                <a16:creationId xmlns:a16="http://schemas.microsoft.com/office/drawing/2014/main" id="{FD8231D5-43B6-4A5A-9745-C45F64843FD6}"/>
+                <a16:creationId xmlns:a16="http://schemas.microsoft.com/office/drawing/2014/main" id="{984A0B97-B24B-4B54-B979-6181035A0FF1}"/>
               </a:ext>
             </a:extLst>
           </p:cNvPr>
@@ -8331,7 +9069,7 @@
                 <a:ea typeface="Helvetica Neue"/>
                 <a:cs typeface="Helvetica Neue"/>
               </a:rPr>
-              <a:t>A validated transaction can still have a failed result</a:t>
+              <a:t>The first payment should not require learning protocol result codes</a:t>
             </a:r>
           </a:p>
         </p:txBody>
@@ -8341,7 +9079,7 @@
           <p:cNvPr id="3" name="">
             <a:extLst xmlns:a="http://schemas.openxmlformats.org/drawingml/2006/main">
               <a:ext uri="{FF2B5EF4-FFF2-40B4-BE49-F238E27FC236}">
-                <a16:creationId xmlns:a16="http://schemas.microsoft.com/office/drawing/2014/main" id="{4C74D134-256D-4DCE-AE45-D42662B69065}"/>
+                <a16:creationId xmlns:a16="http://schemas.microsoft.com/office/drawing/2014/main" id="{D624A048-45AE-4BDD-9BAB-ACADA31A49B7}"/>
               </a:ext>
             </a:extLst>
           </p:cNvPr>
@@ -8398,7 +9136,7 @@
           <p:cNvPr id="4" name="">
             <a:extLst xmlns:a="http://schemas.openxmlformats.org/drawingml/2006/main">
               <a:ext uri="{FF2B5EF4-FFF2-40B4-BE49-F238E27FC236}">
-                <a16:creationId xmlns:a16="http://schemas.microsoft.com/office/drawing/2014/main" id="{22D8C996-795F-45EF-8851-2A5B2DC92910}"/>
+                <a16:creationId xmlns:a16="http://schemas.microsoft.com/office/drawing/2014/main" id="{5479B404-EB0C-4C14-910E-4EF04741ECF2}"/>
               </a:ext>
             </a:extLst>
           </p:cNvPr>
@@ -8455,7 +9193,7 @@
           <p:cNvPr id="5" name="">
             <a:extLst xmlns:a="http://schemas.openxmlformats.org/drawingml/2006/main">
               <a:ext uri="{FF2B5EF4-FFF2-40B4-BE49-F238E27FC236}">
-                <a16:creationId xmlns:a16="http://schemas.microsoft.com/office/drawing/2014/main" id="{286E1756-7C6C-487F-B650-69899F93EB27}"/>
+                <a16:creationId xmlns:a16="http://schemas.microsoft.com/office/drawing/2014/main" id="{50294681-B2C1-4EB6-A71B-25C9885EDB35}"/>
               </a:ext>
             </a:extLst>
           </p:cNvPr>
@@ -8512,7 +9250,7 @@
           <p:cNvPr id="6" name="">
             <a:extLst xmlns:a="http://schemas.openxmlformats.org/drawingml/2006/main">
               <a:ext uri="{FF2B5EF4-FFF2-40B4-BE49-F238E27FC236}">
-                <a16:creationId xmlns:a16="http://schemas.microsoft.com/office/drawing/2014/main" id="{EFC072F2-BC79-43A1-8214-A2587FAF784C}"/>
+                <a16:creationId xmlns:a16="http://schemas.microsoft.com/office/drawing/2014/main" id="{E02F1BEA-AED1-4FE9-8D4C-67D705BD29CB}"/>
               </a:ext>
             </a:extLst>
           </p:cNvPr>
@@ -8707,7 +9445,7 @@
           <p:cNvPr id="7" name="">
             <a:extLst xmlns:a="http://schemas.openxmlformats.org/drawingml/2006/main">
               <a:ext uri="{FF2B5EF4-FFF2-40B4-BE49-F238E27FC236}">
-                <a16:creationId xmlns:a16="http://schemas.microsoft.com/office/drawing/2014/main" id="{D4985832-1CC0-4252-9ABC-3F0FC17BBF46}"/>
+                <a16:creationId xmlns:a16="http://schemas.microsoft.com/office/drawing/2014/main" id="{29A73087-0804-481C-8809-CCE31D023755}"/>
               </a:ext>
             </a:extLst>
           </p:cNvPr>
@@ -8754,7 +9492,7 @@
                 <a:ea typeface="Menlo"/>
                 <a:cs typeface="Menlo"/>
               </a:rPr>
-              <a:t>const m = result.result.meta</a:t>
+              <a:t>const result = await client.tx</a:t>
             </a:r>
           </a:p>
           <a:p xmlns:a="http://schemas.openxmlformats.org/drawingml/2006/main">
@@ -8777,7 +9515,7 @@
                 <a:ea typeface="Menlo"/>
                 <a:cs typeface="Menlo"/>
               </a:rPr>
-              <a:t>const code = m.TransactionResult</a:t>
+              <a:t>  .payment({</a:t>
             </a:r>
           </a:p>
           <a:p xmlns:a="http://schemas.openxmlformats.org/drawingml/2006/main">
@@ -8800,7 +9538,7 @@
                 <a:ea typeface="Menlo"/>
                 <a:cs typeface="Menlo"/>
               </a:rPr>
-              <a:t>if (code !== 'tesSUCCESS')</a:t>
+              <a:t>    Amount: xrpToDrops('1'),</a:t>
             </a:r>
           </a:p>
           <a:p xmlns:a="http://schemas.openxmlformats.org/drawingml/2006/main">
@@ -8823,7 +9561,53 @@
                 <a:ea typeface="Menlo"/>
                 <a:cs typeface="Menlo"/>
               </a:rPr>
-              <a:t>  throw Error(code)</a:t>
+              <a:t>    Destination: to.address</a:t>
+            </a:r>
+          </a:p>
+          <a:p xmlns:a="http://schemas.openxmlformats.org/drawingml/2006/main">
+            <a:pPr>
+              <a:defRPr sz="1725" b="0">
+                <a:solidFill>
+                  <a:srgbClr val="172F3F"/>
+                </a:solidFill>
+                <a:latin typeface="Menlo"/>
+                <a:ea typeface="Menlo"/>
+                <a:cs typeface="Menlo"/>
+              </a:defRPr>
+            </a:pPr>
+            <a:r>
+              <a:rPr sz="1725" b="0">
+                <a:solidFill>
+                  <a:srgbClr val="172F3F"/>
+                </a:solidFill>
+                <a:latin typeface="Menlo"/>
+                <a:ea typeface="Menlo"/>
+                <a:cs typeface="Menlo"/>
+              </a:rPr>
+              <a:t>  }).signAndSubmit()</a:t>
+            </a:r>
+          </a:p>
+          <a:p xmlns:a="http://schemas.openxmlformats.org/drawingml/2006/main">
+            <a:pPr>
+              <a:defRPr sz="1725" b="0">
+                <a:solidFill>
+                  <a:srgbClr val="172F3F"/>
+                </a:solidFill>
+                <a:latin typeface="Menlo"/>
+                <a:ea typeface="Menlo"/>
+                <a:cs typeface="Menlo"/>
+              </a:defRPr>
+            </a:pPr>
+            <a:r>
+              <a:rPr sz="1725" b="0">
+                <a:solidFill>
+                  <a:srgbClr val="172F3F"/>
+                </a:solidFill>
+                <a:latin typeface="Menlo"/>
+                <a:ea typeface="Menlo"/>
+                <a:cs typeface="Menlo"/>
+              </a:rPr>
+              <a:t>console.log(result.result.hash)</a:t>
             </a:r>
           </a:p>
         </p:txBody>
@@ -8833,7 +9617,7 @@
           <p:cNvPr id="8" name="">
             <a:extLst xmlns:a="http://schemas.openxmlformats.org/drawingml/2006/main">
               <a:ext uri="{FF2B5EF4-FFF2-40B4-BE49-F238E27FC236}">
-                <a16:creationId xmlns:a16="http://schemas.microsoft.com/office/drawing/2014/main" id="{16D2D0BD-BFE6-4339-8955-6725CC525392}"/>
+                <a16:creationId xmlns:a16="http://schemas.microsoft.com/office/drawing/2014/main" id="{C399854B-CDD3-4467-9F98-E6613F2E3756}"/>
               </a:ext>
             </a:extLst>
           </p:cNvPr>
@@ -8880,7 +9664,7 @@
                 <a:ea typeface="Helvetica Neue"/>
                 <a:cs typeface="Helvetica Neue"/>
               </a:rPr>
-              <a:t>Representation uncertainty</a:t>
+              <a:t>Callers guard the response</a:t>
             </a:r>
           </a:p>
           <a:p xmlns:a="http://schemas.openxmlformats.org/drawingml/2006/main">
@@ -8903,7 +9687,7 @@
                 <a:ea typeface="Helvetica Neue"/>
                 <a:cs typeface="Helvetica Neue"/>
               </a:rPr>
-              <a:t>adds a defensive check.</a:t>
+              <a:t>and interpret its result code.</a:t>
             </a:r>
           </a:p>
         </p:txBody>
@@ -8913,7 +9697,7 @@
           <p:cNvPr id="9" name="">
             <a:extLst xmlns:a="http://schemas.openxmlformats.org/drawingml/2006/main">
               <a:ext uri="{FF2B5EF4-FFF2-40B4-BE49-F238E27FC236}">
-                <a16:creationId xmlns:a16="http://schemas.microsoft.com/office/drawing/2014/main" id="{F490F73E-A434-4F6F-BD55-FAE8EFEE3C50}"/>
+                <a16:creationId xmlns:a16="http://schemas.microsoft.com/office/drawing/2014/main" id="{7D5831E6-F6DF-46C2-B5FC-4012C050A002}"/>
               </a:ext>
             </a:extLst>
           </p:cNvPr>
@@ -8960,7 +9744,7 @@
                 <a:ea typeface="Helvetica Neue"/>
                 <a:cs typeface="Helvetica Neue"/>
               </a:rPr>
-              <a:t>The success check remains.</a:t>
+              <a:t>The SDK returns success or throws.</a:t>
             </a:r>
           </a:p>
           <a:p xmlns:a="http://schemas.openxmlformats.org/drawingml/2006/main">
@@ -8983,7 +9767,7 @@
                 <a:ea typeface="Helvetica Neue"/>
                 <a:cs typeface="Helvetica Neue"/>
               </a:rPr>
-              <a:t>Only a known guarantee moves into types.</a:t>
+              <a:t>Use trySignAndSubmit for a result.</a:t>
             </a:r>
           </a:p>
         </p:txBody>
@@ -8991,7 +9775,7 @@
     </p:spTree>
     <p:extLst>
       <p:ext uri="{BB962C8B-B14F-4D97-AF65-F5344CB8AC3E}">
-        <p14:creationId xmlns:p14="http://schemas.microsoft.com/office/powerpoint/2010/main" val="67639008"/>
+        <p14:creationId xmlns:p14="http://schemas.microsoft.com/office/powerpoint/2010/main" val="1692177964"/>
       </p:ext>
     </p:extLst>
   </p:cSld>
@@ -9019,10 +9803,10 @@
       </p:grpSpPr>
       <p:sp>
         <p:nvSpPr>
-          <p:cNvPr id="13" name="">
-            <a:extLst xmlns:a="http://schemas.openxmlformats.org/drawingml/2006/main">
-              <a:ext uri="{FF2B5EF4-FFF2-40B4-BE49-F238E27FC236}">
-                <a16:creationId xmlns:a16="http://schemas.microsoft.com/office/drawing/2014/main" id="{9F6E6B16-7892-4647-8DD4-8C6F22B6A9A2}"/>
+          <p:cNvPr id="9" name="">
+            <a:extLst xmlns:a="http://schemas.openxmlformats.org/drawingml/2006/main">
+              <a:ext uri="{FF2B5EF4-FFF2-40B4-BE49-F238E27FC236}">
+                <a16:creationId xmlns:a16="http://schemas.microsoft.com/office/drawing/2014/main" id="{C049DAE5-4C34-4254-BE49-E968B6935F0A}"/>
               </a:ext>
             </a:extLst>
           </p:cNvPr>
@@ -9069,7 +9853,7 @@
                 <a:ea typeface="Helvetica Neue"/>
                 <a:cs typeface="Helvetica Neue"/>
               </a:rPr>
-              <a:t>Public examples become evidence</a:t>
+              <a:t>Discover transactions and commands</a:t>
             </a:r>
           </a:p>
         </p:txBody>
@@ -9079,7 +9863,7 @@
           <p:cNvPr id="2" name="">
             <a:extLst xmlns:a="http://schemas.openxmlformats.org/drawingml/2006/main">
               <a:ext uri="{FF2B5EF4-FFF2-40B4-BE49-F238E27FC236}">
-                <a16:creationId xmlns:a16="http://schemas.microsoft.com/office/drawing/2014/main" id="{76D03C46-CA82-4C59-B28D-73D32BCF16C9}"/>
+                <a16:creationId xmlns:a16="http://schemas.microsoft.com/office/drawing/2014/main" id="{F70A1F7D-0B3F-470D-B9A7-8219E80D8E09}"/>
               </a:ext>
             </a:extLst>
           </p:cNvPr>
@@ -9126,7 +9910,7 @@
                 <a:ea typeface="Helvetica Neue"/>
                 <a:cs typeface="Helvetica Neue"/>
               </a:rPr>
-              <a:t>Current-release fixes and SDK-dependent improvements are clearly separated</a:t>
+              <a:t>Bind a signing wallet once and explore the API in your editor</a:t>
             </a:r>
           </a:p>
         </p:txBody>
@@ -9136,7 +9920,7 @@
           <p:cNvPr id="3" name="">
             <a:extLst xmlns:a="http://schemas.openxmlformats.org/drawingml/2006/main">
               <a:ext uri="{FF2B5EF4-FFF2-40B4-BE49-F238E27FC236}">
-                <a16:creationId xmlns:a16="http://schemas.microsoft.com/office/drawing/2014/main" id="{BB27AE1D-2936-4C66-B4B5-0782A5ADB289}"/>
+                <a16:creationId xmlns:a16="http://schemas.microsoft.com/office/drawing/2014/main" id="{0ECF7819-27D9-467E-BE93-968426F614F2}"/>
               </a:ext>
             </a:extLst>
           </p:cNvPr>
@@ -9193,111 +9977,277 @@
           <p:cNvPr id="4" name="">
             <a:extLst xmlns:a="http://schemas.openxmlformats.org/drawingml/2006/main">
               <a:ext uri="{FF2B5EF4-FFF2-40B4-BE49-F238E27FC236}">
-                <a16:creationId xmlns:a16="http://schemas.microsoft.com/office/drawing/2014/main" id="{94AD1A3B-3A19-46EF-AEF5-F41125E4AA73}"/>
-              </a:ext>
-            </a:extLst>
-          </p:cNvPr>
-          <p:cNvSpPr>
-            <a:spLocks xmlns:a="http://schemas.openxmlformats.org/drawingml/2006/main" noGrp="1"/>
-          </p:cNvSpPr>
-          <p:nvPr/>
-        </p:nvSpPr>
-        <p:spPr>
-          <a:xfrm xmlns:a="http://schemas.openxmlformats.org/drawingml/2006/main">
-            <a:off x="685800" y="2476500"/>
-            <a:ext cx="2952750" cy="523875"/>
-          </a:xfrm>
-          <a:prstGeom xmlns:a="http://schemas.openxmlformats.org/drawingml/2006/main" prst="rect">
-            <a:avLst/>
-          </a:prstGeom>
-          <a:noFill xmlns:a="http://schemas.openxmlformats.org/drawingml/2006/main"/>
-          <a:ln xmlns:a="http://schemas.openxmlformats.org/drawingml/2006/main" w="0">
-            <a:noFill/>
-          </a:ln>
-        </p:spPr>
-        <p:txBody>
-          <a:bodyPr xmlns:a="http://schemas.openxmlformats.org/drawingml/2006/main">
-            <a:noAutofit/>
-          </a:bodyPr>
-          <a:lstStyle xmlns:a="http://schemas.openxmlformats.org/drawingml/2006/main"/>
-          <a:p xmlns:a="http://schemas.openxmlformats.org/drawingml/2006/main">
-            <a:pPr>
-              <a:defRPr sz="2250" b="1">
+                <a16:creationId xmlns:a16="http://schemas.microsoft.com/office/drawing/2014/main" id="{B22CA937-F556-4384-8C26-01037CF592E5}"/>
+              </a:ext>
+            </a:extLst>
+          </p:cNvPr>
+          <p:cNvSpPr>
+            <a:spLocks xmlns:a="http://schemas.openxmlformats.org/drawingml/2006/main" noGrp="1"/>
+          </p:cNvSpPr>
+          <p:nvPr/>
+        </p:nvSpPr>
+        <p:spPr>
+          <a:xfrm xmlns:a="http://schemas.openxmlformats.org/drawingml/2006/main">
+            <a:off x="685800" y="2647950"/>
+            <a:ext cx="5238750" cy="3028950"/>
+          </a:xfrm>
+          <a:prstGeom xmlns:a="http://schemas.openxmlformats.org/drawingml/2006/main" prst="rect">
+            <a:avLst/>
+          </a:prstGeom>
+          <a:noFill xmlns:a="http://schemas.openxmlformats.org/drawingml/2006/main"/>
+          <a:ln xmlns:a="http://schemas.openxmlformats.org/drawingml/2006/main" w="0">
+            <a:noFill/>
+          </a:ln>
+        </p:spPr>
+        <p:txBody>
+          <a:bodyPr xmlns:a="http://schemas.openxmlformats.org/drawingml/2006/main">
+            <a:noAutofit/>
+          </a:bodyPr>
+          <a:lstStyle xmlns:a="http://schemas.openxmlformats.org/drawingml/2006/main"/>
+          <a:p xmlns:a="http://schemas.openxmlformats.org/drawingml/2006/main">
+            <a:pPr>
+              <a:defRPr sz="1725" b="0">
+                <a:solidFill>
+                  <a:srgbClr val="172F3F"/>
+                </a:solidFill>
+                <a:latin typeface="Menlo"/>
+                <a:ea typeface="Menlo"/>
+                <a:cs typeface="Menlo"/>
+              </a:defRPr>
+            </a:pPr>
+            <a:r>
+              <a:rPr sz="1725" b="0">
+                <a:solidFill>
+                  <a:srgbClr val="172F3F"/>
+                </a:solidFill>
+                <a:latin typeface="Menlo"/>
+                <a:ea typeface="Menlo"/>
+                <a:cs typeface="Menlo"/>
+              </a:rPr>
+              <a:t>const client = new WalletClient(</a:t>
+            </a:r>
+          </a:p>
+          <a:p xmlns:a="http://schemas.openxmlformats.org/drawingml/2006/main">
+            <a:pPr>
+              <a:defRPr sz="1725" b="0">
+                <a:solidFill>
+                  <a:srgbClr val="172F3F"/>
+                </a:solidFill>
+                <a:latin typeface="Menlo"/>
+                <a:ea typeface="Menlo"/>
+                <a:cs typeface="Menlo"/>
+              </a:defRPr>
+            </a:pPr>
+            <a:r>
+              <a:rPr sz="1725" b="0">
+                <a:solidFill>
+                  <a:srgbClr val="172F3F"/>
+                </a:solidFill>
+                <a:latin typeface="Menlo"/>
+                <a:ea typeface="Menlo"/>
+                <a:cs typeface="Menlo"/>
+              </a:rPr>
+              <a:t>  server, { wallet }</a:t>
+            </a:r>
+          </a:p>
+          <a:p xmlns:a="http://schemas.openxmlformats.org/drawingml/2006/main">
+            <a:pPr>
+              <a:defRPr sz="1725" b="0">
+                <a:solidFill>
+                  <a:srgbClr val="172F3F"/>
+                </a:solidFill>
+                <a:latin typeface="Menlo"/>
+                <a:ea typeface="Menlo"/>
+                <a:cs typeface="Menlo"/>
+              </a:defRPr>
+            </a:pPr>
+            <a:r>
+              <a:rPr sz="1725" b="0">
+                <a:solidFill>
+                  <a:srgbClr val="172F3F"/>
+                </a:solidFill>
+                <a:latin typeface="Menlo"/>
+                <a:ea typeface="Menlo"/>
+                <a:cs typeface="Menlo"/>
+              </a:rPr>
+              <a:t>)</a:t>
+            </a:r>
+          </a:p>
+          <a:p xmlns:a="http://schemas.openxmlformats.org/drawingml/2006/main">
+            <a:pPr>
+              <a:defRPr sz="1725" b="0">
+                <a:solidFill>
+                  <a:srgbClr val="172F3F"/>
+                </a:solidFill>
+                <a:latin typeface="Menlo"/>
+                <a:ea typeface="Menlo"/>
+                <a:cs typeface="Menlo"/>
+              </a:defRPr>
+            </a:pPr>
+            <a:r>
+              <a:rPr sz="1725" b="0">
+                <a:solidFill>
+                  <a:srgbClr val="172F3F"/>
+                </a:solidFill>
+                <a:latin typeface="Menlo"/>
+                <a:ea typeface="Menlo"/>
+                <a:cs typeface="Menlo"/>
+              </a:rPr>
+              <a:t>await client.connect()</a:t>
+            </a:r>
+          </a:p>
+          <a:p xmlns:a="http://schemas.openxmlformats.org/drawingml/2006/main">
+            <a:r>
+              <a:t/>
+            </a:r>
+          </a:p>
+          <a:p xmlns:a="http://schemas.openxmlformats.org/drawingml/2006/main">
+            <a:pPr>
+              <a:defRPr sz="1725" b="0">
+                <a:solidFill>
+                  <a:srgbClr val="172F3F"/>
+                </a:solidFill>
+                <a:latin typeface="Menlo"/>
+                <a:ea typeface="Menlo"/>
+                <a:cs typeface="Menlo"/>
+              </a:defRPr>
+            </a:pPr>
+            <a:r>
+              <a:rPr sz="1725" b="0">
+                <a:solidFill>
+                  <a:srgbClr val="172F3F"/>
+                </a:solidFill>
+                <a:latin typeface="Menlo"/>
+                <a:ea typeface="Menlo"/>
+                <a:cs typeface="Menlo"/>
+              </a:rPr>
+              <a:t>const account = await client.command</a:t>
+            </a:r>
+          </a:p>
+          <a:p xmlns:a="http://schemas.openxmlformats.org/drawingml/2006/main">
+            <a:pPr>
+              <a:defRPr sz="1725" b="0">
+                <a:solidFill>
+                  <a:srgbClr val="172F3F"/>
+                </a:solidFill>
+                <a:latin typeface="Menlo"/>
+                <a:ea typeface="Menlo"/>
+                <a:cs typeface="Menlo"/>
+              </a:defRPr>
+            </a:pPr>
+            <a:r>
+              <a:rPr sz="1725" b="0">
+                <a:solidFill>
+                  <a:srgbClr val="172F3F"/>
+                </a:solidFill>
+                <a:latin typeface="Menlo"/>
+                <a:ea typeface="Menlo"/>
+                <a:cs typeface="Menlo"/>
+              </a:rPr>
+              <a:t>  .accountInfo({</a:t>
+            </a:r>
+          </a:p>
+          <a:p xmlns:a="http://schemas.openxmlformats.org/drawingml/2006/main">
+            <a:pPr>
+              <a:defRPr sz="1725" b="0">
+                <a:solidFill>
+                  <a:srgbClr val="172F3F"/>
+                </a:solidFill>
+                <a:latin typeface="Menlo"/>
+                <a:ea typeface="Menlo"/>
+                <a:cs typeface="Menlo"/>
+              </a:defRPr>
+            </a:pPr>
+            <a:r>
+              <a:rPr sz="1725" b="0">
+                <a:solidFill>
+                  <a:srgbClr val="172F3F"/>
+                </a:solidFill>
+                <a:latin typeface="Menlo"/>
+                <a:ea typeface="Menlo"/>
+                <a:cs typeface="Menlo"/>
+              </a:rPr>
+              <a:t>    account: client.wallet.address</a:t>
+            </a:r>
+          </a:p>
+          <a:p xmlns:a="http://schemas.openxmlformats.org/drawingml/2006/main">
+            <a:pPr>
+              <a:defRPr sz="1725" b="0">
+                <a:solidFill>
+                  <a:srgbClr val="172F3F"/>
+                </a:solidFill>
+                <a:latin typeface="Menlo"/>
+                <a:ea typeface="Menlo"/>
+                <a:cs typeface="Menlo"/>
+              </a:defRPr>
+            </a:pPr>
+            <a:r>
+              <a:rPr sz="1725" b="0">
+                <a:solidFill>
+                  <a:srgbClr val="172F3F"/>
+                </a:solidFill>
+                <a:latin typeface="Menlo"/>
+                <a:ea typeface="Menlo"/>
+                <a:cs typeface="Menlo"/>
+              </a:rPr>
+              <a:t>  })</a:t>
+            </a:r>
+          </a:p>
+        </p:txBody>
+      </p:sp>
+      <p:sp>
+        <p:nvSpPr>
+          <p:cNvPr id="5" name="">
+            <a:extLst xmlns:a="http://schemas.openxmlformats.org/drawingml/2006/main">
+              <a:ext uri="{FF2B5EF4-FFF2-40B4-BE49-F238E27FC236}">
+                <a16:creationId xmlns:a16="http://schemas.microsoft.com/office/drawing/2014/main" id="{FCBF0A64-3A2C-4215-A74D-CE05F14A28E6}"/>
+              </a:ext>
+            </a:extLst>
+          </p:cNvPr>
+          <p:cNvSpPr>
+            <a:spLocks xmlns:a="http://schemas.openxmlformats.org/drawingml/2006/main" noGrp="1"/>
+          </p:cNvSpPr>
+          <p:nvPr/>
+        </p:nvSpPr>
+        <p:spPr>
+          <a:xfrm xmlns:a="http://schemas.openxmlformats.org/drawingml/2006/main">
+            <a:off x="6762750" y="2571750"/>
+            <a:ext cx="4667250" cy="419100"/>
+          </a:xfrm>
+          <a:prstGeom xmlns:a="http://schemas.openxmlformats.org/drawingml/2006/main" prst="rect">
+            <a:avLst/>
+          </a:prstGeom>
+          <a:noFill xmlns:a="http://schemas.openxmlformats.org/drawingml/2006/main"/>
+          <a:ln xmlns:a="http://schemas.openxmlformats.org/drawingml/2006/main" w="0">
+            <a:noFill/>
+          </a:ln>
+        </p:spPr>
+        <p:txBody>
+          <a:bodyPr xmlns:a="http://schemas.openxmlformats.org/drawingml/2006/main">
+            <a:noAutofit/>
+          </a:bodyPr>
+          <a:lstStyle xmlns:a="http://schemas.openxmlformats.org/drawingml/2006/main"/>
+          <a:p xmlns:a="http://schemas.openxmlformats.org/drawingml/2006/main">
+            <a:pPr>
+              <a:defRPr sz="2400" b="1">
                 <a:solidFill>
                   <a:srgbClr val="1D7479"/>
                 </a:solidFill>
-                <a:latin typeface="Helvetica Neue"/>
-                <a:ea typeface="Helvetica Neue"/>
-                <a:cs typeface="Helvetica Neue"/>
-              </a:defRPr>
-            </a:pPr>
-            <a:r>
-              <a:rPr sz="2250" b="1">
+                <a:latin typeface="Menlo"/>
+                <a:ea typeface="Menlo"/>
+                <a:cs typeface="Menlo"/>
+              </a:defRPr>
+            </a:pPr>
+            <a:r>
+              <a:rPr sz="2400" b="1">
                 <a:solidFill>
                   <a:srgbClr val="1D7479"/>
                 </a:solidFill>
-                <a:latin typeface="Helvetica Neue"/>
-                <a:ea typeface="Helvetica Neue"/>
-                <a:cs typeface="Helvetica Neue"/>
-              </a:rPr>
-              <a:t>Get Started</a:t>
-            </a:r>
-          </a:p>
-        </p:txBody>
-      </p:sp>
-      <p:sp>
-        <p:nvSpPr>
-          <p:cNvPr id="5" name="">
-            <a:extLst xmlns:a="http://schemas.openxmlformats.org/drawingml/2006/main">
-              <a:ext uri="{FF2B5EF4-FFF2-40B4-BE49-F238E27FC236}">
-                <a16:creationId xmlns:a16="http://schemas.microsoft.com/office/drawing/2014/main" id="{419076F5-F783-4C95-9EAA-83941C99C42F}"/>
-              </a:ext>
-            </a:extLst>
-          </p:cNvPr>
-          <p:cNvSpPr>
-            <a:spLocks xmlns:a="http://schemas.openxmlformats.org/drawingml/2006/main" noGrp="1"/>
-          </p:cNvSpPr>
-          <p:nvPr/>
-        </p:nvSpPr>
-        <p:spPr>
-          <a:xfrm xmlns:a="http://schemas.openxmlformats.org/drawingml/2006/main">
-            <a:off x="3714750" y="2476500"/>
-            <a:ext cx="7715250" cy="590550"/>
-          </a:xfrm>
-          <a:prstGeom xmlns:a="http://schemas.openxmlformats.org/drawingml/2006/main" prst="rect">
-            <a:avLst/>
-          </a:prstGeom>
-          <a:noFill xmlns:a="http://schemas.openxmlformats.org/drawingml/2006/main"/>
-          <a:ln xmlns:a="http://schemas.openxmlformats.org/drawingml/2006/main" w="0">
-            <a:noFill/>
-          </a:ln>
-        </p:spPr>
-        <p:txBody>
-          <a:bodyPr xmlns:a="http://schemas.openxmlformats.org/drawingml/2006/main">
-            <a:noAutofit/>
-          </a:bodyPr>
-          <a:lstStyle xmlns:a="http://schemas.openxmlformats.org/drawingml/2006/main"/>
-          <a:p xmlns:a="http://schemas.openxmlformats.org/drawingml/2006/main">
-            <a:pPr>
-              <a:defRPr sz="2100" b="0">
-                <a:solidFill>
-                  <a:srgbClr val="172F3F"/>
-                </a:solidFill>
-                <a:latin typeface="Helvetica Neue"/>
-                <a:ea typeface="Helvetica Neue"/>
-                <a:cs typeface="Helvetica Neue"/>
-              </a:defRPr>
-            </a:pPr>
-            <a:r>
-              <a:rPr sz="2100" b="0">
-                <a:solidFill>
-                  <a:srgbClr val="172F3F"/>
-                </a:solidFill>
-                <a:latin typeface="Helvetica Neue"/>
-                <a:ea typeface="Helvetica Neue"/>
-                <a:cs typeface="Helvetica Neue"/>
-              </a:rPr>
-              <a:t>Inline fields, inferred replies and checked outcomes</a:t>
+                <a:latin typeface="Menlo"/>
+                <a:ea typeface="Menlo"/>
+                <a:cs typeface="Menlo"/>
+              </a:rPr>
+              <a:t>client.tx.</a:t>
             </a:r>
           </a:p>
         </p:txBody>
@@ -9307,111 +10257,157 @@
           <p:cNvPr id="6" name="">
             <a:extLst xmlns:a="http://schemas.openxmlformats.org/drawingml/2006/main">
               <a:ext uri="{FF2B5EF4-FFF2-40B4-BE49-F238E27FC236}">
-                <a16:creationId xmlns:a16="http://schemas.microsoft.com/office/drawing/2014/main" id="{BA31B33D-6054-4941-9AA1-C38A10D50B1C}"/>
-              </a:ext>
-            </a:extLst>
-          </p:cNvPr>
-          <p:cNvSpPr>
-            <a:spLocks xmlns:a="http://schemas.openxmlformats.org/drawingml/2006/main" noGrp="1"/>
-          </p:cNvSpPr>
-          <p:nvPr/>
-        </p:nvSpPr>
-        <p:spPr>
-          <a:xfrm xmlns:a="http://schemas.openxmlformats.org/drawingml/2006/main">
-            <a:off x="685800" y="3238500"/>
-            <a:ext cx="2952750" cy="523875"/>
-          </a:xfrm>
-          <a:prstGeom xmlns:a="http://schemas.openxmlformats.org/drawingml/2006/main" prst="rect">
-            <a:avLst/>
-          </a:prstGeom>
-          <a:noFill xmlns:a="http://schemas.openxmlformats.org/drawingml/2006/main"/>
-          <a:ln xmlns:a="http://schemas.openxmlformats.org/drawingml/2006/main" w="0">
-            <a:noFill/>
-          </a:ln>
-        </p:spPr>
-        <p:txBody>
-          <a:bodyPr xmlns:a="http://schemas.openxmlformats.org/drawingml/2006/main">
-            <a:noAutofit/>
-          </a:bodyPr>
-          <a:lstStyle xmlns:a="http://schemas.openxmlformats.org/drawingml/2006/main"/>
-          <a:p xmlns:a="http://schemas.openxmlformats.org/drawingml/2006/main">
-            <a:pPr>
-              <a:defRPr sz="2250" b="1">
+                <a16:creationId xmlns:a16="http://schemas.microsoft.com/office/drawing/2014/main" id="{885689D3-89FC-426A-B620-A541E66F50F0}"/>
+              </a:ext>
+            </a:extLst>
+          </p:cNvPr>
+          <p:cNvSpPr>
+            <a:spLocks xmlns:a="http://schemas.openxmlformats.org/drawingml/2006/main" noGrp="1"/>
+          </p:cNvSpPr>
+          <p:nvPr/>
+        </p:nvSpPr>
+        <p:spPr>
+          <a:xfrm xmlns:a="http://schemas.openxmlformats.org/drawingml/2006/main">
+            <a:off x="6762750" y="3105150"/>
+            <a:ext cx="4667250" cy="1181100"/>
+          </a:xfrm>
+          <a:prstGeom xmlns:a="http://schemas.openxmlformats.org/drawingml/2006/main" prst="rect">
+            <a:avLst/>
+          </a:prstGeom>
+          <a:noFill xmlns:a="http://schemas.openxmlformats.org/drawingml/2006/main"/>
+          <a:ln xmlns:a="http://schemas.openxmlformats.org/drawingml/2006/main" w="0">
+            <a:noFill/>
+          </a:ln>
+        </p:spPr>
+        <p:txBody>
+          <a:bodyPr xmlns:a="http://schemas.openxmlformats.org/drawingml/2006/main">
+            <a:noAutofit/>
+          </a:bodyPr>
+          <a:lstStyle xmlns:a="http://schemas.openxmlformats.org/drawingml/2006/main"/>
+          <a:p xmlns:a="http://schemas.openxmlformats.org/drawingml/2006/main">
+            <a:pPr>
+              <a:defRPr sz="2025" b="0">
+                <a:solidFill>
+                  <a:srgbClr val="172F3F"/>
+                </a:solidFill>
+                <a:latin typeface="Helvetica Neue"/>
+                <a:ea typeface="Helvetica Neue"/>
+                <a:cs typeface="Helvetica Neue"/>
+              </a:defRPr>
+            </a:pPr>
+            <a:r>
+              <a:rPr sz="2025" b="0">
+                <a:solidFill>
+                  <a:srgbClr val="172F3F"/>
+                </a:solidFill>
+                <a:latin typeface="Helvetica Neue"/>
+                <a:ea typeface="Helvetica Neue"/>
+                <a:cs typeface="Helvetica Neue"/>
+              </a:rPr>
+              <a:t>78 transaction factories</a:t>
+            </a:r>
+          </a:p>
+          <a:p xmlns:a="http://schemas.openxmlformats.org/drawingml/2006/main">
+            <a:pPr>
+              <a:defRPr sz="2025" b="0">
+                <a:solidFill>
+                  <a:srgbClr val="172F3F"/>
+                </a:solidFill>
+                <a:latin typeface="Helvetica Neue"/>
+                <a:ea typeface="Helvetica Neue"/>
+                <a:cs typeface="Helvetica Neue"/>
+              </a:defRPr>
+            </a:pPr>
+            <a:r>
+              <a:rPr sz="2025" b="0">
+                <a:solidFill>
+                  <a:srgbClr val="172F3F"/>
+                </a:solidFill>
+                <a:latin typeface="Helvetica Neue"/>
+                <a:ea typeface="Helvetica Neue"/>
+                <a:cs typeface="Helvetica Neue"/>
+              </a:rPr>
+              <a:t>payment, ammCreate,</a:t>
+            </a:r>
+          </a:p>
+          <a:p xmlns:a="http://schemas.openxmlformats.org/drawingml/2006/main">
+            <a:pPr>
+              <a:defRPr sz="2025" b="0">
+                <a:solidFill>
+                  <a:srgbClr val="172F3F"/>
+                </a:solidFill>
+                <a:latin typeface="Helvetica Neue"/>
+                <a:ea typeface="Helvetica Neue"/>
+                <a:cs typeface="Helvetica Neue"/>
+              </a:defRPr>
+            </a:pPr>
+            <a:r>
+              <a:rPr sz="2025" b="0">
+                <a:solidFill>
+                  <a:srgbClr val="172F3F"/>
+                </a:solidFill>
+                <a:latin typeface="Helvetica Neue"/>
+                <a:ea typeface="Helvetica Neue"/>
+                <a:cs typeface="Helvetica Neue"/>
+              </a:rPr>
+              <a:t>mpTokenIssuanceCreate …</a:t>
+            </a:r>
+          </a:p>
+        </p:txBody>
+      </p:sp>
+      <p:sp>
+        <p:nvSpPr>
+          <p:cNvPr id="7" name="">
+            <a:extLst xmlns:a="http://schemas.openxmlformats.org/drawingml/2006/main">
+              <a:ext uri="{FF2B5EF4-FFF2-40B4-BE49-F238E27FC236}">
+                <a16:creationId xmlns:a16="http://schemas.microsoft.com/office/drawing/2014/main" id="{82B6CEC5-03FE-4D48-8C41-119F9B234160}"/>
+              </a:ext>
+            </a:extLst>
+          </p:cNvPr>
+          <p:cNvSpPr>
+            <a:spLocks xmlns:a="http://schemas.openxmlformats.org/drawingml/2006/main" noGrp="1"/>
+          </p:cNvSpPr>
+          <p:nvPr/>
+        </p:nvSpPr>
+        <p:spPr>
+          <a:xfrm xmlns:a="http://schemas.openxmlformats.org/drawingml/2006/main">
+            <a:off x="6762750" y="4552950"/>
+            <a:ext cx="4667250" cy="419100"/>
+          </a:xfrm>
+          <a:prstGeom xmlns:a="http://schemas.openxmlformats.org/drawingml/2006/main" prst="rect">
+            <a:avLst/>
+          </a:prstGeom>
+          <a:noFill xmlns:a="http://schemas.openxmlformats.org/drawingml/2006/main"/>
+          <a:ln xmlns:a="http://schemas.openxmlformats.org/drawingml/2006/main" w="0">
+            <a:noFill/>
+          </a:ln>
+        </p:spPr>
+        <p:txBody>
+          <a:bodyPr xmlns:a="http://schemas.openxmlformats.org/drawingml/2006/main">
+            <a:noAutofit/>
+          </a:bodyPr>
+          <a:lstStyle xmlns:a="http://schemas.openxmlformats.org/drawingml/2006/main"/>
+          <a:p xmlns:a="http://schemas.openxmlformats.org/drawingml/2006/main">
+            <a:pPr>
+              <a:defRPr sz="2400" b="1">
                 <a:solidFill>
                   <a:srgbClr val="1D7479"/>
                 </a:solidFill>
-                <a:latin typeface="Helvetica Neue"/>
-                <a:ea typeface="Helvetica Neue"/>
-                <a:cs typeface="Helvetica Neue"/>
-              </a:defRPr>
-            </a:pPr>
-            <a:r>
-              <a:rPr sz="2250" b="1">
+                <a:latin typeface="Menlo"/>
+                <a:ea typeface="Menlo"/>
+                <a:cs typeface="Menlo"/>
+              </a:defRPr>
+            </a:pPr>
+            <a:r>
+              <a:rPr sz="2400" b="1">
                 <a:solidFill>
                   <a:srgbClr val="1D7479"/>
                 </a:solidFill>
-                <a:latin typeface="Helvetica Neue"/>
-                <a:ea typeface="Helvetica Neue"/>
-                <a:cs typeface="Helvetica Neue"/>
-              </a:rPr>
-              <a:t>MPT issuance</a:t>
-            </a:r>
-          </a:p>
-        </p:txBody>
-      </p:sp>
-      <p:sp>
-        <p:nvSpPr>
-          <p:cNvPr id="7" name="">
-            <a:extLst xmlns:a="http://schemas.openxmlformats.org/drawingml/2006/main">
-              <a:ext uri="{FF2B5EF4-FFF2-40B4-BE49-F238E27FC236}">
-                <a16:creationId xmlns:a16="http://schemas.microsoft.com/office/drawing/2014/main" id="{8D21AD98-AD59-4996-88D9-6AE14F8F8948}"/>
-              </a:ext>
-            </a:extLst>
-          </p:cNvPr>
-          <p:cNvSpPr>
-            <a:spLocks xmlns:a="http://schemas.openxmlformats.org/drawingml/2006/main" noGrp="1"/>
-          </p:cNvSpPr>
-          <p:nvPr/>
-        </p:nvSpPr>
-        <p:spPr>
-          <a:xfrm xmlns:a="http://schemas.openxmlformats.org/drawingml/2006/main">
-            <a:off x="3714750" y="3238500"/>
-            <a:ext cx="7715250" cy="590550"/>
-          </a:xfrm>
-          <a:prstGeom xmlns:a="http://schemas.openxmlformats.org/drawingml/2006/main" prst="rect">
-            <a:avLst/>
-          </a:prstGeom>
-          <a:noFill xmlns:a="http://schemas.openxmlformats.org/drawingml/2006/main"/>
-          <a:ln xmlns:a="http://schemas.openxmlformats.org/drawingml/2006/main" w="0">
-            <a:noFill/>
-          </a:ln>
-        </p:spPr>
-        <p:txBody>
-          <a:bodyPr xmlns:a="http://schemas.openxmlformats.org/drawingml/2006/main">
-            <a:noAutofit/>
-          </a:bodyPr>
-          <a:lstStyle xmlns:a="http://schemas.openxmlformats.org/drawingml/2006/main"/>
-          <a:p xmlns:a="http://schemas.openxmlformats.org/drawingml/2006/main">
-            <a:pPr>
-              <a:defRPr sz="2100" b="0">
-                <a:solidFill>
-                  <a:srgbClr val="172F3F"/>
-                </a:solidFill>
-                <a:latin typeface="Helvetica Neue"/>
-                <a:ea typeface="Helvetica Neue"/>
-                <a:cs typeface="Helvetica Neue"/>
-              </a:defRPr>
-            </a:pPr>
-            <a:r>
-              <a:rPr sz="2100" b="0">
-                <a:solidFill>
-                  <a:srgbClr val="172F3F"/>
-                </a:solidFill>
-                <a:latin typeface="Helvetica Neue"/>
-                <a:ea typeface="Helvetica Neue"/>
-                <a:cs typeface="Helvetica Neue"/>
-              </a:rPr>
-              <a:t>Create, inspect, update and confirm metadata</a:t>
+                <a:latin typeface="Menlo"/>
+                <a:ea typeface="Menlo"/>
+                <a:cs typeface="Menlo"/>
+              </a:rPr>
+              <a:t>client.command.</a:t>
             </a:r>
           </a:p>
         </p:txBody>
@@ -9421,282 +10417,77 @@
           <p:cNvPr id="8" name="">
             <a:extLst xmlns:a="http://schemas.openxmlformats.org/drawingml/2006/main">
               <a:ext uri="{FF2B5EF4-FFF2-40B4-BE49-F238E27FC236}">
-                <a16:creationId xmlns:a16="http://schemas.microsoft.com/office/drawing/2014/main" id="{76655B5F-6111-465A-BB5C-8C5DB53A150A}"/>
-              </a:ext>
-            </a:extLst>
-          </p:cNvPr>
-          <p:cNvSpPr>
-            <a:spLocks xmlns:a="http://schemas.openxmlformats.org/drawingml/2006/main" noGrp="1"/>
-          </p:cNvSpPr>
-          <p:nvPr/>
-        </p:nvSpPr>
-        <p:spPr>
-          <a:xfrm xmlns:a="http://schemas.openxmlformats.org/drawingml/2006/main">
-            <a:off x="685800" y="4000500"/>
-            <a:ext cx="2952750" cy="523875"/>
-          </a:xfrm>
-          <a:prstGeom xmlns:a="http://schemas.openxmlformats.org/drawingml/2006/main" prst="rect">
-            <a:avLst/>
-          </a:prstGeom>
-          <a:noFill xmlns:a="http://schemas.openxmlformats.org/drawingml/2006/main"/>
-          <a:ln xmlns:a="http://schemas.openxmlformats.org/drawingml/2006/main" w="0">
-            <a:noFill/>
-          </a:ln>
-        </p:spPr>
-        <p:txBody>
-          <a:bodyPr xmlns:a="http://schemas.openxmlformats.org/drawingml/2006/main">
-            <a:noAutofit/>
-          </a:bodyPr>
-          <a:lstStyle xmlns:a="http://schemas.openxmlformats.org/drawingml/2006/main"/>
-          <a:p xmlns:a="http://schemas.openxmlformats.org/drawingml/2006/main">
-            <a:pPr>
-              <a:defRPr sz="2250" b="1">
-                <a:solidFill>
-                  <a:srgbClr val="1D7479"/>
-                </a:solidFill>
-                <a:latin typeface="Helvetica Neue"/>
-                <a:ea typeface="Helvetica Neue"/>
-                <a:cs typeface="Helvetica Neue"/>
-              </a:defRPr>
-            </a:pPr>
-            <a:r>
-              <a:rPr sz="2250" b="1">
-                <a:solidFill>
-                  <a:srgbClr val="1D7479"/>
-                </a:solidFill>
-                <a:latin typeface="Helvetica Neue"/>
-                <a:ea typeface="Helvetica Neue"/>
-                <a:cs typeface="Helvetica Neue"/>
-              </a:rPr>
-              <a:t>Send XRP</a:t>
-            </a:r>
-          </a:p>
-        </p:txBody>
-      </p:sp>
-      <p:sp>
-        <p:nvSpPr>
-          <p:cNvPr id="9" name="">
-            <a:extLst xmlns:a="http://schemas.openxmlformats.org/drawingml/2006/main">
-              <a:ext uri="{FF2B5EF4-FFF2-40B4-BE49-F238E27FC236}">
-                <a16:creationId xmlns:a16="http://schemas.microsoft.com/office/drawing/2014/main" id="{DF80CFC8-7123-47C4-B7D0-3961F886DEA0}"/>
-              </a:ext>
-            </a:extLst>
-          </p:cNvPr>
-          <p:cNvSpPr>
-            <a:spLocks xmlns:a="http://schemas.openxmlformats.org/drawingml/2006/main" noGrp="1"/>
-          </p:cNvSpPr>
-          <p:nvPr/>
-        </p:nvSpPr>
-        <p:spPr>
-          <a:xfrm xmlns:a="http://schemas.openxmlformats.org/drawingml/2006/main">
-            <a:off x="3714750" y="4000500"/>
-            <a:ext cx="7715250" cy="590550"/>
-          </a:xfrm>
-          <a:prstGeom xmlns:a="http://schemas.openxmlformats.org/drawingml/2006/main" prst="rect">
-            <a:avLst/>
-          </a:prstGeom>
-          <a:noFill xmlns:a="http://schemas.openxmlformats.org/drawingml/2006/main"/>
-          <a:ln xmlns:a="http://schemas.openxmlformats.org/drawingml/2006/main" w="0">
-            <a:noFill/>
-          </a:ln>
-        </p:spPr>
-        <p:txBody>
-          <a:bodyPr xmlns:a="http://schemas.openxmlformats.org/drawingml/2006/main">
-            <a:noAutofit/>
-          </a:bodyPr>
-          <a:lstStyle xmlns:a="http://schemas.openxmlformats.org/drawingml/2006/main"/>
-          <a:p xmlns:a="http://schemas.openxmlformats.org/drawingml/2006/main">
-            <a:pPr>
-              <a:defRPr sz="2100" b="0">
-                <a:solidFill>
-                  <a:srgbClr val="172F3F"/>
-                </a:solidFill>
-                <a:latin typeface="Helvetica Neue"/>
-                <a:ea typeface="Helvetica Neue"/>
-                <a:cs typeface="Helvetica Neue"/>
-              </a:defRPr>
-            </a:pPr>
-            <a:r>
-              <a:rPr sz="2100" b="0">
-                <a:solidFill>
-                  <a:srgbClr val="172F3F"/>
-                </a:solidFill>
-                <a:latin typeface="Helvetica Neue"/>
-                <a:ea typeface="Helvetica Neue"/>
-                <a:cs typeface="Helvetica Neue"/>
-              </a:rPr>
-              <a:t>Prepare, sign and confirm the same transaction</a:t>
-            </a:r>
-          </a:p>
-        </p:txBody>
-      </p:sp>
-      <p:sp>
-        <p:nvSpPr>
-          <p:cNvPr id="10" name="">
-            <a:extLst xmlns:a="http://schemas.openxmlformats.org/drawingml/2006/main">
-              <a:ext uri="{FF2B5EF4-FFF2-40B4-BE49-F238E27FC236}">
-                <a16:creationId xmlns:a16="http://schemas.microsoft.com/office/drawing/2014/main" id="{29CBCED1-3215-47D6-A10D-A5F2CBEE5454}"/>
-              </a:ext>
-            </a:extLst>
-          </p:cNvPr>
-          <p:cNvSpPr>
-            <a:spLocks xmlns:a="http://schemas.openxmlformats.org/drawingml/2006/main" noGrp="1"/>
-          </p:cNvSpPr>
-          <p:nvPr/>
-        </p:nvSpPr>
-        <p:spPr>
-          <a:xfrm xmlns:a="http://schemas.openxmlformats.org/drawingml/2006/main">
-            <a:off x="685800" y="4762500"/>
-            <a:ext cx="2952750" cy="523875"/>
-          </a:xfrm>
-          <a:prstGeom xmlns:a="http://schemas.openxmlformats.org/drawingml/2006/main" prst="rect">
-            <a:avLst/>
-          </a:prstGeom>
-          <a:noFill xmlns:a="http://schemas.openxmlformats.org/drawingml/2006/main"/>
-          <a:ln xmlns:a="http://schemas.openxmlformats.org/drawingml/2006/main" w="0">
-            <a:noFill/>
-          </a:ln>
-        </p:spPr>
-        <p:txBody>
-          <a:bodyPr xmlns:a="http://schemas.openxmlformats.org/drawingml/2006/main">
-            <a:noAutofit/>
-          </a:bodyPr>
-          <a:lstStyle xmlns:a="http://schemas.openxmlformats.org/drawingml/2006/main"/>
-          <a:p xmlns:a="http://schemas.openxmlformats.org/drawingml/2006/main">
-            <a:pPr>
-              <a:defRPr sz="2250" b="1">
-                <a:solidFill>
-                  <a:srgbClr val="1D7479"/>
-                </a:solidFill>
-                <a:latin typeface="Helvetica Neue"/>
-                <a:ea typeface="Helvetica Neue"/>
-                <a:cs typeface="Helvetica Neue"/>
-              </a:defRPr>
-            </a:pPr>
-            <a:r>
-              <a:rPr sz="2250" b="1">
-                <a:solidFill>
-                  <a:srgbClr val="1D7479"/>
-                </a:solidFill>
-                <a:latin typeface="Helvetica Neue"/>
-                <a:ea typeface="Helvetica Neue"/>
-                <a:cs typeface="Helvetica Neue"/>
-              </a:rPr>
-              <a:t>Create AMM</a:t>
-            </a:r>
-          </a:p>
-        </p:txBody>
-      </p:sp>
-      <p:sp>
-        <p:nvSpPr>
-          <p:cNvPr id="11" name="">
-            <a:extLst xmlns:a="http://schemas.openxmlformats.org/drawingml/2006/main">
-              <a:ext uri="{FF2B5EF4-FFF2-40B4-BE49-F238E27FC236}">
-                <a16:creationId xmlns:a16="http://schemas.microsoft.com/office/drawing/2014/main" id="{D6619575-A4D9-4F56-B468-DA56867C992C}"/>
-              </a:ext>
-            </a:extLst>
-          </p:cNvPr>
-          <p:cNvSpPr>
-            <a:spLocks xmlns:a="http://schemas.openxmlformats.org/drawingml/2006/main" noGrp="1"/>
-          </p:cNvSpPr>
-          <p:nvPr/>
-        </p:nvSpPr>
-        <p:spPr>
-          <a:xfrm xmlns:a="http://schemas.openxmlformats.org/drawingml/2006/main">
-            <a:off x="3714750" y="4762500"/>
-            <a:ext cx="7715250" cy="590550"/>
-          </a:xfrm>
-          <a:prstGeom xmlns:a="http://schemas.openxmlformats.org/drawingml/2006/main" prst="rect">
-            <a:avLst/>
-          </a:prstGeom>
-          <a:noFill xmlns:a="http://schemas.openxmlformats.org/drawingml/2006/main"/>
-          <a:ln xmlns:a="http://schemas.openxmlformats.org/drawingml/2006/main" w="0">
-            <a:noFill/>
-          </a:ln>
-        </p:spPr>
-        <p:txBody>
-          <a:bodyPr xmlns:a="http://schemas.openxmlformats.org/drawingml/2006/main">
-            <a:noAutofit/>
-          </a:bodyPr>
-          <a:lstStyle xmlns:a="http://schemas.openxmlformats.org/drawingml/2006/main"/>
-          <a:p xmlns:a="http://schemas.openxmlformats.org/drawingml/2006/main">
-            <a:pPr>
-              <a:defRPr sz="2100" b="0">
-                <a:solidFill>
-                  <a:srgbClr val="172F3F"/>
-                </a:solidFill>
-                <a:latin typeface="Helvetica Neue"/>
-                <a:ea typeface="Helvetica Neue"/>
-                <a:cs typeface="Helvetica Neue"/>
-              </a:defRPr>
-            </a:pPr>
-            <a:r>
-              <a:rPr sz="2100" b="0">
-                <a:solidFill>
-                  <a:srgbClr val="172F3F"/>
-                </a:solidFill>
-                <a:latin typeface="Helvetica Neue"/>
-                <a:ea typeface="Helvetica Neue"/>
-                <a:cs typeface="Helvetica Neue"/>
-              </a:rPr>
-              <a:t>Typed setup and a checked result at each step</a:t>
-            </a:r>
-          </a:p>
-        </p:txBody>
-      </p:sp>
-      <p:sp>
-        <p:nvSpPr>
-          <p:cNvPr id="12" name="">
-            <a:extLst xmlns:a="http://schemas.openxmlformats.org/drawingml/2006/main">
-              <a:ext uri="{FF2B5EF4-FFF2-40B4-BE49-F238E27FC236}">
-                <a16:creationId xmlns:a16="http://schemas.microsoft.com/office/drawing/2014/main" id="{2BA76AEA-5A2F-45D0-9451-785287062776}"/>
-              </a:ext>
-            </a:extLst>
-          </p:cNvPr>
-          <p:cNvSpPr>
-            <a:spLocks xmlns:a="http://schemas.openxmlformats.org/drawingml/2006/main" noGrp="1"/>
-          </p:cNvSpPr>
-          <p:nvPr/>
-        </p:nvSpPr>
-        <p:spPr>
-          <a:xfrm xmlns:a="http://schemas.openxmlformats.org/drawingml/2006/main">
-            <a:off x="685800" y="5715000"/>
-            <a:ext cx="10668000" cy="514350"/>
-          </a:xfrm>
-          <a:prstGeom xmlns:a="http://schemas.openxmlformats.org/drawingml/2006/main" prst="rect">
-            <a:avLst/>
-          </a:prstGeom>
-          <a:noFill xmlns:a="http://schemas.openxmlformats.org/drawingml/2006/main"/>
-          <a:ln xmlns:a="http://schemas.openxmlformats.org/drawingml/2006/main" w="0">
-            <a:noFill/>
-          </a:ln>
-        </p:spPr>
-        <p:txBody>
-          <a:bodyPr xmlns:a="http://schemas.openxmlformats.org/drawingml/2006/main">
-            <a:noAutofit/>
-          </a:bodyPr>
-          <a:lstStyle xmlns:a="http://schemas.openxmlformats.org/drawingml/2006/main"/>
-          <a:p xmlns:a="http://schemas.openxmlformats.org/drawingml/2006/main">
-            <a:pPr>
-              <a:defRPr sz="1800" b="0">
-                <a:solidFill>
-                  <a:srgbClr val="506471"/>
-                </a:solidFill>
-                <a:latin typeface="Helvetica Neue"/>
-                <a:ea typeface="Helvetica Neue"/>
-                <a:cs typeface="Helvetica Neue"/>
-              </a:defRPr>
-            </a:pPr>
-            <a:r>
-              <a:rPr sz="1800" b="0">
-                <a:solidFill>
-                  <a:srgbClr val="506471"/>
-                </a:solidFill>
-                <a:latin typeface="Helvetica Neue"/>
-                <a:ea typeface="Helvetica Neue"/>
-                <a:cs typeface="Helvetica Neue"/>
-              </a:rPr>
-              <a:t>Five other legacy families and the original broad AMM example still need remediation.</a:t>
+                <a16:creationId xmlns:a16="http://schemas.microsoft.com/office/drawing/2014/main" id="{0B64696A-CB4A-4869-85A1-9B499DF08524}"/>
+              </a:ext>
+            </a:extLst>
+          </p:cNvPr>
+          <p:cNvSpPr>
+            <a:spLocks xmlns:a="http://schemas.openxmlformats.org/drawingml/2006/main" noGrp="1"/>
+          </p:cNvSpPr>
+          <p:nvPr/>
+        </p:nvSpPr>
+        <p:spPr>
+          <a:xfrm xmlns:a="http://schemas.openxmlformats.org/drawingml/2006/main">
+            <a:off x="6762750" y="5086350"/>
+            <a:ext cx="4667250" cy="762000"/>
+          </a:xfrm>
+          <a:prstGeom xmlns:a="http://schemas.openxmlformats.org/drawingml/2006/main" prst="rect">
+            <a:avLst/>
+          </a:prstGeom>
+          <a:noFill xmlns:a="http://schemas.openxmlformats.org/drawingml/2006/main"/>
+          <a:ln xmlns:a="http://schemas.openxmlformats.org/drawingml/2006/main" w="0">
+            <a:noFill/>
+          </a:ln>
+        </p:spPr>
+        <p:txBody>
+          <a:bodyPr xmlns:a="http://schemas.openxmlformats.org/drawingml/2006/main">
+            <a:noAutofit/>
+          </a:bodyPr>
+          <a:lstStyle xmlns:a="http://schemas.openxmlformats.org/drawingml/2006/main"/>
+          <a:p xmlns:a="http://schemas.openxmlformats.org/drawingml/2006/main">
+            <a:pPr>
+              <a:defRPr sz="2025" b="0">
+                <a:solidFill>
+                  <a:srgbClr val="172F3F"/>
+                </a:solidFill>
+                <a:latin typeface="Helvetica Neue"/>
+                <a:ea typeface="Helvetica Neue"/>
+                <a:cs typeface="Helvetica Neue"/>
+              </a:defRPr>
+            </a:pPr>
+            <a:r>
+              <a:rPr sz="2025" b="0">
+                <a:solidFill>
+                  <a:srgbClr val="172F3F"/>
+                </a:solidFill>
+                <a:latin typeface="Helvetica Neue"/>
+                <a:ea typeface="Helvetica Neue"/>
+                <a:cs typeface="Helvetica Neue"/>
+              </a:rPr>
+              <a:t>45 request methods</a:t>
+            </a:r>
+          </a:p>
+          <a:p xmlns:a="http://schemas.openxmlformats.org/drawingml/2006/main">
+            <a:pPr>
+              <a:defRPr sz="2025" b="0">
+                <a:solidFill>
+                  <a:srgbClr val="172F3F"/>
+                </a:solidFill>
+                <a:latin typeface="Helvetica Neue"/>
+                <a:ea typeface="Helvetica Neue"/>
+                <a:cs typeface="Helvetica Neue"/>
+              </a:defRPr>
+            </a:pPr>
+            <a:r>
+              <a:rPr sz="2025" b="0">
+                <a:solidFill>
+                  <a:srgbClr val="172F3F"/>
+                </a:solidFill>
+                <a:latin typeface="Helvetica Neue"/>
+                <a:ea typeface="Helvetica Neue"/>
+                <a:cs typeface="Helvetica Neue"/>
+              </a:rPr>
+              <a:t>accountInfo, ledgerEntry, tx …</a:t>
             </a:r>
           </a:p>
         </p:txBody>
@@ -9704,7 +10495,7 @@
     </p:spTree>
     <p:extLst>
       <p:ext uri="{BB962C8B-B14F-4D97-AF65-F5344CB8AC3E}">
-        <p14:creationId xmlns:p14="http://schemas.microsoft.com/office/powerpoint/2010/main" val="105425641"/>
+        <p14:creationId xmlns:p14="http://schemas.microsoft.com/office/powerpoint/2010/main" val="1111584951"/>
       </p:ext>
     </p:extLst>
   </p:cSld>
